--- a/assets/powerpoints/module-logement/A2-le-vocabulaire-du-logement.pptx
+++ b/assets/powerpoints/module-logement/A2-le-vocabulaire-du-logement.pptx
@@ -4791,7 +4791,7 @@
                 </a:solidFill>
                 <a:latin typeface="Verdana"/>
               </a:rPr>
-              <a:t>SÉANCE A2  ·  MODULE 8</a:t>
+              <a:t>SÉANCE A2  ·  MODULE 9</a:t>
             </a:r>
           </a:p>
         </p:txBody>

--- a/assets/powerpoints/module-logement/A2-le-vocabulaire-du-logement.pptx
+++ b/assets/powerpoints/module-logement/A2-le-vocabulaire-du-logement.pptx
@@ -23,6 +23,13 @@
     <p:sldId id="271" r:id="rId23"/>
     <p:sldId id="272" r:id="rId24"/>
     <p:sldId id="273" r:id="rId25"/>
+    <p:sldId id="274" r:id="rId26"/>
+    <p:sldId id="275" r:id="rId27"/>
+    <p:sldId id="276" r:id="rId28"/>
+    <p:sldId id="277" r:id="rId29"/>
+    <p:sldId id="278" r:id="rId30"/>
+    <p:sldId id="279" r:id="rId31"/>
+    <p:sldId id="280" r:id="rId32"/>
   </p:sldIdLst>
   <p:sldSz cx="12191695" cy="6858000" type="screen4x3"/>
   <p:notesSz cx="6858000" cy="9144000"/>
@@ -1149,7 +1156,77 @@
           <a:lstStyle/>
           <a:p>
             <a:r>
-              <a:t>Ce billet est un exercice utile hors de la classe. Suggérer de le refaire chaque fois qu'on cherche un logement.</a:t>
+              <a:t>Faire dire les deux mots devant la caméra du téléphone. Les lèvres se voient : rondes pour « on », plates pour « an ».</a:t>
+            </a:r>
+          </a:p>
+        </p:txBody>
+      </p:sp>
+      <p:sp>
+        <p:nvSpPr>
+          <p:cNvPr id="4" name="Slide Number Placeholder 3"/>
+          <p:cNvSpPr>
+            <a:spLocks noGrp="1"/>
+          </p:cNvSpPr>
+          <p:nvPr>
+            <p:ph type="sldNum" idx="5" sz="quarter"/>
+          </p:nvPr>
+        </p:nvSpPr>
+        <p:spPr/>
+      </p:sp>
+    </p:spTree>
+  </p:cSld>
+  <p:clrMapOvr>
+    <a:masterClrMapping/>
+  </p:clrMapOvr>
+</p:notes>
+</file>
+
+<file path=ppt/notesSlides/notesSlide19.xml><?xml version="1.0" encoding="utf-8"?>
+<p:notes xmlns:a="http://schemas.openxmlformats.org/drawingml/2006/main" xmlns:p="http://schemas.openxmlformats.org/presentationml/2006/main" xmlns:r="http://schemas.openxmlformats.org/officeDocument/2006/relationships">
+  <p:cSld>
+    <p:spTree>
+      <p:nvGrpSpPr>
+        <p:cNvPr id="1" name=""/>
+        <p:cNvGrpSpPr/>
+        <p:nvPr/>
+      </p:nvGrpSpPr>
+      <p:grpSpPr>
+        <a:xfrm>
+          <a:off x="0" y="0"/>
+          <a:ext cx="0" cy="0"/>
+          <a:chOff x="0" y="0"/>
+          <a:chExt cx="0" cy="0"/>
+        </a:xfrm>
+      </p:grpSpPr>
+      <p:sp>
+        <p:nvSpPr>
+          <p:cNvPr id="2" name="Slide Image Placeholder 1"/>
+          <p:cNvSpPr>
+            <a:spLocks noGrp="1"/>
+          </p:cNvSpPr>
+          <p:nvPr>
+            <p:ph type="sldImg" idx="2"/>
+          </p:nvPr>
+        </p:nvSpPr>
+        <p:spPr/>
+      </p:sp>
+      <p:sp>
+        <p:nvSpPr>
+          <p:cNvPr id="3" name="Notes Placeholder 2"/>
+          <p:cNvSpPr>
+            <a:spLocks noGrp="1"/>
+          </p:cNvSpPr>
+          <p:nvPr>
+            <p:ph type="body" idx="3" sz="quarter"/>
+          </p:nvPr>
+        </p:nvSpPr>
+        <p:spPr/>
+        <p:txBody>
+          <a:bodyPr/>
+          <a:lstStyle/>
+          <a:p>
+            <a:r>
+              <a:t>Faire chercher au groupe un autre mot du module pour chaque case avant de montrer la colonne de droite.</a:t>
             </a:r>
           </a:p>
         </p:txBody>
@@ -1220,6 +1297,426 @@
           <a:p>
             <a:r>
               <a:t>Lire les objectifs à voix haute. Y revenir au billet de sortie.</a:t>
+            </a:r>
+          </a:p>
+        </p:txBody>
+      </p:sp>
+      <p:sp>
+        <p:nvSpPr>
+          <p:cNvPr id="4" name="Slide Number Placeholder 3"/>
+          <p:cNvSpPr>
+            <a:spLocks noGrp="1"/>
+          </p:cNvSpPr>
+          <p:nvPr>
+            <p:ph type="sldNum" idx="5" sz="quarter"/>
+          </p:nvPr>
+        </p:nvSpPr>
+        <p:spPr/>
+      </p:sp>
+    </p:spTree>
+  </p:cSld>
+  <p:clrMapOvr>
+    <a:masterClrMapping/>
+  </p:clrMapOvr>
+</p:notes>
+</file>
+
+<file path=ppt/notesSlides/notesSlide20.xml><?xml version="1.0" encoding="utf-8"?>
+<p:notes xmlns:a="http://schemas.openxmlformats.org/drawingml/2006/main" xmlns:p="http://schemas.openxmlformats.org/presentationml/2006/main" xmlns:r="http://schemas.openxmlformats.org/officeDocument/2006/relationships">
+  <p:cSld>
+    <p:spTree>
+      <p:nvGrpSpPr>
+        <p:cNvPr id="1" name=""/>
+        <p:cNvGrpSpPr/>
+        <p:nvPr/>
+      </p:nvGrpSpPr>
+      <p:grpSpPr>
+        <a:xfrm>
+          <a:off x="0" y="0"/>
+          <a:ext cx="0" cy="0"/>
+          <a:chOff x="0" y="0"/>
+          <a:chExt cx="0" cy="0"/>
+        </a:xfrm>
+      </p:grpSpPr>
+      <p:sp>
+        <p:nvSpPr>
+          <p:cNvPr id="2" name="Slide Image Placeholder 1"/>
+          <p:cNvSpPr>
+            <a:spLocks noGrp="1"/>
+          </p:cNvSpPr>
+          <p:nvPr>
+            <p:ph type="sldImg" idx="2"/>
+          </p:nvPr>
+        </p:nvSpPr>
+        <p:spPr/>
+      </p:sp>
+      <p:sp>
+        <p:nvSpPr>
+          <p:cNvPr id="3" name="Notes Placeholder 2"/>
+          <p:cNvSpPr>
+            <a:spLocks noGrp="1"/>
+          </p:cNvSpPr>
+          <p:nvPr>
+            <p:ph type="body" idx="3" sz="quarter"/>
+          </p:nvPr>
+        </p:nvSpPr>
+        <p:spPr/>
+        <p:txBody>
+          <a:bodyPr/>
+          <a:lstStyle/>
+          <a:p>
+            <a:r>
+              <a:t>Dire les deux mots en alternance, cinq allers-retours. Puis demander au groupe de les dire à son tour pendant que l'enseignant devine.</a:t>
+            </a:r>
+          </a:p>
+        </p:txBody>
+      </p:sp>
+      <p:sp>
+        <p:nvSpPr>
+          <p:cNvPr id="4" name="Slide Number Placeholder 3"/>
+          <p:cNvSpPr>
+            <a:spLocks noGrp="1"/>
+          </p:cNvSpPr>
+          <p:nvPr>
+            <p:ph type="sldNum" idx="5" sz="quarter"/>
+          </p:nvPr>
+        </p:nvSpPr>
+        <p:spPr/>
+      </p:sp>
+    </p:spTree>
+  </p:cSld>
+  <p:clrMapOvr>
+    <a:masterClrMapping/>
+  </p:clrMapOvr>
+</p:notes>
+</file>
+
+<file path=ppt/notesSlides/notesSlide21.xml><?xml version="1.0" encoding="utf-8"?>
+<p:notes xmlns:a="http://schemas.openxmlformats.org/drawingml/2006/main" xmlns:p="http://schemas.openxmlformats.org/presentationml/2006/main" xmlns:r="http://schemas.openxmlformats.org/officeDocument/2006/relationships">
+  <p:cSld>
+    <p:spTree>
+      <p:nvGrpSpPr>
+        <p:cNvPr id="1" name=""/>
+        <p:cNvGrpSpPr/>
+        <p:nvPr/>
+      </p:nvGrpSpPr>
+      <p:grpSpPr>
+        <a:xfrm>
+          <a:off x="0" y="0"/>
+          <a:ext cx="0" cy="0"/>
+          <a:chOff x="0" y="0"/>
+          <a:chExt cx="0" cy="0"/>
+        </a:xfrm>
+      </p:grpSpPr>
+      <p:sp>
+        <p:nvSpPr>
+          <p:cNvPr id="2" name="Slide Image Placeholder 1"/>
+          <p:cNvSpPr>
+            <a:spLocks noGrp="1"/>
+          </p:cNvSpPr>
+          <p:nvPr>
+            <p:ph type="sldImg" idx="2"/>
+          </p:nvPr>
+        </p:nvSpPr>
+        <p:spPr/>
+      </p:sp>
+      <p:sp>
+        <p:nvSpPr>
+          <p:cNvPr id="3" name="Notes Placeholder 2"/>
+          <p:cNvSpPr>
+            <a:spLocks noGrp="1"/>
+          </p:cNvSpPr>
+          <p:nvPr>
+            <p:ph type="body" idx="3" sz="quarter"/>
+          </p:nvPr>
+        </p:nvSpPr>
+        <p:spPr/>
+        <p:txBody>
+          <a:bodyPr/>
+          <a:lstStyle/>
+          <a:p>
+            <a:r>
+              <a:t>Les huit mots de l'exercice de sons du module en ligne, dans le même ordre. Dire chaque mot deux fois, sans montrer l'orthographe.</a:t>
+            </a:r>
+          </a:p>
+        </p:txBody>
+      </p:sp>
+      <p:sp>
+        <p:nvSpPr>
+          <p:cNvPr id="4" name="Slide Number Placeholder 3"/>
+          <p:cNvSpPr>
+            <a:spLocks noGrp="1"/>
+          </p:cNvSpPr>
+          <p:nvPr>
+            <p:ph type="sldNum" idx="5" sz="quarter"/>
+          </p:nvPr>
+        </p:nvSpPr>
+        <p:spPr/>
+      </p:sp>
+    </p:spTree>
+  </p:cSld>
+  <p:clrMapOvr>
+    <a:masterClrMapping/>
+  </p:clrMapOvr>
+</p:notes>
+</file>
+
+<file path=ppt/notesSlides/notesSlide22.xml><?xml version="1.0" encoding="utf-8"?>
+<p:notes xmlns:a="http://schemas.openxmlformats.org/drawingml/2006/main" xmlns:p="http://schemas.openxmlformats.org/presentationml/2006/main" xmlns:r="http://schemas.openxmlformats.org/officeDocument/2006/relationships">
+  <p:cSld>
+    <p:spTree>
+      <p:nvGrpSpPr>
+        <p:cNvPr id="1" name=""/>
+        <p:cNvGrpSpPr/>
+        <p:nvPr/>
+      </p:nvGrpSpPr>
+      <p:grpSpPr>
+        <a:xfrm>
+          <a:off x="0" y="0"/>
+          <a:ext cx="0" cy="0"/>
+          <a:chOff x="0" y="0"/>
+          <a:chExt cx="0" cy="0"/>
+        </a:xfrm>
+      </p:grpSpPr>
+      <p:sp>
+        <p:nvSpPr>
+          <p:cNvPr id="2" name="Slide Image Placeholder 1"/>
+          <p:cNvSpPr>
+            <a:spLocks noGrp="1"/>
+          </p:cNvSpPr>
+          <p:nvPr>
+            <p:ph type="sldImg" idx="2"/>
+          </p:nvPr>
+        </p:nvSpPr>
+        <p:spPr/>
+      </p:sp>
+      <p:sp>
+        <p:nvSpPr>
+          <p:cNvPr id="3" name="Notes Placeholder 2"/>
+          <p:cNvSpPr>
+            <a:spLocks noGrp="1"/>
+          </p:cNvSpPr>
+          <p:nvPr>
+            <p:ph type="body" idx="3" sz="quarter"/>
+          </p:nvPr>
+        </p:nvSpPr>
+        <p:spPr/>
+        <p:txBody>
+          <a:bodyPr/>
+          <a:lstStyle/>
+          <a:p>
+            <a:r>
+              <a:t>Corriger en groupe. Donner la bonne réponse, sans revenir sur qui s'est trompé.</a:t>
+            </a:r>
+          </a:p>
+        </p:txBody>
+      </p:sp>
+      <p:sp>
+        <p:nvSpPr>
+          <p:cNvPr id="4" name="Slide Number Placeholder 3"/>
+          <p:cNvSpPr>
+            <a:spLocks noGrp="1"/>
+          </p:cNvSpPr>
+          <p:nvPr>
+            <p:ph type="sldNum" idx="5" sz="quarter"/>
+          </p:nvPr>
+        </p:nvSpPr>
+        <p:spPr/>
+      </p:sp>
+    </p:spTree>
+  </p:cSld>
+  <p:clrMapOvr>
+    <a:masterClrMapping/>
+  </p:clrMapOvr>
+</p:notes>
+</file>
+
+<file path=ppt/notesSlides/notesSlide23.xml><?xml version="1.0" encoding="utf-8"?>
+<p:notes xmlns:a="http://schemas.openxmlformats.org/drawingml/2006/main" xmlns:p="http://schemas.openxmlformats.org/presentationml/2006/main" xmlns:r="http://schemas.openxmlformats.org/officeDocument/2006/relationships">
+  <p:cSld>
+    <p:spTree>
+      <p:nvGrpSpPr>
+        <p:cNvPr id="1" name=""/>
+        <p:cNvGrpSpPr/>
+        <p:nvPr/>
+      </p:nvGrpSpPr>
+      <p:grpSpPr>
+        <a:xfrm>
+          <a:off x="0" y="0"/>
+          <a:ext cx="0" cy="0"/>
+          <a:chOff x="0" y="0"/>
+          <a:chExt cx="0" cy="0"/>
+        </a:xfrm>
+      </p:grpSpPr>
+      <p:sp>
+        <p:nvSpPr>
+          <p:cNvPr id="2" name="Slide Image Placeholder 1"/>
+          <p:cNvSpPr>
+            <a:spLocks noGrp="1"/>
+          </p:cNvSpPr>
+          <p:nvPr>
+            <p:ph type="sldImg" idx="2"/>
+          </p:nvPr>
+        </p:nvSpPr>
+        <p:spPr/>
+      </p:sp>
+      <p:sp>
+        <p:nvSpPr>
+          <p:cNvPr id="3" name="Notes Placeholder 2"/>
+          <p:cNvSpPr>
+            <a:spLocks noGrp="1"/>
+          </p:cNvSpPr>
+          <p:nvPr>
+            <p:ph type="body" idx="3" sz="quarter"/>
+          </p:nvPr>
+        </p:nvSpPr>
+        <p:spPr/>
+        <p:txBody>
+          <a:bodyPr/>
+          <a:lstStyle/>
+          <a:p>
+            <a:r>
+              <a:t>Ces phrases reprennent le vocabulaire de la visite de la rue Galt : on révise le sens en même temps que le son.</a:t>
+            </a:r>
+          </a:p>
+        </p:txBody>
+      </p:sp>
+      <p:sp>
+        <p:nvSpPr>
+          <p:cNvPr id="4" name="Slide Number Placeholder 3"/>
+          <p:cNvSpPr>
+            <a:spLocks noGrp="1"/>
+          </p:cNvSpPr>
+          <p:nvPr>
+            <p:ph type="sldNum" idx="5" sz="quarter"/>
+          </p:nvPr>
+        </p:nvSpPr>
+        <p:spPr/>
+      </p:sp>
+    </p:spTree>
+  </p:cSld>
+  <p:clrMapOvr>
+    <a:masterClrMapping/>
+  </p:clrMapOvr>
+</p:notes>
+</file>
+
+<file path=ppt/notesSlides/notesSlide24.xml><?xml version="1.0" encoding="utf-8"?>
+<p:notes xmlns:a="http://schemas.openxmlformats.org/drawingml/2006/main" xmlns:p="http://schemas.openxmlformats.org/presentationml/2006/main" xmlns:r="http://schemas.openxmlformats.org/officeDocument/2006/relationships">
+  <p:cSld>
+    <p:spTree>
+      <p:nvGrpSpPr>
+        <p:cNvPr id="1" name=""/>
+        <p:cNvGrpSpPr/>
+        <p:nvPr/>
+      </p:nvGrpSpPr>
+      <p:grpSpPr>
+        <a:xfrm>
+          <a:off x="0" y="0"/>
+          <a:ext cx="0" cy="0"/>
+          <a:chOff x="0" y="0"/>
+          <a:chExt cx="0" cy="0"/>
+        </a:xfrm>
+      </p:grpSpPr>
+      <p:sp>
+        <p:nvSpPr>
+          <p:cNvPr id="2" name="Slide Image Placeholder 1"/>
+          <p:cNvSpPr>
+            <a:spLocks noGrp="1"/>
+          </p:cNvSpPr>
+          <p:nvPr>
+            <p:ph type="sldImg" idx="2"/>
+          </p:nvPr>
+        </p:nvSpPr>
+        <p:spPr/>
+      </p:sp>
+      <p:sp>
+        <p:nvSpPr>
+          <p:cNvPr id="3" name="Notes Placeholder 2"/>
+          <p:cNvSpPr>
+            <a:spLocks noGrp="1"/>
+          </p:cNvSpPr>
+          <p:nvPr>
+            <p:ph type="body" idx="3" sz="quarter"/>
+          </p:nvPr>
+        </p:nvSpPr>
+        <p:spPr/>
+        <p:txBody>
+          <a:bodyPr/>
+          <a:lstStyle/>
+          <a:p>
+            <a:r>
+              <a:t>Corriger en groupe. Donner la bonne réponse, sans revenir sur qui s'est trompé.</a:t>
+            </a:r>
+          </a:p>
+        </p:txBody>
+      </p:sp>
+      <p:sp>
+        <p:nvSpPr>
+          <p:cNvPr id="4" name="Slide Number Placeholder 3"/>
+          <p:cNvSpPr>
+            <a:spLocks noGrp="1"/>
+          </p:cNvSpPr>
+          <p:nvPr>
+            <p:ph type="sldNum" idx="5" sz="quarter"/>
+          </p:nvPr>
+        </p:nvSpPr>
+        <p:spPr/>
+      </p:sp>
+    </p:spTree>
+  </p:cSld>
+  <p:clrMapOvr>
+    <a:masterClrMapping/>
+  </p:clrMapOvr>
+</p:notes>
+</file>
+
+<file path=ppt/notesSlides/notesSlide25.xml><?xml version="1.0" encoding="utf-8"?>
+<p:notes xmlns:a="http://schemas.openxmlformats.org/drawingml/2006/main" xmlns:p="http://schemas.openxmlformats.org/presentationml/2006/main" xmlns:r="http://schemas.openxmlformats.org/officeDocument/2006/relationships">
+  <p:cSld>
+    <p:spTree>
+      <p:nvGrpSpPr>
+        <p:cNvPr id="1" name=""/>
+        <p:cNvGrpSpPr/>
+        <p:nvPr/>
+      </p:nvGrpSpPr>
+      <p:grpSpPr>
+        <a:xfrm>
+          <a:off x="0" y="0"/>
+          <a:ext cx="0" cy="0"/>
+          <a:chOff x="0" y="0"/>
+          <a:chExt cx="0" cy="0"/>
+        </a:xfrm>
+      </p:grpSpPr>
+      <p:sp>
+        <p:nvSpPr>
+          <p:cNvPr id="2" name="Slide Image Placeholder 1"/>
+          <p:cNvSpPr>
+            <a:spLocks noGrp="1"/>
+          </p:cNvSpPr>
+          <p:nvPr>
+            <p:ph type="sldImg" idx="2"/>
+          </p:nvPr>
+        </p:nvSpPr>
+        <p:spPr/>
+      </p:sp>
+      <p:sp>
+        <p:nvSpPr>
+          <p:cNvPr id="3" name="Notes Placeholder 2"/>
+          <p:cNvSpPr>
+            <a:spLocks noGrp="1"/>
+          </p:cNvSpPr>
+          <p:nvPr>
+            <p:ph type="body" idx="3" sz="quarter"/>
+          </p:nvPr>
+        </p:nvSpPr>
+        <p:spPr/>
+        <p:txBody>
+          <a:bodyPr/>
+          <a:lstStyle/>
+          <a:p>
+            <a:r>
+              <a:t>Ce billet est un exercice utile hors de la classe. Suggérer de le refaire chaque fois qu'on cherche un logement.</a:t>
             </a:r>
           </a:p>
         </p:txBody>
@@ -6271,7 +6768,7 @@
                 </a:solidFill>
                 <a:latin typeface="Verdana"/>
               </a:rPr>
-              <a:t>PRATIQUE · 2 DE 4</a:t>
+              <a:t>PRATIQUE · 2 DE 6</a:t>
             </a:r>
           </a:p>
         </p:txBody>
@@ -9604,7 +10101,7 @@
                 </a:solidFill>
                 <a:latin typeface="Verdana"/>
               </a:rPr>
-              <a:t>PRATIQUE · 3 DE 4</a:t>
+              <a:t>PRATIQUE · 3 DE 6</a:t>
             </a:r>
           </a:p>
         </p:txBody>
@@ -11494,7 +11991,7 @@
                 </a:solidFill>
                 <a:latin typeface="Verdana"/>
               </a:rPr>
-              <a:t>PRATIQUE · 4 DE 4</a:t>
+              <a:t>PRATIQUE · 4 DE 6</a:t>
             </a:r>
           </a:p>
         </p:txBody>
@@ -12389,7 +12886,234 @@
       </p:sp>
       <p:sp>
         <p:nvSpPr>
-          <p:cNvPr id="5" name="Rectangle 4"/>
+          <p:cNvPr id="5" name="TextBox 4"/>
+          <p:cNvSpPr txBox="1"/>
+          <p:nvPr/>
+        </p:nvSpPr>
+        <p:spPr>
+          <a:xfrm>
+            <a:off x="566928" y="420624"/>
+            <a:ext cx="11057839" cy="237744"/>
+          </a:xfrm>
+          <a:prstGeom prst="rect">
+            <a:avLst/>
+          </a:prstGeom>
+          <a:noFill/>
+        </p:spPr>
+        <p:txBody>
+          <a:bodyPr wrap="square" lIns="0" rIns="0" tIns="0" bIns="0" anchor="t">
+            <a:spAutoFit/>
+          </a:bodyPr>
+          <a:lstStyle/>
+          <a:p>
+            <a:pPr algn="l">
+              <a:lnSpc>
+                <a:spcPct val="135000"/>
+              </a:lnSpc>
+            </a:pPr>
+            <a:r>
+              <a:rPr sz="1300" b="1" i="0" spc="156">
+                <a:solidFill>
+                  <a:srgbClr val="166534"/>
+                </a:solidFill>
+                <a:latin typeface="Verdana"/>
+              </a:rPr>
+              <a:t>DEUX SONS NASAUX DE LA VISITE</a:t>
+            </a:r>
+          </a:p>
+        </p:txBody>
+      </p:sp>
+      <p:sp>
+        <p:nvSpPr>
+          <p:cNvPr id="6" name="Rounded Rectangle 5"/>
+          <p:cNvSpPr/>
+          <p:nvPr/>
+        </p:nvSpPr>
+        <p:spPr>
+          <a:xfrm>
+            <a:off x="566928" y="1225296"/>
+            <a:ext cx="11057839" cy="1967991"/>
+          </a:xfrm>
+          <a:prstGeom prst="roundRect">
+            <a:avLst>
+              <a:gd name="adj" fmla="val 7434"/>
+            </a:avLst>
+          </a:prstGeom>
+          <a:solidFill>
+            <a:srgbClr val="E3F1E7"/>
+          </a:solidFill>
+          <a:ln w="12700">
+            <a:solidFill>
+              <a:srgbClr val="EAEAE8"/>
+            </a:solidFill>
+          </a:ln>
+          <a:effectLst/>
+        </p:spPr>
+        <p:style>
+          <a:lnRef idx="1">
+            <a:schemeClr val="accent1"/>
+          </a:lnRef>
+          <a:fillRef idx="3">
+            <a:schemeClr val="accent1"/>
+          </a:fillRef>
+          <a:effectRef idx="2">
+            <a:schemeClr val="accent1"/>
+          </a:effectRef>
+          <a:fontRef idx="minor">
+            <a:schemeClr val="lt1"/>
+          </a:fontRef>
+        </p:style>
+        <p:txBody>
+          <a:bodyPr rtlCol="0" anchor="ctr"/>
+          <a:lstStyle/>
+          <a:p/>
+        </p:txBody>
+      </p:sp>
+      <p:sp>
+        <p:nvSpPr>
+          <p:cNvPr id="7" name="TextBox 6"/>
+          <p:cNvSpPr txBox="1"/>
+          <p:nvPr/>
+        </p:nvSpPr>
+        <p:spPr>
+          <a:xfrm>
+            <a:off x="1298448" y="1682496"/>
+            <a:ext cx="9594799" cy="1145032"/>
+          </a:xfrm>
+          <a:prstGeom prst="rect">
+            <a:avLst/>
+          </a:prstGeom>
+          <a:noFill/>
+        </p:spPr>
+        <p:txBody>
+          <a:bodyPr wrap="square" lIns="0" rIns="0" tIns="0" bIns="0" anchor="t">
+            <a:spAutoFit/>
+          </a:bodyPr>
+          <a:lstStyle/>
+          <a:p>
+            <a:pPr algn="l">
+              <a:lnSpc>
+                <a:spcPct val="122000"/>
+              </a:lnSpc>
+            </a:pPr>
+            <a:r>
+              <a:rPr sz="3400" b="1" i="0">
+                <a:solidFill>
+                  <a:srgbClr val="17181A"/>
+                </a:solidFill>
+                <a:latin typeface="Verdana"/>
+              </a:rPr>
+              <a:t>Le son « an » garde les lèvres plates ; le son « on » les arrondit.</a:t>
+            </a:r>
+          </a:p>
+        </p:txBody>
+      </p:sp>
+      <p:sp>
+        <p:nvSpPr>
+          <p:cNvPr id="8" name="Rounded Rectangle 7"/>
+          <p:cNvSpPr/>
+          <p:nvPr/>
+        </p:nvSpPr>
+        <p:spPr>
+          <a:xfrm>
+            <a:off x="566928" y="3467607"/>
+            <a:ext cx="11057839" cy="1671827"/>
+          </a:xfrm>
+          <a:prstGeom prst="roundRect">
+            <a:avLst>
+              <a:gd name="adj" fmla="val 8751"/>
+            </a:avLst>
+          </a:prstGeom>
+          <a:solidFill>
+            <a:srgbClr val="FFFFFF"/>
+          </a:solidFill>
+          <a:ln w="12700">
+            <a:solidFill>
+              <a:srgbClr val="EAEAE8"/>
+            </a:solidFill>
+          </a:ln>
+          <a:effectLst/>
+        </p:spPr>
+        <p:style>
+          <a:lnRef idx="1">
+            <a:schemeClr val="accent1"/>
+          </a:lnRef>
+          <a:fillRef idx="3">
+            <a:schemeClr val="accent1"/>
+          </a:fillRef>
+          <a:effectRef idx="2">
+            <a:schemeClr val="accent1"/>
+          </a:effectRef>
+          <a:fontRef idx="minor">
+            <a:schemeClr val="lt1"/>
+          </a:fontRef>
+        </p:style>
+        <p:txBody>
+          <a:bodyPr rtlCol="0" anchor="ctr"/>
+          <a:lstStyle/>
+          <a:p/>
+        </p:txBody>
+      </p:sp>
+      <p:sp>
+        <p:nvSpPr>
+          <p:cNvPr id="9" name="TextBox 8"/>
+          <p:cNvSpPr txBox="1"/>
+          <p:nvPr/>
+        </p:nvSpPr>
+        <p:spPr>
+          <a:xfrm>
+            <a:off x="969264" y="3741927"/>
+            <a:ext cx="10234879" cy="1214627"/>
+          </a:xfrm>
+          <a:prstGeom prst="rect">
+            <a:avLst/>
+          </a:prstGeom>
+          <a:noFill/>
+        </p:spPr>
+        <p:txBody>
+          <a:bodyPr wrap="square" lIns="0" rIns="0" tIns="0" bIns="0" anchor="t">
+            <a:spAutoFit/>
+          </a:bodyPr>
+          <a:lstStyle/>
+          <a:p>
+            <a:pPr algn="l">
+              <a:lnSpc>
+                <a:spcPct val="145000"/>
+              </a:lnSpc>
+            </a:pPr>
+            <a:r>
+              <a:rPr sz="2000" b="0" i="0">
+                <a:solidFill>
+                  <a:srgbClr val="4B4F52"/>
+                </a:solidFill>
+                <a:latin typeface="Verdana"/>
+              </a:rPr>
+              <a:t>« Chambre » et « salon » sont deux pièces, deux sons. Pendant une visite, se tromper de voyelle nasale change la pièce dont on parle — et parfois le montant du loyer.</a:t>
+            </a:r>
+          </a:p>
+        </p:txBody>
+      </p:sp>
+    </p:spTree>
+  </p:cSld>
+  <p:clrMapOvr>
+    <a:masterClrMapping/>
+  </p:clrMapOvr>
+</p:sld>
+</file>
+
+<file path=ppt/slides/slide19.xml><?xml version="1.0" encoding="utf-8"?>
+<p:sld xmlns:a="http://schemas.openxmlformats.org/drawingml/2006/main" xmlns:p="http://schemas.openxmlformats.org/presentationml/2006/main" xmlns:r="http://schemas.openxmlformats.org/officeDocument/2006/relationships">
+  <p:cSld>
+    <p:spTree>
+      <p:nvGrpSpPr>
+        <p:cNvPr id="1" name=""/>
+        <p:cNvGrpSpPr/>
+        <p:nvPr/>
+      </p:nvGrpSpPr>
+      <p:grpSpPr/>
+      <p:sp>
+        <p:nvSpPr>
+          <p:cNvPr id="2" name="Rectangle 1"/>
           <p:cNvSpPr/>
           <p:nvPr/>
         </p:nvSpPr>
@@ -12402,7 +13126,7 @@
             <a:avLst/>
           </a:prstGeom>
           <a:solidFill>
-            <a:srgbClr val="17181A"/>
+            <a:srgbClr val="F7F7F5"/>
           </a:solidFill>
           <a:ln>
             <a:noFill/>
@@ -12431,14 +13155,131 @@
       </p:sp>
       <p:sp>
         <p:nvSpPr>
+          <p:cNvPr id="3" name="TextBox 2"/>
+          <p:cNvSpPr txBox="1"/>
+          <p:nvPr/>
+        </p:nvSpPr>
+        <p:spPr>
+          <a:xfrm>
+            <a:off x="566928" y="6355080"/>
+            <a:ext cx="6400800" cy="219456"/>
+          </a:xfrm>
+          <a:prstGeom prst="rect">
+            <a:avLst/>
+          </a:prstGeom>
+          <a:noFill/>
+        </p:spPr>
+        <p:txBody>
+          <a:bodyPr wrap="square" lIns="0" rIns="0" tIns="0" bIns="0" anchor="t">
+            <a:spAutoFit/>
+          </a:bodyPr>
+          <a:lstStyle/>
+          <a:p>
+            <a:pPr algn="l">
+              <a:lnSpc>
+                <a:spcPct val="135000"/>
+              </a:lnSpc>
+            </a:pPr>
+            <a:r>
+              <a:rPr sz="1200" b="0" i="0">
+                <a:solidFill>
+                  <a:srgbClr val="6E7175"/>
+                </a:solidFill>
+                <a:latin typeface="Verdana"/>
+              </a:rPr>
+              <a:t>A2 · Comment est le logement ?</a:t>
+            </a:r>
+          </a:p>
+        </p:txBody>
+      </p:sp>
+      <p:sp>
+        <p:nvSpPr>
+          <p:cNvPr id="4" name="TextBox 3"/>
+          <p:cNvSpPr txBox="1"/>
+          <p:nvPr/>
+        </p:nvSpPr>
+        <p:spPr>
+          <a:xfrm>
+            <a:off x="10710367" y="6355080"/>
+            <a:ext cx="914400" cy="219456"/>
+          </a:xfrm>
+          <a:prstGeom prst="rect">
+            <a:avLst/>
+          </a:prstGeom>
+          <a:noFill/>
+        </p:spPr>
+        <p:txBody>
+          <a:bodyPr wrap="square" lIns="0" rIns="0" tIns="0" bIns="0" anchor="t">
+            <a:spAutoFit/>
+          </a:bodyPr>
+          <a:lstStyle/>
+          <a:p>
+            <a:pPr algn="r">
+              <a:lnSpc>
+                <a:spcPct val="135000"/>
+              </a:lnSpc>
+            </a:pPr>
+            <a:r>
+              <a:rPr sz="1200" b="0" i="0">
+                <a:solidFill>
+                  <a:srgbClr val="6E7175"/>
+                </a:solidFill>
+                <a:latin typeface="Verdana"/>
+              </a:rPr>
+              <a:t>19</a:t>
+            </a:r>
+          </a:p>
+        </p:txBody>
+      </p:sp>
+      <p:sp>
+        <p:nvSpPr>
+          <p:cNvPr id="5" name="TextBox 4"/>
+          <p:cNvSpPr txBox="1"/>
+          <p:nvPr/>
+        </p:nvSpPr>
+        <p:spPr>
+          <a:xfrm>
+            <a:off x="566928" y="420624"/>
+            <a:ext cx="11057839" cy="237744"/>
+          </a:xfrm>
+          <a:prstGeom prst="rect">
+            <a:avLst/>
+          </a:prstGeom>
+          <a:noFill/>
+        </p:spPr>
+        <p:txBody>
+          <a:bodyPr wrap="square" lIns="0" rIns="0" tIns="0" bIns="0" anchor="t">
+            <a:spAutoFit/>
+          </a:bodyPr>
+          <a:lstStyle/>
+          <a:p>
+            <a:pPr algn="l">
+              <a:lnSpc>
+                <a:spcPct val="135000"/>
+              </a:lnSpc>
+            </a:pPr>
+            <a:r>
+              <a:rPr sz="1300" b="1" i="0" spc="156">
+                <a:solidFill>
+                  <a:srgbClr val="166534"/>
+                </a:solidFill>
+                <a:latin typeface="Verdana"/>
+              </a:rPr>
+              <a:t>ANALYSE</a:t>
+            </a:r>
+          </a:p>
+        </p:txBody>
+      </p:sp>
+      <p:sp>
+        <p:nvSpPr>
           <p:cNvPr id="6" name="TextBox 5"/>
           <p:cNvSpPr txBox="1"/>
           <p:nvPr/>
         </p:nvSpPr>
         <p:spPr>
           <a:xfrm>
-            <a:off x="566928" y="1051560"/>
-            <a:ext cx="11057839" cy="274320"/>
+            <a:off x="566928" y="749808"/>
+            <a:ext cx="11057839" cy="877824"/>
           </a:xfrm>
           <a:prstGeom prst="rect">
             <a:avLst/>
@@ -12453,78 +13294,317 @@
           <a:p>
             <a:pPr algn="l">
               <a:lnSpc>
-                <a:spcPct val="135000"/>
-              </a:lnSpc>
-            </a:pPr>
-            <a:r>
-              <a:rPr sz="1300" b="1" i="0" spc="156">
-                <a:solidFill>
-                  <a:srgbClr val="FFFFFF"/>
-                </a:solidFill>
-                <a:latin typeface="Verdana"/>
-              </a:rPr>
-              <a:t>BILLET DE SORTIE</a:t>
-            </a:r>
-          </a:p>
-        </p:txBody>
-      </p:sp>
-      <p:sp>
-        <p:nvSpPr>
-          <p:cNvPr id="7" name="TextBox 6"/>
-          <p:cNvSpPr txBox="1"/>
-          <p:nvPr/>
-        </p:nvSpPr>
-        <p:spPr>
-          <a:xfrm>
-            <a:off x="566928" y="1572768"/>
-            <a:ext cx="9777679" cy="2103120"/>
-          </a:xfrm>
-          <a:prstGeom prst="rect">
-            <a:avLst/>
-          </a:prstGeom>
-          <a:noFill/>
-        </p:spPr>
-        <p:txBody>
-          <a:bodyPr wrap="square" lIns="0" rIns="0" tIns="0" bIns="0" anchor="t">
-            <a:spAutoFit/>
-          </a:bodyPr>
-          <a:lstStyle/>
-          <a:p>
-            <a:pPr algn="l">
-              <a:lnSpc>
-                <a:spcPct val="125000"/>
-              </a:lnSpc>
-            </a:pPr>
-            <a:r>
-              <a:rPr sz="3400" b="1" i="0">
-                <a:solidFill>
-                  <a:srgbClr val="FFFFFF"/>
-                </a:solidFill>
-                <a:latin typeface="Verdana"/>
-              </a:rPr>
-              <a:t>Décodez une annonce de logement en quatre lignes.</a:t>
-            </a:r>
-          </a:p>
-        </p:txBody>
-      </p:sp>
-      <p:sp>
-        <p:nvSpPr>
-          <p:cNvPr id="8" name="Rounded Rectangle 7"/>
+                <a:spcPct val="115000"/>
+              </a:lnSpc>
+            </a:pPr>
+            <a:r>
+              <a:rPr sz="3200" b="1" i="0">
+                <a:solidFill>
+                  <a:srgbClr val="17181A"/>
+                </a:solidFill>
+                <a:latin typeface="Verdana"/>
+              </a:rPr>
+              <a:t>Les deux sons dans le vocabulaire du logement</a:t>
+            </a:r>
+          </a:p>
+        </p:txBody>
+      </p:sp>
+      <p:sp>
+        <p:nvSpPr>
+          <p:cNvPr id="7" name="Rounded Rectangle 6"/>
           <p:cNvSpPr/>
           <p:nvPr/>
         </p:nvSpPr>
         <p:spPr>
           <a:xfrm>
-            <a:off x="566928" y="3931920"/>
-            <a:ext cx="11057839" cy="1022096"/>
+            <a:off x="566928" y="1810512"/>
+            <a:ext cx="11057839" cy="2322576"/>
           </a:xfrm>
           <a:prstGeom prst="roundRect">
             <a:avLst>
-              <a:gd name="adj" fmla="val 8946"/>
+              <a:gd name="adj" fmla="val 6299"/>
             </a:avLst>
           </a:prstGeom>
           <a:solidFill>
-            <a:srgbClr val="2A2C2F"/>
+            <a:srgbClr val="FFFFFF"/>
+          </a:solidFill>
+          <a:ln w="12700">
+            <a:solidFill>
+              <a:srgbClr val="EAEAE8"/>
+            </a:solidFill>
+          </a:ln>
+          <a:effectLst/>
+        </p:spPr>
+        <p:style>
+          <a:lnRef idx="1">
+            <a:schemeClr val="accent1"/>
+          </a:lnRef>
+          <a:fillRef idx="3">
+            <a:schemeClr val="accent1"/>
+          </a:fillRef>
+          <a:effectRef idx="2">
+            <a:schemeClr val="accent1"/>
+          </a:effectRef>
+          <a:fontRef idx="minor">
+            <a:schemeClr val="lt1"/>
+          </a:fontRef>
+        </p:style>
+        <p:txBody>
+          <a:bodyPr rtlCol="0" anchor="ctr"/>
+          <a:lstStyle/>
+          <a:p/>
+        </p:txBody>
+      </p:sp>
+      <p:sp>
+        <p:nvSpPr>
+          <p:cNvPr id="8" name="TextBox 7"/>
+          <p:cNvSpPr txBox="1"/>
+          <p:nvPr/>
+        </p:nvSpPr>
+        <p:spPr>
+          <a:xfrm>
+            <a:off x="932688" y="1975104"/>
+            <a:ext cx="3222650" cy="237744"/>
+          </a:xfrm>
+          <a:prstGeom prst="rect">
+            <a:avLst/>
+          </a:prstGeom>
+          <a:noFill/>
+        </p:spPr>
+        <p:txBody>
+          <a:bodyPr wrap="square" lIns="0" rIns="0" tIns="0" bIns="0" anchor="t">
+            <a:spAutoFit/>
+          </a:bodyPr>
+          <a:lstStyle/>
+          <a:p>
+            <a:pPr algn="l">
+              <a:lnSpc>
+                <a:spcPct val="135000"/>
+              </a:lnSpc>
+            </a:pPr>
+            <a:r>
+              <a:rPr sz="1300" b="1" i="0" spc="156">
+                <a:solidFill>
+                  <a:srgbClr val="6E7175"/>
+                </a:solidFill>
+                <a:latin typeface="Verdana"/>
+              </a:rPr>
+              <a:t>LE SON</a:t>
+            </a:r>
+          </a:p>
+        </p:txBody>
+      </p:sp>
+      <p:sp>
+        <p:nvSpPr>
+          <p:cNvPr id="9" name="TextBox 8"/>
+          <p:cNvSpPr txBox="1"/>
+          <p:nvPr/>
+        </p:nvSpPr>
+        <p:spPr>
+          <a:xfrm>
+            <a:off x="4374794" y="1975104"/>
+            <a:ext cx="3222650" cy="237744"/>
+          </a:xfrm>
+          <a:prstGeom prst="rect">
+            <a:avLst/>
+          </a:prstGeom>
+          <a:noFill/>
+        </p:spPr>
+        <p:txBody>
+          <a:bodyPr wrap="square" lIns="0" rIns="0" tIns="0" bIns="0" anchor="t">
+            <a:spAutoFit/>
+          </a:bodyPr>
+          <a:lstStyle/>
+          <a:p>
+            <a:pPr algn="l">
+              <a:lnSpc>
+                <a:spcPct val="135000"/>
+              </a:lnSpc>
+            </a:pPr>
+            <a:r>
+              <a:rPr sz="1300" b="1" i="0" spc="156">
+                <a:solidFill>
+                  <a:srgbClr val="6E7175"/>
+                </a:solidFill>
+                <a:latin typeface="Verdana"/>
+              </a:rPr>
+              <a:t>IL S'ÉCRIT</a:t>
+            </a:r>
+          </a:p>
+        </p:txBody>
+      </p:sp>
+      <p:sp>
+        <p:nvSpPr>
+          <p:cNvPr id="10" name="TextBox 9"/>
+          <p:cNvSpPr txBox="1"/>
+          <p:nvPr/>
+        </p:nvSpPr>
+        <p:spPr>
+          <a:xfrm>
+            <a:off x="7816900" y="1975104"/>
+            <a:ext cx="3222650" cy="237744"/>
+          </a:xfrm>
+          <a:prstGeom prst="rect">
+            <a:avLst/>
+          </a:prstGeom>
+          <a:noFill/>
+        </p:spPr>
+        <p:txBody>
+          <a:bodyPr wrap="square" lIns="0" rIns="0" tIns="0" bIns="0" anchor="t">
+            <a:spAutoFit/>
+          </a:bodyPr>
+          <a:lstStyle/>
+          <a:p>
+            <a:pPr algn="l">
+              <a:lnSpc>
+                <a:spcPct val="135000"/>
+              </a:lnSpc>
+            </a:pPr>
+            <a:r>
+              <a:rPr sz="1300" b="1" i="0" spc="156">
+                <a:solidFill>
+                  <a:srgbClr val="6E7175"/>
+                </a:solidFill>
+                <a:latin typeface="Verdana"/>
+              </a:rPr>
+              <a:t>MOTS DU MODULE</a:t>
+            </a:r>
+          </a:p>
+        </p:txBody>
+      </p:sp>
+      <p:sp>
+        <p:nvSpPr>
+          <p:cNvPr id="11" name="TextBox 10"/>
+          <p:cNvSpPr txBox="1"/>
+          <p:nvPr/>
+        </p:nvSpPr>
+        <p:spPr>
+          <a:xfrm>
+            <a:off x="932688" y="2395728"/>
+            <a:ext cx="3222650" cy="640080"/>
+          </a:xfrm>
+          <a:prstGeom prst="rect">
+            <a:avLst/>
+          </a:prstGeom>
+          <a:noFill/>
+        </p:spPr>
+        <p:txBody>
+          <a:bodyPr wrap="square" lIns="0" rIns="0" tIns="0" bIns="0" anchor="t">
+            <a:spAutoFit/>
+          </a:bodyPr>
+          <a:lstStyle/>
+          <a:p>
+            <a:pPr algn="l">
+              <a:lnSpc>
+                <a:spcPct val="132000"/>
+              </a:lnSpc>
+            </a:pPr>
+            <a:r>
+              <a:rPr sz="1800" b="1" i="0">
+                <a:solidFill>
+                  <a:srgbClr val="166534"/>
+                </a:solidFill>
+                <a:latin typeface="Verdana"/>
+              </a:rPr>
+              <a:t>le son « an »</a:t>
+            </a:r>
+          </a:p>
+        </p:txBody>
+      </p:sp>
+      <p:sp>
+        <p:nvSpPr>
+          <p:cNvPr id="12" name="TextBox 11"/>
+          <p:cNvSpPr txBox="1"/>
+          <p:nvPr/>
+        </p:nvSpPr>
+        <p:spPr>
+          <a:xfrm>
+            <a:off x="4374794" y="2395728"/>
+            <a:ext cx="3222650" cy="640080"/>
+          </a:xfrm>
+          <a:prstGeom prst="rect">
+            <a:avLst/>
+          </a:prstGeom>
+          <a:noFill/>
+        </p:spPr>
+        <p:txBody>
+          <a:bodyPr wrap="square" lIns="0" rIns="0" tIns="0" bIns="0" anchor="t">
+            <a:spAutoFit/>
+          </a:bodyPr>
+          <a:lstStyle/>
+          <a:p>
+            <a:pPr algn="l">
+              <a:lnSpc>
+                <a:spcPct val="132000"/>
+              </a:lnSpc>
+            </a:pPr>
+            <a:r>
+              <a:rPr sz="1800" b="0" i="0">
+                <a:solidFill>
+                  <a:srgbClr val="3A3D40"/>
+                </a:solidFill>
+                <a:latin typeface="Verdana"/>
+              </a:rPr>
+              <a:t>an, am, en, em</a:t>
+            </a:r>
+          </a:p>
+        </p:txBody>
+      </p:sp>
+      <p:sp>
+        <p:nvSpPr>
+          <p:cNvPr id="13" name="TextBox 12"/>
+          <p:cNvSpPr txBox="1"/>
+          <p:nvPr/>
+        </p:nvSpPr>
+        <p:spPr>
+          <a:xfrm>
+            <a:off x="7816900" y="2395728"/>
+            <a:ext cx="3222650" cy="640080"/>
+          </a:xfrm>
+          <a:prstGeom prst="rect">
+            <a:avLst/>
+          </a:prstGeom>
+          <a:noFill/>
+        </p:spPr>
+        <p:txBody>
+          <a:bodyPr wrap="square" lIns="0" rIns="0" tIns="0" bIns="0" anchor="t">
+            <a:spAutoFit/>
+          </a:bodyPr>
+          <a:lstStyle/>
+          <a:p>
+            <a:pPr algn="l">
+              <a:lnSpc>
+                <a:spcPct val="132000"/>
+              </a:lnSpc>
+            </a:pPr>
+            <a:r>
+              <a:rPr sz="1800" b="0" i="0">
+                <a:solidFill>
+                  <a:srgbClr val="3A3D40"/>
+                </a:solidFill>
+                <a:latin typeface="Verdana"/>
+              </a:rPr>
+              <a:t>logement, chambre, buanderie, septembre</a:t>
+            </a:r>
+          </a:p>
+        </p:txBody>
+      </p:sp>
+      <p:sp>
+        <p:nvSpPr>
+          <p:cNvPr id="14" name="Rectangle 13"/>
+          <p:cNvSpPr/>
+          <p:nvPr/>
+        </p:nvSpPr>
+        <p:spPr>
+          <a:xfrm>
+            <a:off x="932688" y="3108960"/>
+            <a:ext cx="10326319" cy="10058"/>
+          </a:xfrm>
+          <a:prstGeom prst="rect">
+            <a:avLst/>
+          </a:prstGeom>
+          <a:solidFill>
+            <a:srgbClr val="EAEAE8"/>
           </a:solidFill>
           <a:ln>
             <a:noFill/>
@@ -12553,14 +13633,14 @@
       </p:sp>
       <p:sp>
         <p:nvSpPr>
-          <p:cNvPr id="9" name="TextBox 8"/>
-          <p:cNvSpPr txBox="1"/>
-          <p:nvPr/>
-        </p:nvSpPr>
-        <p:spPr>
-          <a:xfrm>
-            <a:off x="932688" y="4087368"/>
-            <a:ext cx="10051999" cy="747776"/>
+          <p:cNvPr id="15" name="TextBox 14"/>
+          <p:cNvSpPr txBox="1"/>
+          <p:nvPr/>
+        </p:nvSpPr>
+        <p:spPr>
+          <a:xfrm>
+            <a:off x="932688" y="3236976"/>
+            <a:ext cx="3222650" cy="640080"/>
           </a:xfrm>
           <a:prstGeom prst="rect">
             <a:avLst/>
@@ -12575,42 +13655,122 @@
           <a:p>
             <a:pPr algn="l">
               <a:lnSpc>
-                <a:spcPct val="140000"/>
-              </a:lnSpc>
-            </a:pPr>
-            <a:r>
-              <a:rPr sz="2000" b="0" i="0">
-                <a:solidFill>
-                  <a:srgbClr val="FFFFFF"/>
-                </a:solidFill>
-                <a:latin typeface="Verdana"/>
-              </a:rPr>
-              <a:t>Le nombre de chambres, ce qui est inclus, ce qu'il faut apporter, le vrai coût.</a:t>
-            </a:r>
-          </a:p>
-        </p:txBody>
-      </p:sp>
-      <p:sp>
-        <p:nvSpPr>
-          <p:cNvPr id="10" name="Rounded Rectangle 9"/>
+                <a:spcPct val="132000"/>
+              </a:lnSpc>
+            </a:pPr>
+            <a:r>
+              <a:rPr sz="1800" b="1" i="0">
+                <a:solidFill>
+                  <a:srgbClr val="166534"/>
+                </a:solidFill>
+                <a:latin typeface="Verdana"/>
+              </a:rPr>
+              <a:t>le son « on »</a:t>
+            </a:r>
+          </a:p>
+        </p:txBody>
+      </p:sp>
+      <p:sp>
+        <p:nvSpPr>
+          <p:cNvPr id="16" name="TextBox 15"/>
+          <p:cNvSpPr txBox="1"/>
+          <p:nvPr/>
+        </p:nvSpPr>
+        <p:spPr>
+          <a:xfrm>
+            <a:off x="4374794" y="3236976"/>
+            <a:ext cx="3222650" cy="640080"/>
+          </a:xfrm>
+          <a:prstGeom prst="rect">
+            <a:avLst/>
+          </a:prstGeom>
+          <a:noFill/>
+        </p:spPr>
+        <p:txBody>
+          <a:bodyPr wrap="square" lIns="0" rIns="0" tIns="0" bIns="0" anchor="t">
+            <a:spAutoFit/>
+          </a:bodyPr>
+          <a:lstStyle/>
+          <a:p>
+            <a:pPr algn="l">
+              <a:lnSpc>
+                <a:spcPct val="132000"/>
+              </a:lnSpc>
+            </a:pPr>
+            <a:r>
+              <a:rPr sz="1800" b="0" i="0">
+                <a:solidFill>
+                  <a:srgbClr val="3A3D40"/>
+                </a:solidFill>
+                <a:latin typeface="Verdana"/>
+              </a:rPr>
+              <a:t>on, om</a:t>
+            </a:r>
+          </a:p>
+        </p:txBody>
+      </p:sp>
+      <p:sp>
+        <p:nvSpPr>
+          <p:cNvPr id="17" name="TextBox 16"/>
+          <p:cNvSpPr txBox="1"/>
+          <p:nvPr/>
+        </p:nvSpPr>
+        <p:spPr>
+          <a:xfrm>
+            <a:off x="7816900" y="3236976"/>
+            <a:ext cx="3222650" cy="640080"/>
+          </a:xfrm>
+          <a:prstGeom prst="rect">
+            <a:avLst/>
+          </a:prstGeom>
+          <a:noFill/>
+        </p:spPr>
+        <p:txBody>
+          <a:bodyPr wrap="square" lIns="0" rIns="0" tIns="0" bIns="0" anchor="t">
+            <a:spAutoFit/>
+          </a:bodyPr>
+          <a:lstStyle/>
+          <a:p>
+            <a:pPr algn="l">
+              <a:lnSpc>
+                <a:spcPct val="132000"/>
+              </a:lnSpc>
+            </a:pPr>
+            <a:r>
+              <a:rPr sz="1800" b="0" i="0">
+                <a:solidFill>
+                  <a:srgbClr val="3A3D40"/>
+                </a:solidFill>
+                <a:latin typeface="Verdana"/>
+              </a:rPr>
+              <a:t>salon, camion, maison, répondu</a:t>
+            </a:r>
+          </a:p>
+        </p:txBody>
+      </p:sp>
+      <p:sp>
+        <p:nvSpPr>
+          <p:cNvPr id="18" name="Rounded Rectangle 17"/>
           <p:cNvSpPr/>
           <p:nvPr/>
         </p:nvSpPr>
         <p:spPr>
           <a:xfrm>
-            <a:off x="566928" y="5036311"/>
-            <a:ext cx="11057839" cy="666496"/>
+            <a:off x="566928" y="4370831"/>
+            <a:ext cx="11057839" cy="1175004"/>
           </a:xfrm>
           <a:prstGeom prst="roundRect">
             <a:avLst>
-              <a:gd name="adj" fmla="val 13719"/>
+              <a:gd name="adj" fmla="val 12451"/>
             </a:avLst>
           </a:prstGeom>
           <a:solidFill>
-            <a:srgbClr val="2A2C2F"/>
+            <a:srgbClr val="FBFBFA"/>
           </a:solidFill>
-          <a:ln>
-            <a:noFill/>
+          <a:ln w="12700">
+            <a:solidFill>
+              <a:srgbClr val="EAEAE8"/>
+            </a:solidFill>
           </a:ln>
           <a:effectLst/>
         </p:spPr>
@@ -12636,14 +13796,14 @@
       </p:sp>
       <p:sp>
         <p:nvSpPr>
-          <p:cNvPr id="11" name="TextBox 10"/>
-          <p:cNvSpPr txBox="1"/>
-          <p:nvPr/>
-        </p:nvSpPr>
-        <p:spPr>
-          <a:xfrm>
-            <a:off x="932688" y="5191759"/>
-            <a:ext cx="10051999" cy="392176"/>
+          <p:cNvPr id="19" name="TextBox 18"/>
+          <p:cNvSpPr txBox="1"/>
+          <p:nvPr/>
+        </p:nvSpPr>
+        <p:spPr>
+          <a:xfrm>
+            <a:off x="969264" y="4626864"/>
+            <a:ext cx="10234879" cy="717804"/>
           </a:xfrm>
           <a:prstGeom prst="rect">
             <a:avLst/>
@@ -12658,56 +13818,17 @@
           <a:p>
             <a:pPr algn="l">
               <a:lnSpc>
-                <a:spcPct val="140000"/>
-              </a:lnSpc>
-            </a:pPr>
-            <a:r>
-              <a:rPr sz="2000" b="0" i="0">
-                <a:solidFill>
-                  <a:srgbClr val="FFFFFF"/>
-                </a:solidFill>
-                <a:latin typeface="Verdana"/>
-              </a:rPr>
-              <a:t>Une vraie annonce, trouvée où vous voulez.</a:t>
-            </a:r>
-          </a:p>
-        </p:txBody>
-      </p:sp>
-      <p:sp>
-        <p:nvSpPr>
-          <p:cNvPr id="12" name="TextBox 11"/>
-          <p:cNvSpPr txBox="1"/>
-          <p:nvPr/>
-        </p:nvSpPr>
-        <p:spPr>
-          <a:xfrm>
-            <a:off x="566928" y="6355080"/>
-            <a:ext cx="6400800" cy="219456"/>
-          </a:xfrm>
-          <a:prstGeom prst="rect">
-            <a:avLst/>
-          </a:prstGeom>
-          <a:noFill/>
-        </p:spPr>
-        <p:txBody>
-          <a:bodyPr wrap="square" lIns="0" rIns="0" tIns="0" bIns="0" anchor="t">
-            <a:spAutoFit/>
-          </a:bodyPr>
-          <a:lstStyle/>
-          <a:p>
-            <a:pPr algn="l">
-              <a:lnSpc>
-                <a:spcPct val="135000"/>
-              </a:lnSpc>
-            </a:pPr>
-            <a:r>
-              <a:rPr sz="1200" b="0" i="0">
-                <a:solidFill>
-                  <a:srgbClr val="6E7175"/>
-                </a:solidFill>
-                <a:latin typeface="Verdana"/>
-              </a:rPr>
-              <a:t>A2 · Comment est le logement ?</a:t>
+                <a:spcPct val="145000"/>
+              </a:lnSpc>
+            </a:pPr>
+            <a:r>
+              <a:rPr sz="1800" b="0" i="0">
+                <a:solidFill>
+                  <a:srgbClr val="4B4F52"/>
+                </a:solidFill>
+                <a:latin typeface="Verdana"/>
+              </a:rPr>
+              <a:t>Devant un b ou un p, « on » s'écrit « om » : nombre, compte, pompe. Le son ne change pas, seulement la lettre.</a:t>
             </a:r>
           </a:p>
         </p:txBody>
@@ -13595,7 +14716,6002 @@
                 </a:solidFill>
                 <a:latin typeface="Verdana"/>
               </a:rPr>
-              <a:t>calculer le vrai coût d'un loyer.</a:t>
+              <a:t>calculer le vrai coût d'un loyer ;</a:t>
+            </a:r>
+          </a:p>
+        </p:txBody>
+      </p:sp>
+      <p:sp>
+        <p:nvSpPr>
+          <p:cNvPr id="23" name="Rounded Rectangle 22"/>
+          <p:cNvSpPr/>
+          <p:nvPr/>
+        </p:nvSpPr>
+        <p:spPr>
+          <a:xfrm>
+            <a:off x="566928" y="5308600"/>
+            <a:ext cx="11057839" cy="757936"/>
+          </a:xfrm>
+          <a:prstGeom prst="roundRect">
+            <a:avLst>
+              <a:gd name="adj" fmla="val 19302"/>
+            </a:avLst>
+          </a:prstGeom>
+          <a:solidFill>
+            <a:srgbClr val="FFFFFF"/>
+          </a:solidFill>
+          <a:ln w="12700">
+            <a:solidFill>
+              <a:srgbClr val="EAEAE8"/>
+            </a:solidFill>
+          </a:ln>
+          <a:effectLst/>
+        </p:spPr>
+        <p:style>
+          <a:lnRef idx="1">
+            <a:schemeClr val="accent1"/>
+          </a:lnRef>
+          <a:fillRef idx="3">
+            <a:schemeClr val="accent1"/>
+          </a:fillRef>
+          <a:effectRef idx="2">
+            <a:schemeClr val="accent1"/>
+          </a:effectRef>
+          <a:fontRef idx="minor">
+            <a:schemeClr val="lt1"/>
+          </a:fontRef>
+        </p:style>
+        <p:txBody>
+          <a:bodyPr rtlCol="0" anchor="ctr"/>
+          <a:lstStyle/>
+          <a:p/>
+        </p:txBody>
+      </p:sp>
+      <p:sp>
+        <p:nvSpPr>
+          <p:cNvPr id="24" name="Rounded Rectangle 23"/>
+          <p:cNvSpPr/>
+          <p:nvPr/>
+        </p:nvSpPr>
+        <p:spPr>
+          <a:xfrm>
+            <a:off x="804672" y="5486400"/>
+            <a:ext cx="402336" cy="402336"/>
+          </a:xfrm>
+          <a:prstGeom prst="roundRect">
+            <a:avLst>
+              <a:gd name="adj" fmla="val 31818"/>
+            </a:avLst>
+          </a:prstGeom>
+          <a:solidFill>
+            <a:srgbClr val="E3F1E7"/>
+          </a:solidFill>
+          <a:ln>
+            <a:noFill/>
+          </a:ln>
+          <a:effectLst/>
+        </p:spPr>
+        <p:style>
+          <a:lnRef idx="1">
+            <a:schemeClr val="accent1"/>
+          </a:lnRef>
+          <a:fillRef idx="3">
+            <a:schemeClr val="accent1"/>
+          </a:fillRef>
+          <a:effectRef idx="2">
+            <a:schemeClr val="accent1"/>
+          </a:effectRef>
+          <a:fontRef idx="minor">
+            <a:schemeClr val="lt1"/>
+          </a:fontRef>
+        </p:style>
+        <p:txBody>
+          <a:bodyPr rtlCol="0" anchor="ctr"/>
+          <a:lstStyle/>
+          <a:p/>
+        </p:txBody>
+      </p:sp>
+      <p:sp>
+        <p:nvSpPr>
+          <p:cNvPr id="25" name="TextBox 24"/>
+          <p:cNvSpPr txBox="1"/>
+          <p:nvPr/>
+        </p:nvSpPr>
+        <p:spPr>
+          <a:xfrm>
+            <a:off x="804672" y="5568696"/>
+            <a:ext cx="402336" cy="274320"/>
+          </a:xfrm>
+          <a:prstGeom prst="rect">
+            <a:avLst/>
+          </a:prstGeom>
+          <a:noFill/>
+        </p:spPr>
+        <p:txBody>
+          <a:bodyPr wrap="square" lIns="0" rIns="0" tIns="0" bIns="0" anchor="t">
+            <a:spAutoFit/>
+          </a:bodyPr>
+          <a:lstStyle/>
+          <a:p>
+            <a:pPr algn="ctr">
+              <a:lnSpc>
+                <a:spcPct val="135000"/>
+              </a:lnSpc>
+            </a:pPr>
+            <a:r>
+              <a:rPr sz="1500" b="1" i="0">
+                <a:solidFill>
+                  <a:srgbClr val="166534"/>
+                </a:solidFill>
+                <a:latin typeface="Verdana"/>
+              </a:rPr>
+              <a:t>5</a:t>
+            </a:r>
+          </a:p>
+        </p:txBody>
+      </p:sp>
+      <p:sp>
+        <p:nvSpPr>
+          <p:cNvPr id="26" name="TextBox 25"/>
+          <p:cNvSpPr txBox="1"/>
+          <p:nvPr/>
+        </p:nvSpPr>
+        <p:spPr>
+          <a:xfrm>
+            <a:off x="1408176" y="5509768"/>
+            <a:ext cx="9549079" cy="392176"/>
+          </a:xfrm>
+          <a:prstGeom prst="rect">
+            <a:avLst/>
+          </a:prstGeom>
+          <a:noFill/>
+        </p:spPr>
+        <p:txBody>
+          <a:bodyPr wrap="square" lIns="0" rIns="0" tIns="0" bIns="0" anchor="t">
+            <a:spAutoFit/>
+          </a:bodyPr>
+          <a:lstStyle/>
+          <a:p>
+            <a:pPr algn="l">
+              <a:lnSpc>
+                <a:spcPct val="140000"/>
+              </a:lnSpc>
+            </a:pPr>
+            <a:r>
+              <a:rPr sz="2000" b="0" i="0">
+                <a:solidFill>
+                  <a:srgbClr val="3A3D40"/>
+                </a:solidFill>
+                <a:latin typeface="Verdana"/>
+              </a:rPr>
+              <a:t>distinguer le son « an » du son « on » dans le vocabulaire du logement.</a:t>
+            </a:r>
+          </a:p>
+        </p:txBody>
+      </p:sp>
+    </p:spTree>
+  </p:cSld>
+  <p:clrMapOvr>
+    <a:masterClrMapping/>
+  </p:clrMapOvr>
+</p:sld>
+</file>
+
+<file path=ppt/slides/slide20.xml><?xml version="1.0" encoding="utf-8"?>
+<p:sld xmlns:a="http://schemas.openxmlformats.org/drawingml/2006/main" xmlns:p="http://schemas.openxmlformats.org/presentationml/2006/main" xmlns:r="http://schemas.openxmlformats.org/officeDocument/2006/relationships">
+  <p:cSld>
+    <p:spTree>
+      <p:nvGrpSpPr>
+        <p:cNvPr id="1" name=""/>
+        <p:cNvGrpSpPr/>
+        <p:nvPr/>
+      </p:nvGrpSpPr>
+      <p:grpSpPr/>
+      <p:sp>
+        <p:nvSpPr>
+          <p:cNvPr id="2" name="Rectangle 1"/>
+          <p:cNvSpPr/>
+          <p:nvPr/>
+        </p:nvSpPr>
+        <p:spPr>
+          <a:xfrm>
+            <a:off x="0" y="0"/>
+            <a:ext cx="12191695" cy="6858000"/>
+          </a:xfrm>
+          <a:prstGeom prst="rect">
+            <a:avLst/>
+          </a:prstGeom>
+          <a:solidFill>
+            <a:srgbClr val="F7F7F5"/>
+          </a:solidFill>
+          <a:ln>
+            <a:noFill/>
+          </a:ln>
+          <a:effectLst/>
+        </p:spPr>
+        <p:style>
+          <a:lnRef idx="1">
+            <a:schemeClr val="accent1"/>
+          </a:lnRef>
+          <a:fillRef idx="3">
+            <a:schemeClr val="accent1"/>
+          </a:fillRef>
+          <a:effectRef idx="2">
+            <a:schemeClr val="accent1"/>
+          </a:effectRef>
+          <a:fontRef idx="minor">
+            <a:schemeClr val="lt1"/>
+          </a:fontRef>
+        </p:style>
+        <p:txBody>
+          <a:bodyPr rtlCol="0" anchor="ctr"/>
+          <a:lstStyle/>
+          <a:p/>
+        </p:txBody>
+      </p:sp>
+      <p:sp>
+        <p:nvSpPr>
+          <p:cNvPr id="3" name="TextBox 2"/>
+          <p:cNvSpPr txBox="1"/>
+          <p:nvPr/>
+        </p:nvSpPr>
+        <p:spPr>
+          <a:xfrm>
+            <a:off x="566928" y="6355080"/>
+            <a:ext cx="6400800" cy="219456"/>
+          </a:xfrm>
+          <a:prstGeom prst="rect">
+            <a:avLst/>
+          </a:prstGeom>
+          <a:noFill/>
+        </p:spPr>
+        <p:txBody>
+          <a:bodyPr wrap="square" lIns="0" rIns="0" tIns="0" bIns="0" anchor="t">
+            <a:spAutoFit/>
+          </a:bodyPr>
+          <a:lstStyle/>
+          <a:p>
+            <a:pPr algn="l">
+              <a:lnSpc>
+                <a:spcPct val="135000"/>
+              </a:lnSpc>
+            </a:pPr>
+            <a:r>
+              <a:rPr sz="1200" b="0" i="0">
+                <a:solidFill>
+                  <a:srgbClr val="6E7175"/>
+                </a:solidFill>
+                <a:latin typeface="Verdana"/>
+              </a:rPr>
+              <a:t>A2 · Comment est le logement ?</a:t>
+            </a:r>
+          </a:p>
+        </p:txBody>
+      </p:sp>
+      <p:sp>
+        <p:nvSpPr>
+          <p:cNvPr id="4" name="TextBox 3"/>
+          <p:cNvSpPr txBox="1"/>
+          <p:nvPr/>
+        </p:nvSpPr>
+        <p:spPr>
+          <a:xfrm>
+            <a:off x="10710367" y="6355080"/>
+            <a:ext cx="914400" cy="219456"/>
+          </a:xfrm>
+          <a:prstGeom prst="rect">
+            <a:avLst/>
+          </a:prstGeom>
+          <a:noFill/>
+        </p:spPr>
+        <p:txBody>
+          <a:bodyPr wrap="square" lIns="0" rIns="0" tIns="0" bIns="0" anchor="t">
+            <a:spAutoFit/>
+          </a:bodyPr>
+          <a:lstStyle/>
+          <a:p>
+            <a:pPr algn="r">
+              <a:lnSpc>
+                <a:spcPct val="135000"/>
+              </a:lnSpc>
+            </a:pPr>
+            <a:r>
+              <a:rPr sz="1200" b="0" i="0">
+                <a:solidFill>
+                  <a:srgbClr val="6E7175"/>
+                </a:solidFill>
+                <a:latin typeface="Verdana"/>
+              </a:rPr>
+              <a:t>20</a:t>
+            </a:r>
+          </a:p>
+        </p:txBody>
+      </p:sp>
+      <p:sp>
+        <p:nvSpPr>
+          <p:cNvPr id="5" name="TextBox 4"/>
+          <p:cNvSpPr txBox="1"/>
+          <p:nvPr/>
+        </p:nvSpPr>
+        <p:spPr>
+          <a:xfrm>
+            <a:off x="566928" y="420624"/>
+            <a:ext cx="11057839" cy="237744"/>
+          </a:xfrm>
+          <a:prstGeom prst="rect">
+            <a:avLst/>
+          </a:prstGeom>
+          <a:noFill/>
+        </p:spPr>
+        <p:txBody>
+          <a:bodyPr wrap="square" lIns="0" rIns="0" tIns="0" bIns="0" anchor="t">
+            <a:spAutoFit/>
+          </a:bodyPr>
+          <a:lstStyle/>
+          <a:p>
+            <a:pPr algn="l">
+              <a:lnSpc>
+                <a:spcPct val="135000"/>
+              </a:lnSpc>
+            </a:pPr>
+            <a:r>
+              <a:rPr sz="1300" b="1" i="0" spc="156">
+                <a:solidFill>
+                  <a:srgbClr val="166534"/>
+                </a:solidFill>
+                <a:latin typeface="Verdana"/>
+              </a:rPr>
+              <a:t>LE PIÈGE DE « CHAMBRE » ET « NOMBRE »</a:t>
+            </a:r>
+          </a:p>
+        </p:txBody>
+      </p:sp>
+      <p:sp>
+        <p:nvSpPr>
+          <p:cNvPr id="6" name="TextBox 5"/>
+          <p:cNvSpPr txBox="1"/>
+          <p:nvPr/>
+        </p:nvSpPr>
+        <p:spPr>
+          <a:xfrm>
+            <a:off x="566928" y="749808"/>
+            <a:ext cx="11057839" cy="877824"/>
+          </a:xfrm>
+          <a:prstGeom prst="rect">
+            <a:avLst/>
+          </a:prstGeom>
+          <a:noFill/>
+        </p:spPr>
+        <p:txBody>
+          <a:bodyPr wrap="square" lIns="0" rIns="0" tIns="0" bIns="0" anchor="t">
+            <a:spAutoFit/>
+          </a:bodyPr>
+          <a:lstStyle/>
+          <a:p>
+            <a:pPr algn="l">
+              <a:lnSpc>
+                <a:spcPct val="115000"/>
+              </a:lnSpc>
+            </a:pPr>
+            <a:r>
+              <a:rPr sz="3400" b="1" i="0">
+                <a:solidFill>
+                  <a:srgbClr val="17181A"/>
+                </a:solidFill>
+                <a:latin typeface="Verdana"/>
+              </a:rPr>
+              <a:t>Le piège le plus fréquent</a:t>
+            </a:r>
+          </a:p>
+        </p:txBody>
+      </p:sp>
+      <p:sp>
+        <p:nvSpPr>
+          <p:cNvPr id="7" name="Rounded Rectangle 6"/>
+          <p:cNvSpPr/>
+          <p:nvPr/>
+        </p:nvSpPr>
+        <p:spPr>
+          <a:xfrm>
+            <a:off x="566928" y="1856232"/>
+            <a:ext cx="5428335" cy="2331720"/>
+          </a:xfrm>
+          <a:prstGeom prst="roundRect">
+            <a:avLst>
+              <a:gd name="adj" fmla="val 6274"/>
+            </a:avLst>
+          </a:prstGeom>
+          <a:solidFill>
+            <a:srgbClr val="FFF6F5"/>
+          </a:solidFill>
+          <a:ln w="12700">
+            <a:solidFill>
+              <a:srgbClr val="DC2626"/>
+            </a:solidFill>
+          </a:ln>
+          <a:effectLst/>
+        </p:spPr>
+        <p:style>
+          <a:lnRef idx="1">
+            <a:schemeClr val="accent1"/>
+          </a:lnRef>
+          <a:fillRef idx="3">
+            <a:schemeClr val="accent1"/>
+          </a:fillRef>
+          <a:effectRef idx="2">
+            <a:schemeClr val="accent1"/>
+          </a:effectRef>
+          <a:fontRef idx="minor">
+            <a:schemeClr val="lt1"/>
+          </a:fontRef>
+        </p:style>
+        <p:txBody>
+          <a:bodyPr rtlCol="0" anchor="ctr"/>
+          <a:lstStyle/>
+          <a:p/>
+        </p:txBody>
+      </p:sp>
+      <p:sp>
+        <p:nvSpPr>
+          <p:cNvPr id="8" name="TextBox 7"/>
+          <p:cNvSpPr txBox="1"/>
+          <p:nvPr/>
+        </p:nvSpPr>
+        <p:spPr>
+          <a:xfrm>
+            <a:off x="932688" y="2130552"/>
+            <a:ext cx="4696815" cy="274320"/>
+          </a:xfrm>
+          <a:prstGeom prst="rect">
+            <a:avLst/>
+          </a:prstGeom>
+          <a:noFill/>
+        </p:spPr>
+        <p:txBody>
+          <a:bodyPr wrap="square" lIns="0" rIns="0" tIns="0" bIns="0" anchor="t">
+            <a:spAutoFit/>
+          </a:bodyPr>
+          <a:lstStyle/>
+          <a:p>
+            <a:pPr algn="l">
+              <a:lnSpc>
+                <a:spcPct val="135000"/>
+              </a:lnSpc>
+            </a:pPr>
+            <a:r>
+              <a:rPr sz="1300" b="1" i="0" spc="156">
+                <a:solidFill>
+                  <a:srgbClr val="B91C1C"/>
+                </a:solidFill>
+                <a:latin typeface="Verdana"/>
+              </a:rPr>
+              <a:t>ON ENTEND SOUVENT</a:t>
+            </a:r>
+          </a:p>
+        </p:txBody>
+      </p:sp>
+      <p:sp>
+        <p:nvSpPr>
+          <p:cNvPr id="9" name="TextBox 8"/>
+          <p:cNvSpPr txBox="1"/>
+          <p:nvPr/>
+        </p:nvSpPr>
+        <p:spPr>
+          <a:xfrm>
+            <a:off x="932688" y="2569464"/>
+            <a:ext cx="4696815" cy="1417320"/>
+          </a:xfrm>
+          <a:prstGeom prst="rect">
+            <a:avLst/>
+          </a:prstGeom>
+          <a:noFill/>
+        </p:spPr>
+        <p:txBody>
+          <a:bodyPr wrap="square" lIns="0" rIns="0" tIns="0" bIns="0" anchor="t">
+            <a:spAutoFit/>
+          </a:bodyPr>
+          <a:lstStyle/>
+          <a:p>
+            <a:pPr algn="l">
+              <a:lnSpc>
+                <a:spcPct val="130000"/>
+              </a:lnSpc>
+            </a:pPr>
+            <a:r>
+              <a:rPr sz="2500" b="1" i="0">
+                <a:solidFill>
+                  <a:srgbClr val="17181A"/>
+                </a:solidFill>
+                <a:latin typeface="Verdana"/>
+              </a:rPr>
+              <a:t>nombre, quand on veut dire chambre</a:t>
+            </a:r>
+          </a:p>
+        </p:txBody>
+      </p:sp>
+      <p:sp>
+        <p:nvSpPr>
+          <p:cNvPr id="10" name="Rounded Rectangle 9"/>
+          <p:cNvSpPr/>
+          <p:nvPr/>
+        </p:nvSpPr>
+        <p:spPr>
+          <a:xfrm>
+            <a:off x="6196431" y="1856232"/>
+            <a:ext cx="5428335" cy="2331720"/>
+          </a:xfrm>
+          <a:prstGeom prst="roundRect">
+            <a:avLst>
+              <a:gd name="adj" fmla="val 6274"/>
+            </a:avLst>
+          </a:prstGeom>
+          <a:solidFill>
+            <a:srgbClr val="E6F5EE"/>
+          </a:solidFill>
+          <a:ln w="12700">
+            <a:solidFill>
+              <a:srgbClr val="0A8F5B"/>
+            </a:solidFill>
+          </a:ln>
+          <a:effectLst/>
+        </p:spPr>
+        <p:style>
+          <a:lnRef idx="1">
+            <a:schemeClr val="accent1"/>
+          </a:lnRef>
+          <a:fillRef idx="3">
+            <a:schemeClr val="accent1"/>
+          </a:fillRef>
+          <a:effectRef idx="2">
+            <a:schemeClr val="accent1"/>
+          </a:effectRef>
+          <a:fontRef idx="minor">
+            <a:schemeClr val="lt1"/>
+          </a:fontRef>
+        </p:style>
+        <p:txBody>
+          <a:bodyPr rtlCol="0" anchor="ctr"/>
+          <a:lstStyle/>
+          <a:p/>
+        </p:txBody>
+      </p:sp>
+      <p:sp>
+        <p:nvSpPr>
+          <p:cNvPr id="11" name="TextBox 10"/>
+          <p:cNvSpPr txBox="1"/>
+          <p:nvPr/>
+        </p:nvSpPr>
+        <p:spPr>
+          <a:xfrm>
+            <a:off x="6562191" y="2130552"/>
+            <a:ext cx="4696815" cy="274320"/>
+          </a:xfrm>
+          <a:prstGeom prst="rect">
+            <a:avLst/>
+          </a:prstGeom>
+          <a:noFill/>
+        </p:spPr>
+        <p:txBody>
+          <a:bodyPr wrap="square" lIns="0" rIns="0" tIns="0" bIns="0" anchor="t">
+            <a:spAutoFit/>
+          </a:bodyPr>
+          <a:lstStyle/>
+          <a:p>
+            <a:pPr algn="l">
+              <a:lnSpc>
+                <a:spcPct val="135000"/>
+              </a:lnSpc>
+            </a:pPr>
+            <a:r>
+              <a:rPr sz="1300" b="1" i="0" spc="156">
+                <a:solidFill>
+                  <a:srgbClr val="07734A"/>
+                </a:solidFill>
+                <a:latin typeface="Verdana"/>
+              </a:rPr>
+              <a:t>IL FAUT DIRE PLUTÔT</a:t>
+            </a:r>
+          </a:p>
+        </p:txBody>
+      </p:sp>
+      <p:sp>
+        <p:nvSpPr>
+          <p:cNvPr id="12" name="TextBox 11"/>
+          <p:cNvSpPr txBox="1"/>
+          <p:nvPr/>
+        </p:nvSpPr>
+        <p:spPr>
+          <a:xfrm>
+            <a:off x="6562191" y="2569464"/>
+            <a:ext cx="4696815" cy="1417320"/>
+          </a:xfrm>
+          <a:prstGeom prst="rect">
+            <a:avLst/>
+          </a:prstGeom>
+          <a:noFill/>
+        </p:spPr>
+        <p:txBody>
+          <a:bodyPr wrap="square" lIns="0" rIns="0" tIns="0" bIns="0" anchor="t">
+            <a:spAutoFit/>
+          </a:bodyPr>
+          <a:lstStyle/>
+          <a:p>
+            <a:pPr algn="l">
+              <a:lnSpc>
+                <a:spcPct val="130000"/>
+              </a:lnSpc>
+            </a:pPr>
+            <a:r>
+              <a:rPr sz="2500" b="1" i="0">
+                <a:solidFill>
+                  <a:srgbClr val="17181A"/>
+                </a:solidFill>
+                <a:latin typeface="Verdana"/>
+              </a:rPr>
+              <a:t>chambre — les lèvres restent plates</a:t>
+            </a:r>
+          </a:p>
+        </p:txBody>
+      </p:sp>
+      <p:sp>
+        <p:nvSpPr>
+          <p:cNvPr id="13" name="Rounded Rectangle 12"/>
+          <p:cNvSpPr/>
+          <p:nvPr/>
+        </p:nvSpPr>
+        <p:spPr>
+          <a:xfrm>
+            <a:off x="566928" y="4462272"/>
+            <a:ext cx="11057839" cy="1618487"/>
+          </a:xfrm>
+          <a:prstGeom prst="roundRect">
+            <a:avLst>
+              <a:gd name="adj" fmla="val 9039"/>
+            </a:avLst>
+          </a:prstGeom>
+          <a:solidFill>
+            <a:srgbClr val="FFFFFF"/>
+          </a:solidFill>
+          <a:ln w="12700">
+            <a:solidFill>
+              <a:srgbClr val="EAEAE8"/>
+            </a:solidFill>
+          </a:ln>
+          <a:effectLst/>
+        </p:spPr>
+        <p:style>
+          <a:lnRef idx="1">
+            <a:schemeClr val="accent1"/>
+          </a:lnRef>
+          <a:fillRef idx="3">
+            <a:schemeClr val="accent1"/>
+          </a:fillRef>
+          <a:effectRef idx="2">
+            <a:schemeClr val="accent1"/>
+          </a:effectRef>
+          <a:fontRef idx="minor">
+            <a:schemeClr val="lt1"/>
+          </a:fontRef>
+        </p:style>
+        <p:txBody>
+          <a:bodyPr rtlCol="0" anchor="ctr"/>
+          <a:lstStyle/>
+          <a:p/>
+        </p:txBody>
+      </p:sp>
+      <p:sp>
+        <p:nvSpPr>
+          <p:cNvPr id="14" name="TextBox 13"/>
+          <p:cNvSpPr txBox="1"/>
+          <p:nvPr/>
+        </p:nvSpPr>
+        <p:spPr>
+          <a:xfrm>
+            <a:off x="969264" y="4736592"/>
+            <a:ext cx="10234879" cy="1150620"/>
+          </a:xfrm>
+          <a:prstGeom prst="rect">
+            <a:avLst/>
+          </a:prstGeom>
+          <a:noFill/>
+        </p:spPr>
+        <p:txBody>
+          <a:bodyPr wrap="square" lIns="0" rIns="0" tIns="0" bIns="0" anchor="t">
+            <a:spAutoFit/>
+          </a:bodyPr>
+          <a:lstStyle/>
+          <a:p>
+            <a:pPr algn="l">
+              <a:lnSpc>
+                <a:spcPct val="145000"/>
+              </a:lnSpc>
+            </a:pPr>
+            <a:r>
+              <a:rPr sz="2000" b="0" i="0">
+                <a:solidFill>
+                  <a:srgbClr val="4B4F52"/>
+                </a:solidFill>
+                <a:latin typeface="Verdana"/>
+              </a:rPr>
+              <a:t>Les deux mots ne diffèrent que par la voyelle nasale ; tout le reste est identique. C'est la paire à faire entendre en premier, parce qu'elle isole exactement la difficulté : si on l'entend ici, on l'entend partout.</a:t>
+            </a:r>
+          </a:p>
+        </p:txBody>
+      </p:sp>
+    </p:spTree>
+  </p:cSld>
+  <p:clrMapOvr>
+    <a:masterClrMapping/>
+  </p:clrMapOvr>
+</p:sld>
+</file>
+
+<file path=ppt/slides/slide21.xml><?xml version="1.0" encoding="utf-8"?>
+<p:sld xmlns:a="http://schemas.openxmlformats.org/drawingml/2006/main" xmlns:p="http://schemas.openxmlformats.org/presentationml/2006/main" xmlns:r="http://schemas.openxmlformats.org/officeDocument/2006/relationships">
+  <p:cSld>
+    <p:spTree>
+      <p:nvGrpSpPr>
+        <p:cNvPr id="1" name=""/>
+        <p:cNvGrpSpPr/>
+        <p:nvPr/>
+      </p:nvGrpSpPr>
+      <p:grpSpPr/>
+      <p:sp>
+        <p:nvSpPr>
+          <p:cNvPr id="2" name="Rectangle 1"/>
+          <p:cNvSpPr/>
+          <p:nvPr/>
+        </p:nvSpPr>
+        <p:spPr>
+          <a:xfrm>
+            <a:off x="0" y="0"/>
+            <a:ext cx="12191695" cy="6858000"/>
+          </a:xfrm>
+          <a:prstGeom prst="rect">
+            <a:avLst/>
+          </a:prstGeom>
+          <a:solidFill>
+            <a:srgbClr val="F7F7F5"/>
+          </a:solidFill>
+          <a:ln>
+            <a:noFill/>
+          </a:ln>
+          <a:effectLst/>
+        </p:spPr>
+        <p:style>
+          <a:lnRef idx="1">
+            <a:schemeClr val="accent1"/>
+          </a:lnRef>
+          <a:fillRef idx="3">
+            <a:schemeClr val="accent1"/>
+          </a:fillRef>
+          <a:effectRef idx="2">
+            <a:schemeClr val="accent1"/>
+          </a:effectRef>
+          <a:fontRef idx="minor">
+            <a:schemeClr val="lt1"/>
+          </a:fontRef>
+        </p:style>
+        <p:txBody>
+          <a:bodyPr rtlCol="0" anchor="ctr"/>
+          <a:lstStyle/>
+          <a:p/>
+        </p:txBody>
+      </p:sp>
+      <p:sp>
+        <p:nvSpPr>
+          <p:cNvPr id="3" name="TextBox 2"/>
+          <p:cNvSpPr txBox="1"/>
+          <p:nvPr/>
+        </p:nvSpPr>
+        <p:spPr>
+          <a:xfrm>
+            <a:off x="566928" y="6355080"/>
+            <a:ext cx="6400800" cy="219456"/>
+          </a:xfrm>
+          <a:prstGeom prst="rect">
+            <a:avLst/>
+          </a:prstGeom>
+          <a:noFill/>
+        </p:spPr>
+        <p:txBody>
+          <a:bodyPr wrap="square" lIns="0" rIns="0" tIns="0" bIns="0" anchor="t">
+            <a:spAutoFit/>
+          </a:bodyPr>
+          <a:lstStyle/>
+          <a:p>
+            <a:pPr algn="l">
+              <a:lnSpc>
+                <a:spcPct val="135000"/>
+              </a:lnSpc>
+            </a:pPr>
+            <a:r>
+              <a:rPr sz="1200" b="0" i="0">
+                <a:solidFill>
+                  <a:srgbClr val="6E7175"/>
+                </a:solidFill>
+                <a:latin typeface="Verdana"/>
+              </a:rPr>
+              <a:t>A2 · Comment est le logement ?</a:t>
+            </a:r>
+          </a:p>
+        </p:txBody>
+      </p:sp>
+      <p:sp>
+        <p:nvSpPr>
+          <p:cNvPr id="4" name="TextBox 3"/>
+          <p:cNvSpPr txBox="1"/>
+          <p:nvPr/>
+        </p:nvSpPr>
+        <p:spPr>
+          <a:xfrm>
+            <a:off x="10710367" y="6355080"/>
+            <a:ext cx="914400" cy="219456"/>
+          </a:xfrm>
+          <a:prstGeom prst="rect">
+            <a:avLst/>
+          </a:prstGeom>
+          <a:noFill/>
+        </p:spPr>
+        <p:txBody>
+          <a:bodyPr wrap="square" lIns="0" rIns="0" tIns="0" bIns="0" anchor="t">
+            <a:spAutoFit/>
+          </a:bodyPr>
+          <a:lstStyle/>
+          <a:p>
+            <a:pPr algn="r">
+              <a:lnSpc>
+                <a:spcPct val="135000"/>
+              </a:lnSpc>
+            </a:pPr>
+            <a:r>
+              <a:rPr sz="1200" b="0" i="0">
+                <a:solidFill>
+                  <a:srgbClr val="6E7175"/>
+                </a:solidFill>
+                <a:latin typeface="Verdana"/>
+              </a:rPr>
+              <a:t>21</a:t>
+            </a:r>
+          </a:p>
+        </p:txBody>
+      </p:sp>
+      <p:sp>
+        <p:nvSpPr>
+          <p:cNvPr id="5" name="TextBox 4"/>
+          <p:cNvSpPr txBox="1"/>
+          <p:nvPr/>
+        </p:nvSpPr>
+        <p:spPr>
+          <a:xfrm>
+            <a:off x="566928" y="420624"/>
+            <a:ext cx="11057839" cy="237744"/>
+          </a:xfrm>
+          <a:prstGeom prst="rect">
+            <a:avLst/>
+          </a:prstGeom>
+          <a:noFill/>
+        </p:spPr>
+        <p:txBody>
+          <a:bodyPr wrap="square" lIns="0" rIns="0" tIns="0" bIns="0" anchor="t">
+            <a:spAutoFit/>
+          </a:bodyPr>
+          <a:lstStyle/>
+          <a:p>
+            <a:pPr algn="l">
+              <a:lnSpc>
+                <a:spcPct val="135000"/>
+              </a:lnSpc>
+            </a:pPr>
+            <a:r>
+              <a:rPr sz="1300" b="1" i="0" spc="156">
+                <a:solidFill>
+                  <a:srgbClr val="166534"/>
+                </a:solidFill>
+                <a:latin typeface="Verdana"/>
+              </a:rPr>
+              <a:t>PRATIQUE · 5 DE 6</a:t>
+            </a:r>
+          </a:p>
+        </p:txBody>
+      </p:sp>
+      <p:sp>
+        <p:nvSpPr>
+          <p:cNvPr id="6" name="TextBox 5"/>
+          <p:cNvSpPr txBox="1"/>
+          <p:nvPr/>
+        </p:nvSpPr>
+        <p:spPr>
+          <a:xfrm>
+            <a:off x="566928" y="749808"/>
+            <a:ext cx="11057839" cy="877824"/>
+          </a:xfrm>
+          <a:prstGeom prst="rect">
+            <a:avLst/>
+          </a:prstGeom>
+          <a:noFill/>
+        </p:spPr>
+        <p:txBody>
+          <a:bodyPr wrap="square" lIns="0" rIns="0" tIns="0" bIns="0" anchor="t">
+            <a:spAutoFit/>
+          </a:bodyPr>
+          <a:lstStyle/>
+          <a:p>
+            <a:pPr algn="l">
+              <a:lnSpc>
+                <a:spcPct val="115000"/>
+              </a:lnSpc>
+            </a:pPr>
+            <a:r>
+              <a:rPr sz="3400" b="1" i="0">
+                <a:solidFill>
+                  <a:srgbClr val="17181A"/>
+                </a:solidFill>
+                <a:latin typeface="Verdana"/>
+              </a:rPr>
+              <a:t>Quel son entendez-vous ?</a:t>
+            </a:r>
+          </a:p>
+        </p:txBody>
+      </p:sp>
+      <p:sp>
+        <p:nvSpPr>
+          <p:cNvPr id="7" name="TextBox 6"/>
+          <p:cNvSpPr txBox="1"/>
+          <p:nvPr/>
+        </p:nvSpPr>
+        <p:spPr>
+          <a:xfrm>
+            <a:off x="566928" y="1645920"/>
+            <a:ext cx="11057839" cy="329184"/>
+          </a:xfrm>
+          <a:prstGeom prst="rect">
+            <a:avLst/>
+          </a:prstGeom>
+          <a:noFill/>
+        </p:spPr>
+        <p:txBody>
+          <a:bodyPr wrap="square" lIns="0" rIns="0" tIns="0" bIns="0" anchor="t">
+            <a:spAutoFit/>
+          </a:bodyPr>
+          <a:lstStyle/>
+          <a:p>
+            <a:pPr algn="l">
+              <a:lnSpc>
+                <a:spcPct val="135000"/>
+              </a:lnSpc>
+            </a:pPr>
+            <a:r>
+              <a:rPr sz="1800" b="0" i="0">
+                <a:solidFill>
+                  <a:srgbClr val="6E7175"/>
+                </a:solidFill>
+                <a:latin typeface="Verdana"/>
+              </a:rPr>
+              <a:t>Écoutez le mot, écrivez « an » ou « on ».</a:t>
+            </a:r>
+          </a:p>
+        </p:txBody>
+      </p:sp>
+      <p:sp>
+        <p:nvSpPr>
+          <p:cNvPr id="8" name="Rounded Rectangle 7"/>
+          <p:cNvSpPr/>
+          <p:nvPr/>
+        </p:nvSpPr>
+        <p:spPr>
+          <a:xfrm>
+            <a:off x="566928" y="2139696"/>
+            <a:ext cx="5464911" cy="648716"/>
+          </a:xfrm>
+          <a:prstGeom prst="roundRect">
+            <a:avLst>
+              <a:gd name="adj" fmla="val 22552"/>
+            </a:avLst>
+          </a:prstGeom>
+          <a:solidFill>
+            <a:srgbClr val="FFFFFF"/>
+          </a:solidFill>
+          <a:ln w="12700">
+            <a:solidFill>
+              <a:srgbClr val="EAEAE8"/>
+            </a:solidFill>
+          </a:ln>
+          <a:effectLst/>
+        </p:spPr>
+        <p:style>
+          <a:lnRef idx="1">
+            <a:schemeClr val="accent1"/>
+          </a:lnRef>
+          <a:fillRef idx="3">
+            <a:schemeClr val="accent1"/>
+          </a:fillRef>
+          <a:effectRef idx="2">
+            <a:schemeClr val="accent1"/>
+          </a:effectRef>
+          <a:fontRef idx="minor">
+            <a:schemeClr val="lt1"/>
+          </a:fontRef>
+        </p:style>
+        <p:txBody>
+          <a:bodyPr rtlCol="0" anchor="ctr"/>
+          <a:lstStyle/>
+          <a:p/>
+        </p:txBody>
+      </p:sp>
+      <p:sp>
+        <p:nvSpPr>
+          <p:cNvPr id="9" name="Rounded Rectangle 8"/>
+          <p:cNvSpPr/>
+          <p:nvPr/>
+        </p:nvSpPr>
+        <p:spPr>
+          <a:xfrm>
+            <a:off x="841247" y="2281174"/>
+            <a:ext cx="365760" cy="365760"/>
+          </a:xfrm>
+          <a:prstGeom prst="roundRect">
+            <a:avLst>
+              <a:gd name="adj" fmla="val 32500"/>
+            </a:avLst>
+          </a:prstGeom>
+          <a:solidFill>
+            <a:srgbClr val="E3F1E7"/>
+          </a:solidFill>
+          <a:ln>
+            <a:noFill/>
+          </a:ln>
+          <a:effectLst/>
+        </p:spPr>
+        <p:style>
+          <a:lnRef idx="1">
+            <a:schemeClr val="accent1"/>
+          </a:lnRef>
+          <a:fillRef idx="3">
+            <a:schemeClr val="accent1"/>
+          </a:fillRef>
+          <a:effectRef idx="2">
+            <a:schemeClr val="accent1"/>
+          </a:effectRef>
+          <a:fontRef idx="minor">
+            <a:schemeClr val="lt1"/>
+          </a:fontRef>
+        </p:style>
+        <p:txBody>
+          <a:bodyPr rtlCol="0" anchor="ctr"/>
+          <a:lstStyle/>
+          <a:p/>
+        </p:txBody>
+      </p:sp>
+      <p:sp>
+        <p:nvSpPr>
+          <p:cNvPr id="10" name="TextBox 9"/>
+          <p:cNvSpPr txBox="1"/>
+          <p:nvPr/>
+        </p:nvSpPr>
+        <p:spPr>
+          <a:xfrm>
+            <a:off x="841247" y="2345182"/>
+            <a:ext cx="365760" cy="256032"/>
+          </a:xfrm>
+          <a:prstGeom prst="rect">
+            <a:avLst/>
+          </a:prstGeom>
+          <a:noFill/>
+        </p:spPr>
+        <p:txBody>
+          <a:bodyPr wrap="square" lIns="0" rIns="0" tIns="0" bIns="0" anchor="t">
+            <a:spAutoFit/>
+          </a:bodyPr>
+          <a:lstStyle/>
+          <a:p>
+            <a:pPr algn="ctr">
+              <a:lnSpc>
+                <a:spcPct val="135000"/>
+              </a:lnSpc>
+            </a:pPr>
+            <a:r>
+              <a:rPr sz="1500" b="1" i="0">
+                <a:solidFill>
+                  <a:srgbClr val="166534"/>
+                </a:solidFill>
+                <a:latin typeface="Verdana"/>
+              </a:rPr>
+              <a:t>1</a:t>
+            </a:r>
+          </a:p>
+        </p:txBody>
+      </p:sp>
+      <p:sp>
+        <p:nvSpPr>
+          <p:cNvPr id="11" name="TextBox 10"/>
+          <p:cNvSpPr txBox="1"/>
+          <p:nvPr/>
+        </p:nvSpPr>
+        <p:spPr>
+          <a:xfrm>
+            <a:off x="1344168" y="2295144"/>
+            <a:ext cx="4504791" cy="374396"/>
+          </a:xfrm>
+          <a:prstGeom prst="rect">
+            <a:avLst/>
+          </a:prstGeom>
+          <a:noFill/>
+        </p:spPr>
+        <p:txBody>
+          <a:bodyPr wrap="square" lIns="0" rIns="0" tIns="0" bIns="0" anchor="t">
+            <a:spAutoFit/>
+          </a:bodyPr>
+          <a:lstStyle/>
+          <a:p>
+            <a:pPr algn="l">
+              <a:lnSpc>
+                <a:spcPct val="140000"/>
+              </a:lnSpc>
+            </a:pPr>
+            <a:r>
+              <a:rPr sz="1900" b="0" i="0">
+                <a:solidFill>
+                  <a:srgbClr val="3A3D40"/>
+                </a:solidFill>
+                <a:latin typeface="Verdana"/>
+              </a:rPr>
+              <a:t>logement</a:t>
+            </a:r>
+          </a:p>
+        </p:txBody>
+      </p:sp>
+      <p:sp>
+        <p:nvSpPr>
+          <p:cNvPr id="12" name="Rounded Rectangle 11"/>
+          <p:cNvSpPr/>
+          <p:nvPr/>
+        </p:nvSpPr>
+        <p:spPr>
+          <a:xfrm>
+            <a:off x="6159855" y="2139696"/>
+            <a:ext cx="5464911" cy="648716"/>
+          </a:xfrm>
+          <a:prstGeom prst="roundRect">
+            <a:avLst>
+              <a:gd name="adj" fmla="val 22552"/>
+            </a:avLst>
+          </a:prstGeom>
+          <a:solidFill>
+            <a:srgbClr val="FFFFFF"/>
+          </a:solidFill>
+          <a:ln w="12700">
+            <a:solidFill>
+              <a:srgbClr val="EAEAE8"/>
+            </a:solidFill>
+          </a:ln>
+          <a:effectLst/>
+        </p:spPr>
+        <p:style>
+          <a:lnRef idx="1">
+            <a:schemeClr val="accent1"/>
+          </a:lnRef>
+          <a:fillRef idx="3">
+            <a:schemeClr val="accent1"/>
+          </a:fillRef>
+          <a:effectRef idx="2">
+            <a:schemeClr val="accent1"/>
+          </a:effectRef>
+          <a:fontRef idx="minor">
+            <a:schemeClr val="lt1"/>
+          </a:fontRef>
+        </p:style>
+        <p:txBody>
+          <a:bodyPr rtlCol="0" anchor="ctr"/>
+          <a:lstStyle/>
+          <a:p/>
+        </p:txBody>
+      </p:sp>
+      <p:sp>
+        <p:nvSpPr>
+          <p:cNvPr id="13" name="Rounded Rectangle 12"/>
+          <p:cNvSpPr/>
+          <p:nvPr/>
+        </p:nvSpPr>
+        <p:spPr>
+          <a:xfrm>
+            <a:off x="6434175" y="2281174"/>
+            <a:ext cx="365760" cy="365760"/>
+          </a:xfrm>
+          <a:prstGeom prst="roundRect">
+            <a:avLst>
+              <a:gd name="adj" fmla="val 32500"/>
+            </a:avLst>
+          </a:prstGeom>
+          <a:solidFill>
+            <a:srgbClr val="E3F1E7"/>
+          </a:solidFill>
+          <a:ln>
+            <a:noFill/>
+          </a:ln>
+          <a:effectLst/>
+        </p:spPr>
+        <p:style>
+          <a:lnRef idx="1">
+            <a:schemeClr val="accent1"/>
+          </a:lnRef>
+          <a:fillRef idx="3">
+            <a:schemeClr val="accent1"/>
+          </a:fillRef>
+          <a:effectRef idx="2">
+            <a:schemeClr val="accent1"/>
+          </a:effectRef>
+          <a:fontRef idx="minor">
+            <a:schemeClr val="lt1"/>
+          </a:fontRef>
+        </p:style>
+        <p:txBody>
+          <a:bodyPr rtlCol="0" anchor="ctr"/>
+          <a:lstStyle/>
+          <a:p/>
+        </p:txBody>
+      </p:sp>
+      <p:sp>
+        <p:nvSpPr>
+          <p:cNvPr id="14" name="TextBox 13"/>
+          <p:cNvSpPr txBox="1"/>
+          <p:nvPr/>
+        </p:nvSpPr>
+        <p:spPr>
+          <a:xfrm>
+            <a:off x="6434175" y="2345182"/>
+            <a:ext cx="365760" cy="256032"/>
+          </a:xfrm>
+          <a:prstGeom prst="rect">
+            <a:avLst/>
+          </a:prstGeom>
+          <a:noFill/>
+        </p:spPr>
+        <p:txBody>
+          <a:bodyPr wrap="square" lIns="0" rIns="0" tIns="0" bIns="0" anchor="t">
+            <a:spAutoFit/>
+          </a:bodyPr>
+          <a:lstStyle/>
+          <a:p>
+            <a:pPr algn="ctr">
+              <a:lnSpc>
+                <a:spcPct val="135000"/>
+              </a:lnSpc>
+            </a:pPr>
+            <a:r>
+              <a:rPr sz="1500" b="1" i="0">
+                <a:solidFill>
+                  <a:srgbClr val="166534"/>
+                </a:solidFill>
+                <a:latin typeface="Verdana"/>
+              </a:rPr>
+              <a:t>2</a:t>
+            </a:r>
+          </a:p>
+        </p:txBody>
+      </p:sp>
+      <p:sp>
+        <p:nvSpPr>
+          <p:cNvPr id="15" name="TextBox 14"/>
+          <p:cNvSpPr txBox="1"/>
+          <p:nvPr/>
+        </p:nvSpPr>
+        <p:spPr>
+          <a:xfrm>
+            <a:off x="6937095" y="2295144"/>
+            <a:ext cx="4504791" cy="374396"/>
+          </a:xfrm>
+          <a:prstGeom prst="rect">
+            <a:avLst/>
+          </a:prstGeom>
+          <a:noFill/>
+        </p:spPr>
+        <p:txBody>
+          <a:bodyPr wrap="square" lIns="0" rIns="0" tIns="0" bIns="0" anchor="t">
+            <a:spAutoFit/>
+          </a:bodyPr>
+          <a:lstStyle/>
+          <a:p>
+            <a:pPr algn="l">
+              <a:lnSpc>
+                <a:spcPct val="140000"/>
+              </a:lnSpc>
+            </a:pPr>
+            <a:r>
+              <a:rPr sz="1900" b="0" i="0">
+                <a:solidFill>
+                  <a:srgbClr val="3A3D40"/>
+                </a:solidFill>
+                <a:latin typeface="Verdana"/>
+              </a:rPr>
+              <a:t>salon</a:t>
+            </a:r>
+          </a:p>
+        </p:txBody>
+      </p:sp>
+      <p:sp>
+        <p:nvSpPr>
+          <p:cNvPr id="16" name="Rounded Rectangle 15"/>
+          <p:cNvSpPr/>
+          <p:nvPr/>
+        </p:nvSpPr>
+        <p:spPr>
+          <a:xfrm>
+            <a:off x="566928" y="2916428"/>
+            <a:ext cx="5464911" cy="648716"/>
+          </a:xfrm>
+          <a:prstGeom prst="roundRect">
+            <a:avLst>
+              <a:gd name="adj" fmla="val 22552"/>
+            </a:avLst>
+          </a:prstGeom>
+          <a:solidFill>
+            <a:srgbClr val="FFFFFF"/>
+          </a:solidFill>
+          <a:ln w="12700">
+            <a:solidFill>
+              <a:srgbClr val="EAEAE8"/>
+            </a:solidFill>
+          </a:ln>
+          <a:effectLst/>
+        </p:spPr>
+        <p:style>
+          <a:lnRef idx="1">
+            <a:schemeClr val="accent1"/>
+          </a:lnRef>
+          <a:fillRef idx="3">
+            <a:schemeClr val="accent1"/>
+          </a:fillRef>
+          <a:effectRef idx="2">
+            <a:schemeClr val="accent1"/>
+          </a:effectRef>
+          <a:fontRef idx="minor">
+            <a:schemeClr val="lt1"/>
+          </a:fontRef>
+        </p:style>
+        <p:txBody>
+          <a:bodyPr rtlCol="0" anchor="ctr"/>
+          <a:lstStyle/>
+          <a:p/>
+        </p:txBody>
+      </p:sp>
+      <p:sp>
+        <p:nvSpPr>
+          <p:cNvPr id="17" name="Rounded Rectangle 16"/>
+          <p:cNvSpPr/>
+          <p:nvPr/>
+        </p:nvSpPr>
+        <p:spPr>
+          <a:xfrm>
+            <a:off x="841247" y="3057905"/>
+            <a:ext cx="365760" cy="365760"/>
+          </a:xfrm>
+          <a:prstGeom prst="roundRect">
+            <a:avLst>
+              <a:gd name="adj" fmla="val 32500"/>
+            </a:avLst>
+          </a:prstGeom>
+          <a:solidFill>
+            <a:srgbClr val="E3F1E7"/>
+          </a:solidFill>
+          <a:ln>
+            <a:noFill/>
+          </a:ln>
+          <a:effectLst/>
+        </p:spPr>
+        <p:style>
+          <a:lnRef idx="1">
+            <a:schemeClr val="accent1"/>
+          </a:lnRef>
+          <a:fillRef idx="3">
+            <a:schemeClr val="accent1"/>
+          </a:fillRef>
+          <a:effectRef idx="2">
+            <a:schemeClr val="accent1"/>
+          </a:effectRef>
+          <a:fontRef idx="minor">
+            <a:schemeClr val="lt1"/>
+          </a:fontRef>
+        </p:style>
+        <p:txBody>
+          <a:bodyPr rtlCol="0" anchor="ctr"/>
+          <a:lstStyle/>
+          <a:p/>
+        </p:txBody>
+      </p:sp>
+      <p:sp>
+        <p:nvSpPr>
+          <p:cNvPr id="18" name="TextBox 17"/>
+          <p:cNvSpPr txBox="1"/>
+          <p:nvPr/>
+        </p:nvSpPr>
+        <p:spPr>
+          <a:xfrm>
+            <a:off x="841247" y="3121913"/>
+            <a:ext cx="365760" cy="256032"/>
+          </a:xfrm>
+          <a:prstGeom prst="rect">
+            <a:avLst/>
+          </a:prstGeom>
+          <a:noFill/>
+        </p:spPr>
+        <p:txBody>
+          <a:bodyPr wrap="square" lIns="0" rIns="0" tIns="0" bIns="0" anchor="t">
+            <a:spAutoFit/>
+          </a:bodyPr>
+          <a:lstStyle/>
+          <a:p>
+            <a:pPr algn="ctr">
+              <a:lnSpc>
+                <a:spcPct val="135000"/>
+              </a:lnSpc>
+            </a:pPr>
+            <a:r>
+              <a:rPr sz="1500" b="1" i="0">
+                <a:solidFill>
+                  <a:srgbClr val="166534"/>
+                </a:solidFill>
+                <a:latin typeface="Verdana"/>
+              </a:rPr>
+              <a:t>3</a:t>
+            </a:r>
+          </a:p>
+        </p:txBody>
+      </p:sp>
+      <p:sp>
+        <p:nvSpPr>
+          <p:cNvPr id="19" name="TextBox 18"/>
+          <p:cNvSpPr txBox="1"/>
+          <p:nvPr/>
+        </p:nvSpPr>
+        <p:spPr>
+          <a:xfrm>
+            <a:off x="1344168" y="3071876"/>
+            <a:ext cx="4504791" cy="374396"/>
+          </a:xfrm>
+          <a:prstGeom prst="rect">
+            <a:avLst/>
+          </a:prstGeom>
+          <a:noFill/>
+        </p:spPr>
+        <p:txBody>
+          <a:bodyPr wrap="square" lIns="0" rIns="0" tIns="0" bIns="0" anchor="t">
+            <a:spAutoFit/>
+          </a:bodyPr>
+          <a:lstStyle/>
+          <a:p>
+            <a:pPr algn="l">
+              <a:lnSpc>
+                <a:spcPct val="140000"/>
+              </a:lnSpc>
+            </a:pPr>
+            <a:r>
+              <a:rPr sz="1900" b="0" i="0">
+                <a:solidFill>
+                  <a:srgbClr val="3A3D40"/>
+                </a:solidFill>
+                <a:latin typeface="Verdana"/>
+              </a:rPr>
+              <a:t>chambre</a:t>
+            </a:r>
+          </a:p>
+        </p:txBody>
+      </p:sp>
+      <p:sp>
+        <p:nvSpPr>
+          <p:cNvPr id="20" name="Rounded Rectangle 19"/>
+          <p:cNvSpPr/>
+          <p:nvPr/>
+        </p:nvSpPr>
+        <p:spPr>
+          <a:xfrm>
+            <a:off x="6159855" y="2916428"/>
+            <a:ext cx="5464911" cy="648716"/>
+          </a:xfrm>
+          <a:prstGeom prst="roundRect">
+            <a:avLst>
+              <a:gd name="adj" fmla="val 22552"/>
+            </a:avLst>
+          </a:prstGeom>
+          <a:solidFill>
+            <a:srgbClr val="FFFFFF"/>
+          </a:solidFill>
+          <a:ln w="12700">
+            <a:solidFill>
+              <a:srgbClr val="EAEAE8"/>
+            </a:solidFill>
+          </a:ln>
+          <a:effectLst/>
+        </p:spPr>
+        <p:style>
+          <a:lnRef idx="1">
+            <a:schemeClr val="accent1"/>
+          </a:lnRef>
+          <a:fillRef idx="3">
+            <a:schemeClr val="accent1"/>
+          </a:fillRef>
+          <a:effectRef idx="2">
+            <a:schemeClr val="accent1"/>
+          </a:effectRef>
+          <a:fontRef idx="minor">
+            <a:schemeClr val="lt1"/>
+          </a:fontRef>
+        </p:style>
+        <p:txBody>
+          <a:bodyPr rtlCol="0" anchor="ctr"/>
+          <a:lstStyle/>
+          <a:p/>
+        </p:txBody>
+      </p:sp>
+      <p:sp>
+        <p:nvSpPr>
+          <p:cNvPr id="21" name="Rounded Rectangle 20"/>
+          <p:cNvSpPr/>
+          <p:nvPr/>
+        </p:nvSpPr>
+        <p:spPr>
+          <a:xfrm>
+            <a:off x="6434175" y="3057905"/>
+            <a:ext cx="365760" cy="365760"/>
+          </a:xfrm>
+          <a:prstGeom prst="roundRect">
+            <a:avLst>
+              <a:gd name="adj" fmla="val 32500"/>
+            </a:avLst>
+          </a:prstGeom>
+          <a:solidFill>
+            <a:srgbClr val="E3F1E7"/>
+          </a:solidFill>
+          <a:ln>
+            <a:noFill/>
+          </a:ln>
+          <a:effectLst/>
+        </p:spPr>
+        <p:style>
+          <a:lnRef idx="1">
+            <a:schemeClr val="accent1"/>
+          </a:lnRef>
+          <a:fillRef idx="3">
+            <a:schemeClr val="accent1"/>
+          </a:fillRef>
+          <a:effectRef idx="2">
+            <a:schemeClr val="accent1"/>
+          </a:effectRef>
+          <a:fontRef idx="minor">
+            <a:schemeClr val="lt1"/>
+          </a:fontRef>
+        </p:style>
+        <p:txBody>
+          <a:bodyPr rtlCol="0" anchor="ctr"/>
+          <a:lstStyle/>
+          <a:p/>
+        </p:txBody>
+      </p:sp>
+      <p:sp>
+        <p:nvSpPr>
+          <p:cNvPr id="22" name="TextBox 21"/>
+          <p:cNvSpPr txBox="1"/>
+          <p:nvPr/>
+        </p:nvSpPr>
+        <p:spPr>
+          <a:xfrm>
+            <a:off x="6434175" y="3121913"/>
+            <a:ext cx="365760" cy="256032"/>
+          </a:xfrm>
+          <a:prstGeom prst="rect">
+            <a:avLst/>
+          </a:prstGeom>
+          <a:noFill/>
+        </p:spPr>
+        <p:txBody>
+          <a:bodyPr wrap="square" lIns="0" rIns="0" tIns="0" bIns="0" anchor="t">
+            <a:spAutoFit/>
+          </a:bodyPr>
+          <a:lstStyle/>
+          <a:p>
+            <a:pPr algn="ctr">
+              <a:lnSpc>
+                <a:spcPct val="135000"/>
+              </a:lnSpc>
+            </a:pPr>
+            <a:r>
+              <a:rPr sz="1500" b="1" i="0">
+                <a:solidFill>
+                  <a:srgbClr val="166534"/>
+                </a:solidFill>
+                <a:latin typeface="Verdana"/>
+              </a:rPr>
+              <a:t>4</a:t>
+            </a:r>
+          </a:p>
+        </p:txBody>
+      </p:sp>
+      <p:sp>
+        <p:nvSpPr>
+          <p:cNvPr id="23" name="TextBox 22"/>
+          <p:cNvSpPr txBox="1"/>
+          <p:nvPr/>
+        </p:nvSpPr>
+        <p:spPr>
+          <a:xfrm>
+            <a:off x="6937095" y="3071876"/>
+            <a:ext cx="4504791" cy="374396"/>
+          </a:xfrm>
+          <a:prstGeom prst="rect">
+            <a:avLst/>
+          </a:prstGeom>
+          <a:noFill/>
+        </p:spPr>
+        <p:txBody>
+          <a:bodyPr wrap="square" lIns="0" rIns="0" tIns="0" bIns="0" anchor="t">
+            <a:spAutoFit/>
+          </a:bodyPr>
+          <a:lstStyle/>
+          <a:p>
+            <a:pPr algn="l">
+              <a:lnSpc>
+                <a:spcPct val="140000"/>
+              </a:lnSpc>
+            </a:pPr>
+            <a:r>
+              <a:rPr sz="1900" b="0" i="0">
+                <a:solidFill>
+                  <a:srgbClr val="3A3D40"/>
+                </a:solidFill>
+                <a:latin typeface="Verdana"/>
+              </a:rPr>
+              <a:t>camion</a:t>
+            </a:r>
+          </a:p>
+        </p:txBody>
+      </p:sp>
+      <p:sp>
+        <p:nvSpPr>
+          <p:cNvPr id="24" name="Rounded Rectangle 23"/>
+          <p:cNvSpPr/>
+          <p:nvPr/>
+        </p:nvSpPr>
+        <p:spPr>
+          <a:xfrm>
+            <a:off x="566928" y="3693160"/>
+            <a:ext cx="5464911" cy="648716"/>
+          </a:xfrm>
+          <a:prstGeom prst="roundRect">
+            <a:avLst>
+              <a:gd name="adj" fmla="val 22552"/>
+            </a:avLst>
+          </a:prstGeom>
+          <a:solidFill>
+            <a:srgbClr val="FFFFFF"/>
+          </a:solidFill>
+          <a:ln w="12700">
+            <a:solidFill>
+              <a:srgbClr val="EAEAE8"/>
+            </a:solidFill>
+          </a:ln>
+          <a:effectLst/>
+        </p:spPr>
+        <p:style>
+          <a:lnRef idx="1">
+            <a:schemeClr val="accent1"/>
+          </a:lnRef>
+          <a:fillRef idx="3">
+            <a:schemeClr val="accent1"/>
+          </a:fillRef>
+          <a:effectRef idx="2">
+            <a:schemeClr val="accent1"/>
+          </a:effectRef>
+          <a:fontRef idx="minor">
+            <a:schemeClr val="lt1"/>
+          </a:fontRef>
+        </p:style>
+        <p:txBody>
+          <a:bodyPr rtlCol="0" anchor="ctr"/>
+          <a:lstStyle/>
+          <a:p/>
+        </p:txBody>
+      </p:sp>
+      <p:sp>
+        <p:nvSpPr>
+          <p:cNvPr id="25" name="Rounded Rectangle 24"/>
+          <p:cNvSpPr/>
+          <p:nvPr/>
+        </p:nvSpPr>
+        <p:spPr>
+          <a:xfrm>
+            <a:off x="841247" y="3834638"/>
+            <a:ext cx="365760" cy="365760"/>
+          </a:xfrm>
+          <a:prstGeom prst="roundRect">
+            <a:avLst>
+              <a:gd name="adj" fmla="val 32500"/>
+            </a:avLst>
+          </a:prstGeom>
+          <a:solidFill>
+            <a:srgbClr val="E3F1E7"/>
+          </a:solidFill>
+          <a:ln>
+            <a:noFill/>
+          </a:ln>
+          <a:effectLst/>
+        </p:spPr>
+        <p:style>
+          <a:lnRef idx="1">
+            <a:schemeClr val="accent1"/>
+          </a:lnRef>
+          <a:fillRef idx="3">
+            <a:schemeClr val="accent1"/>
+          </a:fillRef>
+          <a:effectRef idx="2">
+            <a:schemeClr val="accent1"/>
+          </a:effectRef>
+          <a:fontRef idx="minor">
+            <a:schemeClr val="lt1"/>
+          </a:fontRef>
+        </p:style>
+        <p:txBody>
+          <a:bodyPr rtlCol="0" anchor="ctr"/>
+          <a:lstStyle/>
+          <a:p/>
+        </p:txBody>
+      </p:sp>
+      <p:sp>
+        <p:nvSpPr>
+          <p:cNvPr id="26" name="TextBox 25"/>
+          <p:cNvSpPr txBox="1"/>
+          <p:nvPr/>
+        </p:nvSpPr>
+        <p:spPr>
+          <a:xfrm>
+            <a:off x="841247" y="3898646"/>
+            <a:ext cx="365760" cy="256032"/>
+          </a:xfrm>
+          <a:prstGeom prst="rect">
+            <a:avLst/>
+          </a:prstGeom>
+          <a:noFill/>
+        </p:spPr>
+        <p:txBody>
+          <a:bodyPr wrap="square" lIns="0" rIns="0" tIns="0" bIns="0" anchor="t">
+            <a:spAutoFit/>
+          </a:bodyPr>
+          <a:lstStyle/>
+          <a:p>
+            <a:pPr algn="ctr">
+              <a:lnSpc>
+                <a:spcPct val="135000"/>
+              </a:lnSpc>
+            </a:pPr>
+            <a:r>
+              <a:rPr sz="1500" b="1" i="0">
+                <a:solidFill>
+                  <a:srgbClr val="166534"/>
+                </a:solidFill>
+                <a:latin typeface="Verdana"/>
+              </a:rPr>
+              <a:t>5</a:t>
+            </a:r>
+          </a:p>
+        </p:txBody>
+      </p:sp>
+      <p:sp>
+        <p:nvSpPr>
+          <p:cNvPr id="27" name="TextBox 26"/>
+          <p:cNvSpPr txBox="1"/>
+          <p:nvPr/>
+        </p:nvSpPr>
+        <p:spPr>
+          <a:xfrm>
+            <a:off x="1344168" y="3848608"/>
+            <a:ext cx="4504791" cy="374396"/>
+          </a:xfrm>
+          <a:prstGeom prst="rect">
+            <a:avLst/>
+          </a:prstGeom>
+          <a:noFill/>
+        </p:spPr>
+        <p:txBody>
+          <a:bodyPr wrap="square" lIns="0" rIns="0" tIns="0" bIns="0" anchor="t">
+            <a:spAutoFit/>
+          </a:bodyPr>
+          <a:lstStyle/>
+          <a:p>
+            <a:pPr algn="l">
+              <a:lnSpc>
+                <a:spcPct val="140000"/>
+              </a:lnSpc>
+            </a:pPr>
+            <a:r>
+              <a:rPr sz="1900" b="0" i="0">
+                <a:solidFill>
+                  <a:srgbClr val="3A3D40"/>
+                </a:solidFill>
+                <a:latin typeface="Verdana"/>
+              </a:rPr>
+              <a:t>buanderie</a:t>
+            </a:r>
+          </a:p>
+        </p:txBody>
+      </p:sp>
+      <p:sp>
+        <p:nvSpPr>
+          <p:cNvPr id="28" name="Rounded Rectangle 27"/>
+          <p:cNvSpPr/>
+          <p:nvPr/>
+        </p:nvSpPr>
+        <p:spPr>
+          <a:xfrm>
+            <a:off x="6159855" y="3693160"/>
+            <a:ext cx="5464911" cy="648716"/>
+          </a:xfrm>
+          <a:prstGeom prst="roundRect">
+            <a:avLst>
+              <a:gd name="adj" fmla="val 22552"/>
+            </a:avLst>
+          </a:prstGeom>
+          <a:solidFill>
+            <a:srgbClr val="FFFFFF"/>
+          </a:solidFill>
+          <a:ln w="12700">
+            <a:solidFill>
+              <a:srgbClr val="EAEAE8"/>
+            </a:solidFill>
+          </a:ln>
+          <a:effectLst/>
+        </p:spPr>
+        <p:style>
+          <a:lnRef idx="1">
+            <a:schemeClr val="accent1"/>
+          </a:lnRef>
+          <a:fillRef idx="3">
+            <a:schemeClr val="accent1"/>
+          </a:fillRef>
+          <a:effectRef idx="2">
+            <a:schemeClr val="accent1"/>
+          </a:effectRef>
+          <a:fontRef idx="minor">
+            <a:schemeClr val="lt1"/>
+          </a:fontRef>
+        </p:style>
+        <p:txBody>
+          <a:bodyPr rtlCol="0" anchor="ctr"/>
+          <a:lstStyle/>
+          <a:p/>
+        </p:txBody>
+      </p:sp>
+      <p:sp>
+        <p:nvSpPr>
+          <p:cNvPr id="29" name="Rounded Rectangle 28"/>
+          <p:cNvSpPr/>
+          <p:nvPr/>
+        </p:nvSpPr>
+        <p:spPr>
+          <a:xfrm>
+            <a:off x="6434175" y="3834638"/>
+            <a:ext cx="365760" cy="365760"/>
+          </a:xfrm>
+          <a:prstGeom prst="roundRect">
+            <a:avLst>
+              <a:gd name="adj" fmla="val 32500"/>
+            </a:avLst>
+          </a:prstGeom>
+          <a:solidFill>
+            <a:srgbClr val="E3F1E7"/>
+          </a:solidFill>
+          <a:ln>
+            <a:noFill/>
+          </a:ln>
+          <a:effectLst/>
+        </p:spPr>
+        <p:style>
+          <a:lnRef idx="1">
+            <a:schemeClr val="accent1"/>
+          </a:lnRef>
+          <a:fillRef idx="3">
+            <a:schemeClr val="accent1"/>
+          </a:fillRef>
+          <a:effectRef idx="2">
+            <a:schemeClr val="accent1"/>
+          </a:effectRef>
+          <a:fontRef idx="minor">
+            <a:schemeClr val="lt1"/>
+          </a:fontRef>
+        </p:style>
+        <p:txBody>
+          <a:bodyPr rtlCol="0" anchor="ctr"/>
+          <a:lstStyle/>
+          <a:p/>
+        </p:txBody>
+      </p:sp>
+      <p:sp>
+        <p:nvSpPr>
+          <p:cNvPr id="30" name="TextBox 29"/>
+          <p:cNvSpPr txBox="1"/>
+          <p:nvPr/>
+        </p:nvSpPr>
+        <p:spPr>
+          <a:xfrm>
+            <a:off x="6434175" y="3898646"/>
+            <a:ext cx="365760" cy="256032"/>
+          </a:xfrm>
+          <a:prstGeom prst="rect">
+            <a:avLst/>
+          </a:prstGeom>
+          <a:noFill/>
+        </p:spPr>
+        <p:txBody>
+          <a:bodyPr wrap="square" lIns="0" rIns="0" tIns="0" bIns="0" anchor="t">
+            <a:spAutoFit/>
+          </a:bodyPr>
+          <a:lstStyle/>
+          <a:p>
+            <a:pPr algn="ctr">
+              <a:lnSpc>
+                <a:spcPct val="135000"/>
+              </a:lnSpc>
+            </a:pPr>
+            <a:r>
+              <a:rPr sz="1500" b="1" i="0">
+                <a:solidFill>
+                  <a:srgbClr val="166534"/>
+                </a:solidFill>
+                <a:latin typeface="Verdana"/>
+              </a:rPr>
+              <a:t>6</a:t>
+            </a:r>
+          </a:p>
+        </p:txBody>
+      </p:sp>
+      <p:sp>
+        <p:nvSpPr>
+          <p:cNvPr id="31" name="TextBox 30"/>
+          <p:cNvSpPr txBox="1"/>
+          <p:nvPr/>
+        </p:nvSpPr>
+        <p:spPr>
+          <a:xfrm>
+            <a:off x="6937095" y="3848608"/>
+            <a:ext cx="4504791" cy="374396"/>
+          </a:xfrm>
+          <a:prstGeom prst="rect">
+            <a:avLst/>
+          </a:prstGeom>
+          <a:noFill/>
+        </p:spPr>
+        <p:txBody>
+          <a:bodyPr wrap="square" lIns="0" rIns="0" tIns="0" bIns="0" anchor="t">
+            <a:spAutoFit/>
+          </a:bodyPr>
+          <a:lstStyle/>
+          <a:p>
+            <a:pPr algn="l">
+              <a:lnSpc>
+                <a:spcPct val="140000"/>
+              </a:lnSpc>
+            </a:pPr>
+            <a:r>
+              <a:rPr sz="1900" b="0" i="0">
+                <a:solidFill>
+                  <a:srgbClr val="3A3D40"/>
+                </a:solidFill>
+                <a:latin typeface="Verdana"/>
+              </a:rPr>
+              <a:t>maison</a:t>
+            </a:r>
+          </a:p>
+        </p:txBody>
+      </p:sp>
+      <p:sp>
+        <p:nvSpPr>
+          <p:cNvPr id="32" name="Rounded Rectangle 31"/>
+          <p:cNvSpPr/>
+          <p:nvPr/>
+        </p:nvSpPr>
+        <p:spPr>
+          <a:xfrm>
+            <a:off x="566928" y="4469892"/>
+            <a:ext cx="5464911" cy="648716"/>
+          </a:xfrm>
+          <a:prstGeom prst="roundRect">
+            <a:avLst>
+              <a:gd name="adj" fmla="val 22552"/>
+            </a:avLst>
+          </a:prstGeom>
+          <a:solidFill>
+            <a:srgbClr val="FFFFFF"/>
+          </a:solidFill>
+          <a:ln w="12700">
+            <a:solidFill>
+              <a:srgbClr val="EAEAE8"/>
+            </a:solidFill>
+          </a:ln>
+          <a:effectLst/>
+        </p:spPr>
+        <p:style>
+          <a:lnRef idx="1">
+            <a:schemeClr val="accent1"/>
+          </a:lnRef>
+          <a:fillRef idx="3">
+            <a:schemeClr val="accent1"/>
+          </a:fillRef>
+          <a:effectRef idx="2">
+            <a:schemeClr val="accent1"/>
+          </a:effectRef>
+          <a:fontRef idx="minor">
+            <a:schemeClr val="lt1"/>
+          </a:fontRef>
+        </p:style>
+        <p:txBody>
+          <a:bodyPr rtlCol="0" anchor="ctr"/>
+          <a:lstStyle/>
+          <a:p/>
+        </p:txBody>
+      </p:sp>
+      <p:sp>
+        <p:nvSpPr>
+          <p:cNvPr id="33" name="Rounded Rectangle 32"/>
+          <p:cNvSpPr/>
+          <p:nvPr/>
+        </p:nvSpPr>
+        <p:spPr>
+          <a:xfrm>
+            <a:off x="841247" y="4611370"/>
+            <a:ext cx="365760" cy="365760"/>
+          </a:xfrm>
+          <a:prstGeom prst="roundRect">
+            <a:avLst>
+              <a:gd name="adj" fmla="val 32500"/>
+            </a:avLst>
+          </a:prstGeom>
+          <a:solidFill>
+            <a:srgbClr val="E3F1E7"/>
+          </a:solidFill>
+          <a:ln>
+            <a:noFill/>
+          </a:ln>
+          <a:effectLst/>
+        </p:spPr>
+        <p:style>
+          <a:lnRef idx="1">
+            <a:schemeClr val="accent1"/>
+          </a:lnRef>
+          <a:fillRef idx="3">
+            <a:schemeClr val="accent1"/>
+          </a:fillRef>
+          <a:effectRef idx="2">
+            <a:schemeClr val="accent1"/>
+          </a:effectRef>
+          <a:fontRef idx="minor">
+            <a:schemeClr val="lt1"/>
+          </a:fontRef>
+        </p:style>
+        <p:txBody>
+          <a:bodyPr rtlCol="0" anchor="ctr"/>
+          <a:lstStyle/>
+          <a:p/>
+        </p:txBody>
+      </p:sp>
+      <p:sp>
+        <p:nvSpPr>
+          <p:cNvPr id="34" name="TextBox 33"/>
+          <p:cNvSpPr txBox="1"/>
+          <p:nvPr/>
+        </p:nvSpPr>
+        <p:spPr>
+          <a:xfrm>
+            <a:off x="841247" y="4675378"/>
+            <a:ext cx="365760" cy="256032"/>
+          </a:xfrm>
+          <a:prstGeom prst="rect">
+            <a:avLst/>
+          </a:prstGeom>
+          <a:noFill/>
+        </p:spPr>
+        <p:txBody>
+          <a:bodyPr wrap="square" lIns="0" rIns="0" tIns="0" bIns="0" anchor="t">
+            <a:spAutoFit/>
+          </a:bodyPr>
+          <a:lstStyle/>
+          <a:p>
+            <a:pPr algn="ctr">
+              <a:lnSpc>
+                <a:spcPct val="135000"/>
+              </a:lnSpc>
+            </a:pPr>
+            <a:r>
+              <a:rPr sz="1500" b="1" i="0">
+                <a:solidFill>
+                  <a:srgbClr val="166534"/>
+                </a:solidFill>
+                <a:latin typeface="Verdana"/>
+              </a:rPr>
+              <a:t>7</a:t>
+            </a:r>
+          </a:p>
+        </p:txBody>
+      </p:sp>
+      <p:sp>
+        <p:nvSpPr>
+          <p:cNvPr id="35" name="TextBox 34"/>
+          <p:cNvSpPr txBox="1"/>
+          <p:nvPr/>
+        </p:nvSpPr>
+        <p:spPr>
+          <a:xfrm>
+            <a:off x="1344168" y="4625340"/>
+            <a:ext cx="4504791" cy="374396"/>
+          </a:xfrm>
+          <a:prstGeom prst="rect">
+            <a:avLst/>
+          </a:prstGeom>
+          <a:noFill/>
+        </p:spPr>
+        <p:txBody>
+          <a:bodyPr wrap="square" lIns="0" rIns="0" tIns="0" bIns="0" anchor="t">
+            <a:spAutoFit/>
+          </a:bodyPr>
+          <a:lstStyle/>
+          <a:p>
+            <a:pPr algn="l">
+              <a:lnSpc>
+                <a:spcPct val="140000"/>
+              </a:lnSpc>
+            </a:pPr>
+            <a:r>
+              <a:rPr sz="1900" b="0" i="0">
+                <a:solidFill>
+                  <a:srgbClr val="3A3D40"/>
+                </a:solidFill>
+                <a:latin typeface="Verdana"/>
+              </a:rPr>
+              <a:t>septembre</a:t>
+            </a:r>
+          </a:p>
+        </p:txBody>
+      </p:sp>
+      <p:sp>
+        <p:nvSpPr>
+          <p:cNvPr id="36" name="Rounded Rectangle 35"/>
+          <p:cNvSpPr/>
+          <p:nvPr/>
+        </p:nvSpPr>
+        <p:spPr>
+          <a:xfrm>
+            <a:off x="6159855" y="4469892"/>
+            <a:ext cx="5464911" cy="648716"/>
+          </a:xfrm>
+          <a:prstGeom prst="roundRect">
+            <a:avLst>
+              <a:gd name="adj" fmla="val 22552"/>
+            </a:avLst>
+          </a:prstGeom>
+          <a:solidFill>
+            <a:srgbClr val="FFFFFF"/>
+          </a:solidFill>
+          <a:ln w="12700">
+            <a:solidFill>
+              <a:srgbClr val="EAEAE8"/>
+            </a:solidFill>
+          </a:ln>
+          <a:effectLst/>
+        </p:spPr>
+        <p:style>
+          <a:lnRef idx="1">
+            <a:schemeClr val="accent1"/>
+          </a:lnRef>
+          <a:fillRef idx="3">
+            <a:schemeClr val="accent1"/>
+          </a:fillRef>
+          <a:effectRef idx="2">
+            <a:schemeClr val="accent1"/>
+          </a:effectRef>
+          <a:fontRef idx="minor">
+            <a:schemeClr val="lt1"/>
+          </a:fontRef>
+        </p:style>
+        <p:txBody>
+          <a:bodyPr rtlCol="0" anchor="ctr"/>
+          <a:lstStyle/>
+          <a:p/>
+        </p:txBody>
+      </p:sp>
+      <p:sp>
+        <p:nvSpPr>
+          <p:cNvPr id="37" name="Rounded Rectangle 36"/>
+          <p:cNvSpPr/>
+          <p:nvPr/>
+        </p:nvSpPr>
+        <p:spPr>
+          <a:xfrm>
+            <a:off x="6434175" y="4611370"/>
+            <a:ext cx="365760" cy="365760"/>
+          </a:xfrm>
+          <a:prstGeom prst="roundRect">
+            <a:avLst>
+              <a:gd name="adj" fmla="val 32500"/>
+            </a:avLst>
+          </a:prstGeom>
+          <a:solidFill>
+            <a:srgbClr val="E3F1E7"/>
+          </a:solidFill>
+          <a:ln>
+            <a:noFill/>
+          </a:ln>
+          <a:effectLst/>
+        </p:spPr>
+        <p:style>
+          <a:lnRef idx="1">
+            <a:schemeClr val="accent1"/>
+          </a:lnRef>
+          <a:fillRef idx="3">
+            <a:schemeClr val="accent1"/>
+          </a:fillRef>
+          <a:effectRef idx="2">
+            <a:schemeClr val="accent1"/>
+          </a:effectRef>
+          <a:fontRef idx="minor">
+            <a:schemeClr val="lt1"/>
+          </a:fontRef>
+        </p:style>
+        <p:txBody>
+          <a:bodyPr rtlCol="0" anchor="ctr"/>
+          <a:lstStyle/>
+          <a:p/>
+        </p:txBody>
+      </p:sp>
+      <p:sp>
+        <p:nvSpPr>
+          <p:cNvPr id="38" name="TextBox 37"/>
+          <p:cNvSpPr txBox="1"/>
+          <p:nvPr/>
+        </p:nvSpPr>
+        <p:spPr>
+          <a:xfrm>
+            <a:off x="6434175" y="4675378"/>
+            <a:ext cx="365760" cy="256032"/>
+          </a:xfrm>
+          <a:prstGeom prst="rect">
+            <a:avLst/>
+          </a:prstGeom>
+          <a:noFill/>
+        </p:spPr>
+        <p:txBody>
+          <a:bodyPr wrap="square" lIns="0" rIns="0" tIns="0" bIns="0" anchor="t">
+            <a:spAutoFit/>
+          </a:bodyPr>
+          <a:lstStyle/>
+          <a:p>
+            <a:pPr algn="ctr">
+              <a:lnSpc>
+                <a:spcPct val="135000"/>
+              </a:lnSpc>
+            </a:pPr>
+            <a:r>
+              <a:rPr sz="1500" b="1" i="0">
+                <a:solidFill>
+                  <a:srgbClr val="166534"/>
+                </a:solidFill>
+                <a:latin typeface="Verdana"/>
+              </a:rPr>
+              <a:t>8</a:t>
+            </a:r>
+          </a:p>
+        </p:txBody>
+      </p:sp>
+      <p:sp>
+        <p:nvSpPr>
+          <p:cNvPr id="39" name="TextBox 38"/>
+          <p:cNvSpPr txBox="1"/>
+          <p:nvPr/>
+        </p:nvSpPr>
+        <p:spPr>
+          <a:xfrm>
+            <a:off x="6937095" y="4625340"/>
+            <a:ext cx="4504791" cy="374396"/>
+          </a:xfrm>
+          <a:prstGeom prst="rect">
+            <a:avLst/>
+          </a:prstGeom>
+          <a:noFill/>
+        </p:spPr>
+        <p:txBody>
+          <a:bodyPr wrap="square" lIns="0" rIns="0" tIns="0" bIns="0" anchor="t">
+            <a:spAutoFit/>
+          </a:bodyPr>
+          <a:lstStyle/>
+          <a:p>
+            <a:pPr algn="l">
+              <a:lnSpc>
+                <a:spcPct val="140000"/>
+              </a:lnSpc>
+            </a:pPr>
+            <a:r>
+              <a:rPr sz="1900" b="0" i="0">
+                <a:solidFill>
+                  <a:srgbClr val="3A3D40"/>
+                </a:solidFill>
+                <a:latin typeface="Verdana"/>
+              </a:rPr>
+              <a:t>répondu</a:t>
+            </a:r>
+          </a:p>
+        </p:txBody>
+      </p:sp>
+    </p:spTree>
+  </p:cSld>
+  <p:clrMapOvr>
+    <a:masterClrMapping/>
+  </p:clrMapOvr>
+</p:sld>
+</file>
+
+<file path=ppt/slides/slide22.xml><?xml version="1.0" encoding="utf-8"?>
+<p:sld xmlns:a="http://schemas.openxmlformats.org/drawingml/2006/main" xmlns:p="http://schemas.openxmlformats.org/presentationml/2006/main" xmlns:r="http://schemas.openxmlformats.org/officeDocument/2006/relationships">
+  <p:cSld>
+    <p:spTree>
+      <p:nvGrpSpPr>
+        <p:cNvPr id="1" name=""/>
+        <p:cNvGrpSpPr/>
+        <p:nvPr/>
+      </p:nvGrpSpPr>
+      <p:grpSpPr/>
+      <p:sp>
+        <p:nvSpPr>
+          <p:cNvPr id="2" name="Rectangle 1"/>
+          <p:cNvSpPr/>
+          <p:nvPr/>
+        </p:nvSpPr>
+        <p:spPr>
+          <a:xfrm>
+            <a:off x="0" y="0"/>
+            <a:ext cx="12191695" cy="6858000"/>
+          </a:xfrm>
+          <a:prstGeom prst="rect">
+            <a:avLst/>
+          </a:prstGeom>
+          <a:solidFill>
+            <a:srgbClr val="F7F7F5"/>
+          </a:solidFill>
+          <a:ln>
+            <a:noFill/>
+          </a:ln>
+          <a:effectLst/>
+        </p:spPr>
+        <p:style>
+          <a:lnRef idx="1">
+            <a:schemeClr val="accent1"/>
+          </a:lnRef>
+          <a:fillRef idx="3">
+            <a:schemeClr val="accent1"/>
+          </a:fillRef>
+          <a:effectRef idx="2">
+            <a:schemeClr val="accent1"/>
+          </a:effectRef>
+          <a:fontRef idx="minor">
+            <a:schemeClr val="lt1"/>
+          </a:fontRef>
+        </p:style>
+        <p:txBody>
+          <a:bodyPr rtlCol="0" anchor="ctr"/>
+          <a:lstStyle/>
+          <a:p/>
+        </p:txBody>
+      </p:sp>
+      <p:sp>
+        <p:nvSpPr>
+          <p:cNvPr id="3" name="TextBox 2"/>
+          <p:cNvSpPr txBox="1"/>
+          <p:nvPr/>
+        </p:nvSpPr>
+        <p:spPr>
+          <a:xfrm>
+            <a:off x="566928" y="6355080"/>
+            <a:ext cx="6400800" cy="219456"/>
+          </a:xfrm>
+          <a:prstGeom prst="rect">
+            <a:avLst/>
+          </a:prstGeom>
+          <a:noFill/>
+        </p:spPr>
+        <p:txBody>
+          <a:bodyPr wrap="square" lIns="0" rIns="0" tIns="0" bIns="0" anchor="t">
+            <a:spAutoFit/>
+          </a:bodyPr>
+          <a:lstStyle/>
+          <a:p>
+            <a:pPr algn="l">
+              <a:lnSpc>
+                <a:spcPct val="135000"/>
+              </a:lnSpc>
+            </a:pPr>
+            <a:r>
+              <a:rPr sz="1200" b="0" i="0">
+                <a:solidFill>
+                  <a:srgbClr val="6E7175"/>
+                </a:solidFill>
+                <a:latin typeface="Verdana"/>
+              </a:rPr>
+              <a:t>A2 · Comment est le logement ?</a:t>
+            </a:r>
+          </a:p>
+        </p:txBody>
+      </p:sp>
+      <p:sp>
+        <p:nvSpPr>
+          <p:cNvPr id="4" name="TextBox 3"/>
+          <p:cNvSpPr txBox="1"/>
+          <p:nvPr/>
+        </p:nvSpPr>
+        <p:spPr>
+          <a:xfrm>
+            <a:off x="10710367" y="6355080"/>
+            <a:ext cx="914400" cy="219456"/>
+          </a:xfrm>
+          <a:prstGeom prst="rect">
+            <a:avLst/>
+          </a:prstGeom>
+          <a:noFill/>
+        </p:spPr>
+        <p:txBody>
+          <a:bodyPr wrap="square" lIns="0" rIns="0" tIns="0" bIns="0" anchor="t">
+            <a:spAutoFit/>
+          </a:bodyPr>
+          <a:lstStyle/>
+          <a:p>
+            <a:pPr algn="r">
+              <a:lnSpc>
+                <a:spcPct val="135000"/>
+              </a:lnSpc>
+            </a:pPr>
+            <a:r>
+              <a:rPr sz="1200" b="0" i="0">
+                <a:solidFill>
+                  <a:srgbClr val="6E7175"/>
+                </a:solidFill>
+                <a:latin typeface="Verdana"/>
+              </a:rPr>
+              <a:t>22</a:t>
+            </a:r>
+          </a:p>
+        </p:txBody>
+      </p:sp>
+      <p:sp>
+        <p:nvSpPr>
+          <p:cNvPr id="5" name="TextBox 4"/>
+          <p:cNvSpPr txBox="1"/>
+          <p:nvPr/>
+        </p:nvSpPr>
+        <p:spPr>
+          <a:xfrm>
+            <a:off x="566928" y="420624"/>
+            <a:ext cx="11057839" cy="237744"/>
+          </a:xfrm>
+          <a:prstGeom prst="rect">
+            <a:avLst/>
+          </a:prstGeom>
+          <a:noFill/>
+        </p:spPr>
+        <p:txBody>
+          <a:bodyPr wrap="square" lIns="0" rIns="0" tIns="0" bIns="0" anchor="t">
+            <a:spAutoFit/>
+          </a:bodyPr>
+          <a:lstStyle/>
+          <a:p>
+            <a:pPr algn="l">
+              <a:lnSpc>
+                <a:spcPct val="135000"/>
+              </a:lnSpc>
+            </a:pPr>
+            <a:r>
+              <a:rPr sz="1300" b="1" i="0" spc="156">
+                <a:solidFill>
+                  <a:srgbClr val="166534"/>
+                </a:solidFill>
+                <a:latin typeface="Verdana"/>
+              </a:rPr>
+              <a:t>CORRECTION</a:t>
+            </a:r>
+          </a:p>
+        </p:txBody>
+      </p:sp>
+      <p:sp>
+        <p:nvSpPr>
+          <p:cNvPr id="6" name="TextBox 5"/>
+          <p:cNvSpPr txBox="1"/>
+          <p:nvPr/>
+        </p:nvSpPr>
+        <p:spPr>
+          <a:xfrm>
+            <a:off x="566928" y="749808"/>
+            <a:ext cx="11057839" cy="877824"/>
+          </a:xfrm>
+          <a:prstGeom prst="rect">
+            <a:avLst/>
+          </a:prstGeom>
+          <a:noFill/>
+        </p:spPr>
+        <p:txBody>
+          <a:bodyPr wrap="square" lIns="0" rIns="0" tIns="0" bIns="0" anchor="t">
+            <a:spAutoFit/>
+          </a:bodyPr>
+          <a:lstStyle/>
+          <a:p>
+            <a:pPr algn="l">
+              <a:lnSpc>
+                <a:spcPct val="115000"/>
+              </a:lnSpc>
+            </a:pPr>
+            <a:r>
+              <a:rPr sz="3400" b="1" i="0">
+                <a:solidFill>
+                  <a:srgbClr val="17181A"/>
+                </a:solidFill>
+                <a:latin typeface="Verdana"/>
+              </a:rPr>
+              <a:t>Quel son entendez-vous ?</a:t>
+            </a:r>
+          </a:p>
+        </p:txBody>
+      </p:sp>
+      <p:sp>
+        <p:nvSpPr>
+          <p:cNvPr id="7" name="TextBox 6"/>
+          <p:cNvSpPr txBox="1"/>
+          <p:nvPr/>
+        </p:nvSpPr>
+        <p:spPr>
+          <a:xfrm>
+            <a:off x="566928" y="1645920"/>
+            <a:ext cx="11057839" cy="329184"/>
+          </a:xfrm>
+          <a:prstGeom prst="rect">
+            <a:avLst/>
+          </a:prstGeom>
+          <a:noFill/>
+        </p:spPr>
+        <p:txBody>
+          <a:bodyPr wrap="square" lIns="0" rIns="0" tIns="0" bIns="0" anchor="t">
+            <a:spAutoFit/>
+          </a:bodyPr>
+          <a:lstStyle/>
+          <a:p>
+            <a:pPr algn="l">
+              <a:lnSpc>
+                <a:spcPct val="135000"/>
+              </a:lnSpc>
+            </a:pPr>
+            <a:r>
+              <a:rPr sz="1800" b="0" i="0">
+                <a:solidFill>
+                  <a:srgbClr val="6E7175"/>
+                </a:solidFill>
+                <a:latin typeface="Verdana"/>
+              </a:rPr>
+              <a:t>Correction — on lit la réponse, on ne commente pas l'erreur.</a:t>
+            </a:r>
+          </a:p>
+        </p:txBody>
+      </p:sp>
+      <p:sp>
+        <p:nvSpPr>
+          <p:cNvPr id="8" name="Rounded Rectangle 7"/>
+          <p:cNvSpPr/>
+          <p:nvPr/>
+        </p:nvSpPr>
+        <p:spPr>
+          <a:xfrm>
+            <a:off x="566928" y="2139696"/>
+            <a:ext cx="5464911" cy="648716"/>
+          </a:xfrm>
+          <a:prstGeom prst="roundRect">
+            <a:avLst>
+              <a:gd name="adj" fmla="val 22552"/>
+            </a:avLst>
+          </a:prstGeom>
+          <a:solidFill>
+            <a:srgbClr val="E6F5EE"/>
+          </a:solidFill>
+          <a:ln w="12700">
+            <a:solidFill>
+              <a:srgbClr val="EAEAE8"/>
+            </a:solidFill>
+          </a:ln>
+          <a:effectLst/>
+        </p:spPr>
+        <p:style>
+          <a:lnRef idx="1">
+            <a:schemeClr val="accent1"/>
+          </a:lnRef>
+          <a:fillRef idx="3">
+            <a:schemeClr val="accent1"/>
+          </a:fillRef>
+          <a:effectRef idx="2">
+            <a:schemeClr val="accent1"/>
+          </a:effectRef>
+          <a:fontRef idx="minor">
+            <a:schemeClr val="lt1"/>
+          </a:fontRef>
+        </p:style>
+        <p:txBody>
+          <a:bodyPr rtlCol="0" anchor="ctr"/>
+          <a:lstStyle/>
+          <a:p/>
+        </p:txBody>
+      </p:sp>
+      <p:sp>
+        <p:nvSpPr>
+          <p:cNvPr id="9" name="Rounded Rectangle 8"/>
+          <p:cNvSpPr/>
+          <p:nvPr/>
+        </p:nvSpPr>
+        <p:spPr>
+          <a:xfrm>
+            <a:off x="841247" y="2281174"/>
+            <a:ext cx="365760" cy="365760"/>
+          </a:xfrm>
+          <a:prstGeom prst="roundRect">
+            <a:avLst>
+              <a:gd name="adj" fmla="val 32500"/>
+            </a:avLst>
+          </a:prstGeom>
+          <a:solidFill>
+            <a:srgbClr val="E3F1E7"/>
+          </a:solidFill>
+          <a:ln>
+            <a:noFill/>
+          </a:ln>
+          <a:effectLst/>
+        </p:spPr>
+        <p:style>
+          <a:lnRef idx="1">
+            <a:schemeClr val="accent1"/>
+          </a:lnRef>
+          <a:fillRef idx="3">
+            <a:schemeClr val="accent1"/>
+          </a:fillRef>
+          <a:effectRef idx="2">
+            <a:schemeClr val="accent1"/>
+          </a:effectRef>
+          <a:fontRef idx="minor">
+            <a:schemeClr val="lt1"/>
+          </a:fontRef>
+        </p:style>
+        <p:txBody>
+          <a:bodyPr rtlCol="0" anchor="ctr"/>
+          <a:lstStyle/>
+          <a:p/>
+        </p:txBody>
+      </p:sp>
+      <p:sp>
+        <p:nvSpPr>
+          <p:cNvPr id="10" name="TextBox 9"/>
+          <p:cNvSpPr txBox="1"/>
+          <p:nvPr/>
+        </p:nvSpPr>
+        <p:spPr>
+          <a:xfrm>
+            <a:off x="841247" y="2345182"/>
+            <a:ext cx="365760" cy="256032"/>
+          </a:xfrm>
+          <a:prstGeom prst="rect">
+            <a:avLst/>
+          </a:prstGeom>
+          <a:noFill/>
+        </p:spPr>
+        <p:txBody>
+          <a:bodyPr wrap="square" lIns="0" rIns="0" tIns="0" bIns="0" anchor="t">
+            <a:spAutoFit/>
+          </a:bodyPr>
+          <a:lstStyle/>
+          <a:p>
+            <a:pPr algn="ctr">
+              <a:lnSpc>
+                <a:spcPct val="135000"/>
+              </a:lnSpc>
+            </a:pPr>
+            <a:r>
+              <a:rPr sz="1500" b="1" i="0">
+                <a:solidFill>
+                  <a:srgbClr val="166534"/>
+                </a:solidFill>
+                <a:latin typeface="Verdana"/>
+              </a:rPr>
+              <a:t>1</a:t>
+            </a:r>
+          </a:p>
+        </p:txBody>
+      </p:sp>
+      <p:sp>
+        <p:nvSpPr>
+          <p:cNvPr id="11" name="TextBox 10"/>
+          <p:cNvSpPr txBox="1"/>
+          <p:nvPr/>
+        </p:nvSpPr>
+        <p:spPr>
+          <a:xfrm>
+            <a:off x="1344168" y="2295144"/>
+            <a:ext cx="4504791" cy="374396"/>
+          </a:xfrm>
+          <a:prstGeom prst="rect">
+            <a:avLst/>
+          </a:prstGeom>
+          <a:noFill/>
+        </p:spPr>
+        <p:txBody>
+          <a:bodyPr wrap="square" lIns="0" rIns="0" tIns="0" bIns="0" anchor="t">
+            <a:spAutoFit/>
+          </a:bodyPr>
+          <a:lstStyle/>
+          <a:p>
+            <a:pPr algn="l">
+              <a:lnSpc>
+                <a:spcPct val="140000"/>
+              </a:lnSpc>
+            </a:pPr>
+            <a:r>
+              <a:rPr sz="1900" b="0" i="0">
+                <a:solidFill>
+                  <a:srgbClr val="3A3D40"/>
+                </a:solidFill>
+                <a:latin typeface="Verdana"/>
+              </a:rPr>
+              <a:t>logement   </a:t>
+            </a:r>
+            <a:r>
+              <a:rPr sz="1900" b="1" i="0">
+                <a:solidFill>
+                  <a:srgbClr val="07734A"/>
+                </a:solidFill>
+                <a:latin typeface="Verdana"/>
+              </a:rPr>
+              <a:t>» le son « an »</a:t>
+            </a:r>
+          </a:p>
+        </p:txBody>
+      </p:sp>
+      <p:sp>
+        <p:nvSpPr>
+          <p:cNvPr id="12" name="Rounded Rectangle 11"/>
+          <p:cNvSpPr/>
+          <p:nvPr/>
+        </p:nvSpPr>
+        <p:spPr>
+          <a:xfrm>
+            <a:off x="6159855" y="2139696"/>
+            <a:ext cx="5464911" cy="648716"/>
+          </a:xfrm>
+          <a:prstGeom prst="roundRect">
+            <a:avLst>
+              <a:gd name="adj" fmla="val 22552"/>
+            </a:avLst>
+          </a:prstGeom>
+          <a:solidFill>
+            <a:srgbClr val="E6F5EE"/>
+          </a:solidFill>
+          <a:ln w="12700">
+            <a:solidFill>
+              <a:srgbClr val="EAEAE8"/>
+            </a:solidFill>
+          </a:ln>
+          <a:effectLst/>
+        </p:spPr>
+        <p:style>
+          <a:lnRef idx="1">
+            <a:schemeClr val="accent1"/>
+          </a:lnRef>
+          <a:fillRef idx="3">
+            <a:schemeClr val="accent1"/>
+          </a:fillRef>
+          <a:effectRef idx="2">
+            <a:schemeClr val="accent1"/>
+          </a:effectRef>
+          <a:fontRef idx="minor">
+            <a:schemeClr val="lt1"/>
+          </a:fontRef>
+        </p:style>
+        <p:txBody>
+          <a:bodyPr rtlCol="0" anchor="ctr"/>
+          <a:lstStyle/>
+          <a:p/>
+        </p:txBody>
+      </p:sp>
+      <p:sp>
+        <p:nvSpPr>
+          <p:cNvPr id="13" name="Rounded Rectangle 12"/>
+          <p:cNvSpPr/>
+          <p:nvPr/>
+        </p:nvSpPr>
+        <p:spPr>
+          <a:xfrm>
+            <a:off x="6434175" y="2281174"/>
+            <a:ext cx="365760" cy="365760"/>
+          </a:xfrm>
+          <a:prstGeom prst="roundRect">
+            <a:avLst>
+              <a:gd name="adj" fmla="val 32500"/>
+            </a:avLst>
+          </a:prstGeom>
+          <a:solidFill>
+            <a:srgbClr val="E3F1E7"/>
+          </a:solidFill>
+          <a:ln>
+            <a:noFill/>
+          </a:ln>
+          <a:effectLst/>
+        </p:spPr>
+        <p:style>
+          <a:lnRef idx="1">
+            <a:schemeClr val="accent1"/>
+          </a:lnRef>
+          <a:fillRef idx="3">
+            <a:schemeClr val="accent1"/>
+          </a:fillRef>
+          <a:effectRef idx="2">
+            <a:schemeClr val="accent1"/>
+          </a:effectRef>
+          <a:fontRef idx="minor">
+            <a:schemeClr val="lt1"/>
+          </a:fontRef>
+        </p:style>
+        <p:txBody>
+          <a:bodyPr rtlCol="0" anchor="ctr"/>
+          <a:lstStyle/>
+          <a:p/>
+        </p:txBody>
+      </p:sp>
+      <p:sp>
+        <p:nvSpPr>
+          <p:cNvPr id="14" name="TextBox 13"/>
+          <p:cNvSpPr txBox="1"/>
+          <p:nvPr/>
+        </p:nvSpPr>
+        <p:spPr>
+          <a:xfrm>
+            <a:off x="6434175" y="2345182"/>
+            <a:ext cx="365760" cy="256032"/>
+          </a:xfrm>
+          <a:prstGeom prst="rect">
+            <a:avLst/>
+          </a:prstGeom>
+          <a:noFill/>
+        </p:spPr>
+        <p:txBody>
+          <a:bodyPr wrap="square" lIns="0" rIns="0" tIns="0" bIns="0" anchor="t">
+            <a:spAutoFit/>
+          </a:bodyPr>
+          <a:lstStyle/>
+          <a:p>
+            <a:pPr algn="ctr">
+              <a:lnSpc>
+                <a:spcPct val="135000"/>
+              </a:lnSpc>
+            </a:pPr>
+            <a:r>
+              <a:rPr sz="1500" b="1" i="0">
+                <a:solidFill>
+                  <a:srgbClr val="166534"/>
+                </a:solidFill>
+                <a:latin typeface="Verdana"/>
+              </a:rPr>
+              <a:t>2</a:t>
+            </a:r>
+          </a:p>
+        </p:txBody>
+      </p:sp>
+      <p:sp>
+        <p:nvSpPr>
+          <p:cNvPr id="15" name="TextBox 14"/>
+          <p:cNvSpPr txBox="1"/>
+          <p:nvPr/>
+        </p:nvSpPr>
+        <p:spPr>
+          <a:xfrm>
+            <a:off x="6937095" y="2295144"/>
+            <a:ext cx="4504791" cy="374396"/>
+          </a:xfrm>
+          <a:prstGeom prst="rect">
+            <a:avLst/>
+          </a:prstGeom>
+          <a:noFill/>
+        </p:spPr>
+        <p:txBody>
+          <a:bodyPr wrap="square" lIns="0" rIns="0" tIns="0" bIns="0" anchor="t">
+            <a:spAutoFit/>
+          </a:bodyPr>
+          <a:lstStyle/>
+          <a:p>
+            <a:pPr algn="l">
+              <a:lnSpc>
+                <a:spcPct val="140000"/>
+              </a:lnSpc>
+            </a:pPr>
+            <a:r>
+              <a:rPr sz="1900" b="0" i="0">
+                <a:solidFill>
+                  <a:srgbClr val="3A3D40"/>
+                </a:solidFill>
+                <a:latin typeface="Verdana"/>
+              </a:rPr>
+              <a:t>salon   </a:t>
+            </a:r>
+            <a:r>
+              <a:rPr sz="1900" b="1" i="0">
+                <a:solidFill>
+                  <a:srgbClr val="07734A"/>
+                </a:solidFill>
+                <a:latin typeface="Verdana"/>
+              </a:rPr>
+              <a:t>» le son « on »</a:t>
+            </a:r>
+          </a:p>
+        </p:txBody>
+      </p:sp>
+      <p:sp>
+        <p:nvSpPr>
+          <p:cNvPr id="16" name="Rounded Rectangle 15"/>
+          <p:cNvSpPr/>
+          <p:nvPr/>
+        </p:nvSpPr>
+        <p:spPr>
+          <a:xfrm>
+            <a:off x="566928" y="2916428"/>
+            <a:ext cx="5464911" cy="648716"/>
+          </a:xfrm>
+          <a:prstGeom prst="roundRect">
+            <a:avLst>
+              <a:gd name="adj" fmla="val 22552"/>
+            </a:avLst>
+          </a:prstGeom>
+          <a:solidFill>
+            <a:srgbClr val="E6F5EE"/>
+          </a:solidFill>
+          <a:ln w="12700">
+            <a:solidFill>
+              <a:srgbClr val="EAEAE8"/>
+            </a:solidFill>
+          </a:ln>
+          <a:effectLst/>
+        </p:spPr>
+        <p:style>
+          <a:lnRef idx="1">
+            <a:schemeClr val="accent1"/>
+          </a:lnRef>
+          <a:fillRef idx="3">
+            <a:schemeClr val="accent1"/>
+          </a:fillRef>
+          <a:effectRef idx="2">
+            <a:schemeClr val="accent1"/>
+          </a:effectRef>
+          <a:fontRef idx="minor">
+            <a:schemeClr val="lt1"/>
+          </a:fontRef>
+        </p:style>
+        <p:txBody>
+          <a:bodyPr rtlCol="0" anchor="ctr"/>
+          <a:lstStyle/>
+          <a:p/>
+        </p:txBody>
+      </p:sp>
+      <p:sp>
+        <p:nvSpPr>
+          <p:cNvPr id="17" name="Rounded Rectangle 16"/>
+          <p:cNvSpPr/>
+          <p:nvPr/>
+        </p:nvSpPr>
+        <p:spPr>
+          <a:xfrm>
+            <a:off x="841247" y="3057905"/>
+            <a:ext cx="365760" cy="365760"/>
+          </a:xfrm>
+          <a:prstGeom prst="roundRect">
+            <a:avLst>
+              <a:gd name="adj" fmla="val 32500"/>
+            </a:avLst>
+          </a:prstGeom>
+          <a:solidFill>
+            <a:srgbClr val="E3F1E7"/>
+          </a:solidFill>
+          <a:ln>
+            <a:noFill/>
+          </a:ln>
+          <a:effectLst/>
+        </p:spPr>
+        <p:style>
+          <a:lnRef idx="1">
+            <a:schemeClr val="accent1"/>
+          </a:lnRef>
+          <a:fillRef idx="3">
+            <a:schemeClr val="accent1"/>
+          </a:fillRef>
+          <a:effectRef idx="2">
+            <a:schemeClr val="accent1"/>
+          </a:effectRef>
+          <a:fontRef idx="minor">
+            <a:schemeClr val="lt1"/>
+          </a:fontRef>
+        </p:style>
+        <p:txBody>
+          <a:bodyPr rtlCol="0" anchor="ctr"/>
+          <a:lstStyle/>
+          <a:p/>
+        </p:txBody>
+      </p:sp>
+      <p:sp>
+        <p:nvSpPr>
+          <p:cNvPr id="18" name="TextBox 17"/>
+          <p:cNvSpPr txBox="1"/>
+          <p:nvPr/>
+        </p:nvSpPr>
+        <p:spPr>
+          <a:xfrm>
+            <a:off x="841247" y="3121913"/>
+            <a:ext cx="365760" cy="256032"/>
+          </a:xfrm>
+          <a:prstGeom prst="rect">
+            <a:avLst/>
+          </a:prstGeom>
+          <a:noFill/>
+        </p:spPr>
+        <p:txBody>
+          <a:bodyPr wrap="square" lIns="0" rIns="0" tIns="0" bIns="0" anchor="t">
+            <a:spAutoFit/>
+          </a:bodyPr>
+          <a:lstStyle/>
+          <a:p>
+            <a:pPr algn="ctr">
+              <a:lnSpc>
+                <a:spcPct val="135000"/>
+              </a:lnSpc>
+            </a:pPr>
+            <a:r>
+              <a:rPr sz="1500" b="1" i="0">
+                <a:solidFill>
+                  <a:srgbClr val="166534"/>
+                </a:solidFill>
+                <a:latin typeface="Verdana"/>
+              </a:rPr>
+              <a:t>3</a:t>
+            </a:r>
+          </a:p>
+        </p:txBody>
+      </p:sp>
+      <p:sp>
+        <p:nvSpPr>
+          <p:cNvPr id="19" name="TextBox 18"/>
+          <p:cNvSpPr txBox="1"/>
+          <p:nvPr/>
+        </p:nvSpPr>
+        <p:spPr>
+          <a:xfrm>
+            <a:off x="1344168" y="3071876"/>
+            <a:ext cx="4504791" cy="374396"/>
+          </a:xfrm>
+          <a:prstGeom prst="rect">
+            <a:avLst/>
+          </a:prstGeom>
+          <a:noFill/>
+        </p:spPr>
+        <p:txBody>
+          <a:bodyPr wrap="square" lIns="0" rIns="0" tIns="0" bIns="0" anchor="t">
+            <a:spAutoFit/>
+          </a:bodyPr>
+          <a:lstStyle/>
+          <a:p>
+            <a:pPr algn="l">
+              <a:lnSpc>
+                <a:spcPct val="140000"/>
+              </a:lnSpc>
+            </a:pPr>
+            <a:r>
+              <a:rPr sz="1900" b="0" i="0">
+                <a:solidFill>
+                  <a:srgbClr val="3A3D40"/>
+                </a:solidFill>
+                <a:latin typeface="Verdana"/>
+              </a:rPr>
+              <a:t>chambre   </a:t>
+            </a:r>
+            <a:r>
+              <a:rPr sz="1900" b="1" i="0">
+                <a:solidFill>
+                  <a:srgbClr val="07734A"/>
+                </a:solidFill>
+                <a:latin typeface="Verdana"/>
+              </a:rPr>
+              <a:t>» le son « an »</a:t>
+            </a:r>
+          </a:p>
+        </p:txBody>
+      </p:sp>
+      <p:sp>
+        <p:nvSpPr>
+          <p:cNvPr id="20" name="Rounded Rectangle 19"/>
+          <p:cNvSpPr/>
+          <p:nvPr/>
+        </p:nvSpPr>
+        <p:spPr>
+          <a:xfrm>
+            <a:off x="6159855" y="2916428"/>
+            <a:ext cx="5464911" cy="648716"/>
+          </a:xfrm>
+          <a:prstGeom prst="roundRect">
+            <a:avLst>
+              <a:gd name="adj" fmla="val 22552"/>
+            </a:avLst>
+          </a:prstGeom>
+          <a:solidFill>
+            <a:srgbClr val="E6F5EE"/>
+          </a:solidFill>
+          <a:ln w="12700">
+            <a:solidFill>
+              <a:srgbClr val="EAEAE8"/>
+            </a:solidFill>
+          </a:ln>
+          <a:effectLst/>
+        </p:spPr>
+        <p:style>
+          <a:lnRef idx="1">
+            <a:schemeClr val="accent1"/>
+          </a:lnRef>
+          <a:fillRef idx="3">
+            <a:schemeClr val="accent1"/>
+          </a:fillRef>
+          <a:effectRef idx="2">
+            <a:schemeClr val="accent1"/>
+          </a:effectRef>
+          <a:fontRef idx="minor">
+            <a:schemeClr val="lt1"/>
+          </a:fontRef>
+        </p:style>
+        <p:txBody>
+          <a:bodyPr rtlCol="0" anchor="ctr"/>
+          <a:lstStyle/>
+          <a:p/>
+        </p:txBody>
+      </p:sp>
+      <p:sp>
+        <p:nvSpPr>
+          <p:cNvPr id="21" name="Rounded Rectangle 20"/>
+          <p:cNvSpPr/>
+          <p:nvPr/>
+        </p:nvSpPr>
+        <p:spPr>
+          <a:xfrm>
+            <a:off x="6434175" y="3057905"/>
+            <a:ext cx="365760" cy="365760"/>
+          </a:xfrm>
+          <a:prstGeom prst="roundRect">
+            <a:avLst>
+              <a:gd name="adj" fmla="val 32500"/>
+            </a:avLst>
+          </a:prstGeom>
+          <a:solidFill>
+            <a:srgbClr val="E3F1E7"/>
+          </a:solidFill>
+          <a:ln>
+            <a:noFill/>
+          </a:ln>
+          <a:effectLst/>
+        </p:spPr>
+        <p:style>
+          <a:lnRef idx="1">
+            <a:schemeClr val="accent1"/>
+          </a:lnRef>
+          <a:fillRef idx="3">
+            <a:schemeClr val="accent1"/>
+          </a:fillRef>
+          <a:effectRef idx="2">
+            <a:schemeClr val="accent1"/>
+          </a:effectRef>
+          <a:fontRef idx="minor">
+            <a:schemeClr val="lt1"/>
+          </a:fontRef>
+        </p:style>
+        <p:txBody>
+          <a:bodyPr rtlCol="0" anchor="ctr"/>
+          <a:lstStyle/>
+          <a:p/>
+        </p:txBody>
+      </p:sp>
+      <p:sp>
+        <p:nvSpPr>
+          <p:cNvPr id="22" name="TextBox 21"/>
+          <p:cNvSpPr txBox="1"/>
+          <p:nvPr/>
+        </p:nvSpPr>
+        <p:spPr>
+          <a:xfrm>
+            <a:off x="6434175" y="3121913"/>
+            <a:ext cx="365760" cy="256032"/>
+          </a:xfrm>
+          <a:prstGeom prst="rect">
+            <a:avLst/>
+          </a:prstGeom>
+          <a:noFill/>
+        </p:spPr>
+        <p:txBody>
+          <a:bodyPr wrap="square" lIns="0" rIns="0" tIns="0" bIns="0" anchor="t">
+            <a:spAutoFit/>
+          </a:bodyPr>
+          <a:lstStyle/>
+          <a:p>
+            <a:pPr algn="ctr">
+              <a:lnSpc>
+                <a:spcPct val="135000"/>
+              </a:lnSpc>
+            </a:pPr>
+            <a:r>
+              <a:rPr sz="1500" b="1" i="0">
+                <a:solidFill>
+                  <a:srgbClr val="166534"/>
+                </a:solidFill>
+                <a:latin typeface="Verdana"/>
+              </a:rPr>
+              <a:t>4</a:t>
+            </a:r>
+          </a:p>
+        </p:txBody>
+      </p:sp>
+      <p:sp>
+        <p:nvSpPr>
+          <p:cNvPr id="23" name="TextBox 22"/>
+          <p:cNvSpPr txBox="1"/>
+          <p:nvPr/>
+        </p:nvSpPr>
+        <p:spPr>
+          <a:xfrm>
+            <a:off x="6937095" y="3071876"/>
+            <a:ext cx="4504791" cy="374396"/>
+          </a:xfrm>
+          <a:prstGeom prst="rect">
+            <a:avLst/>
+          </a:prstGeom>
+          <a:noFill/>
+        </p:spPr>
+        <p:txBody>
+          <a:bodyPr wrap="square" lIns="0" rIns="0" tIns="0" bIns="0" anchor="t">
+            <a:spAutoFit/>
+          </a:bodyPr>
+          <a:lstStyle/>
+          <a:p>
+            <a:pPr algn="l">
+              <a:lnSpc>
+                <a:spcPct val="140000"/>
+              </a:lnSpc>
+            </a:pPr>
+            <a:r>
+              <a:rPr sz="1900" b="0" i="0">
+                <a:solidFill>
+                  <a:srgbClr val="3A3D40"/>
+                </a:solidFill>
+                <a:latin typeface="Verdana"/>
+              </a:rPr>
+              <a:t>camion   </a:t>
+            </a:r>
+            <a:r>
+              <a:rPr sz="1900" b="1" i="0">
+                <a:solidFill>
+                  <a:srgbClr val="07734A"/>
+                </a:solidFill>
+                <a:latin typeface="Verdana"/>
+              </a:rPr>
+              <a:t>» le son « on »</a:t>
+            </a:r>
+          </a:p>
+        </p:txBody>
+      </p:sp>
+      <p:sp>
+        <p:nvSpPr>
+          <p:cNvPr id="24" name="Rounded Rectangle 23"/>
+          <p:cNvSpPr/>
+          <p:nvPr/>
+        </p:nvSpPr>
+        <p:spPr>
+          <a:xfrm>
+            <a:off x="566928" y="3693160"/>
+            <a:ext cx="5464911" cy="648716"/>
+          </a:xfrm>
+          <a:prstGeom prst="roundRect">
+            <a:avLst>
+              <a:gd name="adj" fmla="val 22552"/>
+            </a:avLst>
+          </a:prstGeom>
+          <a:solidFill>
+            <a:srgbClr val="E6F5EE"/>
+          </a:solidFill>
+          <a:ln w="12700">
+            <a:solidFill>
+              <a:srgbClr val="EAEAE8"/>
+            </a:solidFill>
+          </a:ln>
+          <a:effectLst/>
+        </p:spPr>
+        <p:style>
+          <a:lnRef idx="1">
+            <a:schemeClr val="accent1"/>
+          </a:lnRef>
+          <a:fillRef idx="3">
+            <a:schemeClr val="accent1"/>
+          </a:fillRef>
+          <a:effectRef idx="2">
+            <a:schemeClr val="accent1"/>
+          </a:effectRef>
+          <a:fontRef idx="minor">
+            <a:schemeClr val="lt1"/>
+          </a:fontRef>
+        </p:style>
+        <p:txBody>
+          <a:bodyPr rtlCol="0" anchor="ctr"/>
+          <a:lstStyle/>
+          <a:p/>
+        </p:txBody>
+      </p:sp>
+      <p:sp>
+        <p:nvSpPr>
+          <p:cNvPr id="25" name="Rounded Rectangle 24"/>
+          <p:cNvSpPr/>
+          <p:nvPr/>
+        </p:nvSpPr>
+        <p:spPr>
+          <a:xfrm>
+            <a:off x="841247" y="3834638"/>
+            <a:ext cx="365760" cy="365760"/>
+          </a:xfrm>
+          <a:prstGeom prst="roundRect">
+            <a:avLst>
+              <a:gd name="adj" fmla="val 32500"/>
+            </a:avLst>
+          </a:prstGeom>
+          <a:solidFill>
+            <a:srgbClr val="E3F1E7"/>
+          </a:solidFill>
+          <a:ln>
+            <a:noFill/>
+          </a:ln>
+          <a:effectLst/>
+        </p:spPr>
+        <p:style>
+          <a:lnRef idx="1">
+            <a:schemeClr val="accent1"/>
+          </a:lnRef>
+          <a:fillRef idx="3">
+            <a:schemeClr val="accent1"/>
+          </a:fillRef>
+          <a:effectRef idx="2">
+            <a:schemeClr val="accent1"/>
+          </a:effectRef>
+          <a:fontRef idx="minor">
+            <a:schemeClr val="lt1"/>
+          </a:fontRef>
+        </p:style>
+        <p:txBody>
+          <a:bodyPr rtlCol="0" anchor="ctr"/>
+          <a:lstStyle/>
+          <a:p/>
+        </p:txBody>
+      </p:sp>
+      <p:sp>
+        <p:nvSpPr>
+          <p:cNvPr id="26" name="TextBox 25"/>
+          <p:cNvSpPr txBox="1"/>
+          <p:nvPr/>
+        </p:nvSpPr>
+        <p:spPr>
+          <a:xfrm>
+            <a:off x="841247" y="3898646"/>
+            <a:ext cx="365760" cy="256032"/>
+          </a:xfrm>
+          <a:prstGeom prst="rect">
+            <a:avLst/>
+          </a:prstGeom>
+          <a:noFill/>
+        </p:spPr>
+        <p:txBody>
+          <a:bodyPr wrap="square" lIns="0" rIns="0" tIns="0" bIns="0" anchor="t">
+            <a:spAutoFit/>
+          </a:bodyPr>
+          <a:lstStyle/>
+          <a:p>
+            <a:pPr algn="ctr">
+              <a:lnSpc>
+                <a:spcPct val="135000"/>
+              </a:lnSpc>
+            </a:pPr>
+            <a:r>
+              <a:rPr sz="1500" b="1" i="0">
+                <a:solidFill>
+                  <a:srgbClr val="166534"/>
+                </a:solidFill>
+                <a:latin typeface="Verdana"/>
+              </a:rPr>
+              <a:t>5</a:t>
+            </a:r>
+          </a:p>
+        </p:txBody>
+      </p:sp>
+      <p:sp>
+        <p:nvSpPr>
+          <p:cNvPr id="27" name="TextBox 26"/>
+          <p:cNvSpPr txBox="1"/>
+          <p:nvPr/>
+        </p:nvSpPr>
+        <p:spPr>
+          <a:xfrm>
+            <a:off x="1344168" y="3848608"/>
+            <a:ext cx="4504791" cy="374396"/>
+          </a:xfrm>
+          <a:prstGeom prst="rect">
+            <a:avLst/>
+          </a:prstGeom>
+          <a:noFill/>
+        </p:spPr>
+        <p:txBody>
+          <a:bodyPr wrap="square" lIns="0" rIns="0" tIns="0" bIns="0" anchor="t">
+            <a:spAutoFit/>
+          </a:bodyPr>
+          <a:lstStyle/>
+          <a:p>
+            <a:pPr algn="l">
+              <a:lnSpc>
+                <a:spcPct val="140000"/>
+              </a:lnSpc>
+            </a:pPr>
+            <a:r>
+              <a:rPr sz="1900" b="0" i="0">
+                <a:solidFill>
+                  <a:srgbClr val="3A3D40"/>
+                </a:solidFill>
+                <a:latin typeface="Verdana"/>
+              </a:rPr>
+              <a:t>buanderie   </a:t>
+            </a:r>
+            <a:r>
+              <a:rPr sz="1900" b="1" i="0">
+                <a:solidFill>
+                  <a:srgbClr val="07734A"/>
+                </a:solidFill>
+                <a:latin typeface="Verdana"/>
+              </a:rPr>
+              <a:t>» le son « an »</a:t>
+            </a:r>
+          </a:p>
+        </p:txBody>
+      </p:sp>
+      <p:sp>
+        <p:nvSpPr>
+          <p:cNvPr id="28" name="Rounded Rectangle 27"/>
+          <p:cNvSpPr/>
+          <p:nvPr/>
+        </p:nvSpPr>
+        <p:spPr>
+          <a:xfrm>
+            <a:off x="6159855" y="3693160"/>
+            <a:ext cx="5464911" cy="648716"/>
+          </a:xfrm>
+          <a:prstGeom prst="roundRect">
+            <a:avLst>
+              <a:gd name="adj" fmla="val 22552"/>
+            </a:avLst>
+          </a:prstGeom>
+          <a:solidFill>
+            <a:srgbClr val="E6F5EE"/>
+          </a:solidFill>
+          <a:ln w="12700">
+            <a:solidFill>
+              <a:srgbClr val="EAEAE8"/>
+            </a:solidFill>
+          </a:ln>
+          <a:effectLst/>
+        </p:spPr>
+        <p:style>
+          <a:lnRef idx="1">
+            <a:schemeClr val="accent1"/>
+          </a:lnRef>
+          <a:fillRef idx="3">
+            <a:schemeClr val="accent1"/>
+          </a:fillRef>
+          <a:effectRef idx="2">
+            <a:schemeClr val="accent1"/>
+          </a:effectRef>
+          <a:fontRef idx="minor">
+            <a:schemeClr val="lt1"/>
+          </a:fontRef>
+        </p:style>
+        <p:txBody>
+          <a:bodyPr rtlCol="0" anchor="ctr"/>
+          <a:lstStyle/>
+          <a:p/>
+        </p:txBody>
+      </p:sp>
+      <p:sp>
+        <p:nvSpPr>
+          <p:cNvPr id="29" name="Rounded Rectangle 28"/>
+          <p:cNvSpPr/>
+          <p:nvPr/>
+        </p:nvSpPr>
+        <p:spPr>
+          <a:xfrm>
+            <a:off x="6434175" y="3834638"/>
+            <a:ext cx="365760" cy="365760"/>
+          </a:xfrm>
+          <a:prstGeom prst="roundRect">
+            <a:avLst>
+              <a:gd name="adj" fmla="val 32500"/>
+            </a:avLst>
+          </a:prstGeom>
+          <a:solidFill>
+            <a:srgbClr val="E3F1E7"/>
+          </a:solidFill>
+          <a:ln>
+            <a:noFill/>
+          </a:ln>
+          <a:effectLst/>
+        </p:spPr>
+        <p:style>
+          <a:lnRef idx="1">
+            <a:schemeClr val="accent1"/>
+          </a:lnRef>
+          <a:fillRef idx="3">
+            <a:schemeClr val="accent1"/>
+          </a:fillRef>
+          <a:effectRef idx="2">
+            <a:schemeClr val="accent1"/>
+          </a:effectRef>
+          <a:fontRef idx="minor">
+            <a:schemeClr val="lt1"/>
+          </a:fontRef>
+        </p:style>
+        <p:txBody>
+          <a:bodyPr rtlCol="0" anchor="ctr"/>
+          <a:lstStyle/>
+          <a:p/>
+        </p:txBody>
+      </p:sp>
+      <p:sp>
+        <p:nvSpPr>
+          <p:cNvPr id="30" name="TextBox 29"/>
+          <p:cNvSpPr txBox="1"/>
+          <p:nvPr/>
+        </p:nvSpPr>
+        <p:spPr>
+          <a:xfrm>
+            <a:off x="6434175" y="3898646"/>
+            <a:ext cx="365760" cy="256032"/>
+          </a:xfrm>
+          <a:prstGeom prst="rect">
+            <a:avLst/>
+          </a:prstGeom>
+          <a:noFill/>
+        </p:spPr>
+        <p:txBody>
+          <a:bodyPr wrap="square" lIns="0" rIns="0" tIns="0" bIns="0" anchor="t">
+            <a:spAutoFit/>
+          </a:bodyPr>
+          <a:lstStyle/>
+          <a:p>
+            <a:pPr algn="ctr">
+              <a:lnSpc>
+                <a:spcPct val="135000"/>
+              </a:lnSpc>
+            </a:pPr>
+            <a:r>
+              <a:rPr sz="1500" b="1" i="0">
+                <a:solidFill>
+                  <a:srgbClr val="166534"/>
+                </a:solidFill>
+                <a:latin typeface="Verdana"/>
+              </a:rPr>
+              <a:t>6</a:t>
+            </a:r>
+          </a:p>
+        </p:txBody>
+      </p:sp>
+      <p:sp>
+        <p:nvSpPr>
+          <p:cNvPr id="31" name="TextBox 30"/>
+          <p:cNvSpPr txBox="1"/>
+          <p:nvPr/>
+        </p:nvSpPr>
+        <p:spPr>
+          <a:xfrm>
+            <a:off x="6937095" y="3848608"/>
+            <a:ext cx="4504791" cy="374396"/>
+          </a:xfrm>
+          <a:prstGeom prst="rect">
+            <a:avLst/>
+          </a:prstGeom>
+          <a:noFill/>
+        </p:spPr>
+        <p:txBody>
+          <a:bodyPr wrap="square" lIns="0" rIns="0" tIns="0" bIns="0" anchor="t">
+            <a:spAutoFit/>
+          </a:bodyPr>
+          <a:lstStyle/>
+          <a:p>
+            <a:pPr algn="l">
+              <a:lnSpc>
+                <a:spcPct val="140000"/>
+              </a:lnSpc>
+            </a:pPr>
+            <a:r>
+              <a:rPr sz="1900" b="0" i="0">
+                <a:solidFill>
+                  <a:srgbClr val="3A3D40"/>
+                </a:solidFill>
+                <a:latin typeface="Verdana"/>
+              </a:rPr>
+              <a:t>maison   </a:t>
+            </a:r>
+            <a:r>
+              <a:rPr sz="1900" b="1" i="0">
+                <a:solidFill>
+                  <a:srgbClr val="07734A"/>
+                </a:solidFill>
+                <a:latin typeface="Verdana"/>
+              </a:rPr>
+              <a:t>» le son « on »</a:t>
+            </a:r>
+          </a:p>
+        </p:txBody>
+      </p:sp>
+      <p:sp>
+        <p:nvSpPr>
+          <p:cNvPr id="32" name="Rounded Rectangle 31"/>
+          <p:cNvSpPr/>
+          <p:nvPr/>
+        </p:nvSpPr>
+        <p:spPr>
+          <a:xfrm>
+            <a:off x="566928" y="4469892"/>
+            <a:ext cx="5464911" cy="648716"/>
+          </a:xfrm>
+          <a:prstGeom prst="roundRect">
+            <a:avLst>
+              <a:gd name="adj" fmla="val 22552"/>
+            </a:avLst>
+          </a:prstGeom>
+          <a:solidFill>
+            <a:srgbClr val="E6F5EE"/>
+          </a:solidFill>
+          <a:ln w="12700">
+            <a:solidFill>
+              <a:srgbClr val="EAEAE8"/>
+            </a:solidFill>
+          </a:ln>
+          <a:effectLst/>
+        </p:spPr>
+        <p:style>
+          <a:lnRef idx="1">
+            <a:schemeClr val="accent1"/>
+          </a:lnRef>
+          <a:fillRef idx="3">
+            <a:schemeClr val="accent1"/>
+          </a:fillRef>
+          <a:effectRef idx="2">
+            <a:schemeClr val="accent1"/>
+          </a:effectRef>
+          <a:fontRef idx="minor">
+            <a:schemeClr val="lt1"/>
+          </a:fontRef>
+        </p:style>
+        <p:txBody>
+          <a:bodyPr rtlCol="0" anchor="ctr"/>
+          <a:lstStyle/>
+          <a:p/>
+        </p:txBody>
+      </p:sp>
+      <p:sp>
+        <p:nvSpPr>
+          <p:cNvPr id="33" name="Rounded Rectangle 32"/>
+          <p:cNvSpPr/>
+          <p:nvPr/>
+        </p:nvSpPr>
+        <p:spPr>
+          <a:xfrm>
+            <a:off x="841247" y="4611370"/>
+            <a:ext cx="365760" cy="365760"/>
+          </a:xfrm>
+          <a:prstGeom prst="roundRect">
+            <a:avLst>
+              <a:gd name="adj" fmla="val 32500"/>
+            </a:avLst>
+          </a:prstGeom>
+          <a:solidFill>
+            <a:srgbClr val="E3F1E7"/>
+          </a:solidFill>
+          <a:ln>
+            <a:noFill/>
+          </a:ln>
+          <a:effectLst/>
+        </p:spPr>
+        <p:style>
+          <a:lnRef idx="1">
+            <a:schemeClr val="accent1"/>
+          </a:lnRef>
+          <a:fillRef idx="3">
+            <a:schemeClr val="accent1"/>
+          </a:fillRef>
+          <a:effectRef idx="2">
+            <a:schemeClr val="accent1"/>
+          </a:effectRef>
+          <a:fontRef idx="minor">
+            <a:schemeClr val="lt1"/>
+          </a:fontRef>
+        </p:style>
+        <p:txBody>
+          <a:bodyPr rtlCol="0" anchor="ctr"/>
+          <a:lstStyle/>
+          <a:p/>
+        </p:txBody>
+      </p:sp>
+      <p:sp>
+        <p:nvSpPr>
+          <p:cNvPr id="34" name="TextBox 33"/>
+          <p:cNvSpPr txBox="1"/>
+          <p:nvPr/>
+        </p:nvSpPr>
+        <p:spPr>
+          <a:xfrm>
+            <a:off x="841247" y="4675378"/>
+            <a:ext cx="365760" cy="256032"/>
+          </a:xfrm>
+          <a:prstGeom prst="rect">
+            <a:avLst/>
+          </a:prstGeom>
+          <a:noFill/>
+        </p:spPr>
+        <p:txBody>
+          <a:bodyPr wrap="square" lIns="0" rIns="0" tIns="0" bIns="0" anchor="t">
+            <a:spAutoFit/>
+          </a:bodyPr>
+          <a:lstStyle/>
+          <a:p>
+            <a:pPr algn="ctr">
+              <a:lnSpc>
+                <a:spcPct val="135000"/>
+              </a:lnSpc>
+            </a:pPr>
+            <a:r>
+              <a:rPr sz="1500" b="1" i="0">
+                <a:solidFill>
+                  <a:srgbClr val="166534"/>
+                </a:solidFill>
+                <a:latin typeface="Verdana"/>
+              </a:rPr>
+              <a:t>7</a:t>
+            </a:r>
+          </a:p>
+        </p:txBody>
+      </p:sp>
+      <p:sp>
+        <p:nvSpPr>
+          <p:cNvPr id="35" name="TextBox 34"/>
+          <p:cNvSpPr txBox="1"/>
+          <p:nvPr/>
+        </p:nvSpPr>
+        <p:spPr>
+          <a:xfrm>
+            <a:off x="1344168" y="4625340"/>
+            <a:ext cx="4504791" cy="374396"/>
+          </a:xfrm>
+          <a:prstGeom prst="rect">
+            <a:avLst/>
+          </a:prstGeom>
+          <a:noFill/>
+        </p:spPr>
+        <p:txBody>
+          <a:bodyPr wrap="square" lIns="0" rIns="0" tIns="0" bIns="0" anchor="t">
+            <a:spAutoFit/>
+          </a:bodyPr>
+          <a:lstStyle/>
+          <a:p>
+            <a:pPr algn="l">
+              <a:lnSpc>
+                <a:spcPct val="140000"/>
+              </a:lnSpc>
+            </a:pPr>
+            <a:r>
+              <a:rPr sz="1900" b="0" i="0">
+                <a:solidFill>
+                  <a:srgbClr val="3A3D40"/>
+                </a:solidFill>
+                <a:latin typeface="Verdana"/>
+              </a:rPr>
+              <a:t>septembre   </a:t>
+            </a:r>
+            <a:r>
+              <a:rPr sz="1900" b="1" i="0">
+                <a:solidFill>
+                  <a:srgbClr val="07734A"/>
+                </a:solidFill>
+                <a:latin typeface="Verdana"/>
+              </a:rPr>
+              <a:t>» le son « an »</a:t>
+            </a:r>
+          </a:p>
+        </p:txBody>
+      </p:sp>
+      <p:sp>
+        <p:nvSpPr>
+          <p:cNvPr id="36" name="Rounded Rectangle 35"/>
+          <p:cNvSpPr/>
+          <p:nvPr/>
+        </p:nvSpPr>
+        <p:spPr>
+          <a:xfrm>
+            <a:off x="6159855" y="4469892"/>
+            <a:ext cx="5464911" cy="648716"/>
+          </a:xfrm>
+          <a:prstGeom prst="roundRect">
+            <a:avLst>
+              <a:gd name="adj" fmla="val 22552"/>
+            </a:avLst>
+          </a:prstGeom>
+          <a:solidFill>
+            <a:srgbClr val="E6F5EE"/>
+          </a:solidFill>
+          <a:ln w="12700">
+            <a:solidFill>
+              <a:srgbClr val="EAEAE8"/>
+            </a:solidFill>
+          </a:ln>
+          <a:effectLst/>
+        </p:spPr>
+        <p:style>
+          <a:lnRef idx="1">
+            <a:schemeClr val="accent1"/>
+          </a:lnRef>
+          <a:fillRef idx="3">
+            <a:schemeClr val="accent1"/>
+          </a:fillRef>
+          <a:effectRef idx="2">
+            <a:schemeClr val="accent1"/>
+          </a:effectRef>
+          <a:fontRef idx="minor">
+            <a:schemeClr val="lt1"/>
+          </a:fontRef>
+        </p:style>
+        <p:txBody>
+          <a:bodyPr rtlCol="0" anchor="ctr"/>
+          <a:lstStyle/>
+          <a:p/>
+        </p:txBody>
+      </p:sp>
+      <p:sp>
+        <p:nvSpPr>
+          <p:cNvPr id="37" name="Rounded Rectangle 36"/>
+          <p:cNvSpPr/>
+          <p:nvPr/>
+        </p:nvSpPr>
+        <p:spPr>
+          <a:xfrm>
+            <a:off x="6434175" y="4611370"/>
+            <a:ext cx="365760" cy="365760"/>
+          </a:xfrm>
+          <a:prstGeom prst="roundRect">
+            <a:avLst>
+              <a:gd name="adj" fmla="val 32500"/>
+            </a:avLst>
+          </a:prstGeom>
+          <a:solidFill>
+            <a:srgbClr val="E3F1E7"/>
+          </a:solidFill>
+          <a:ln>
+            <a:noFill/>
+          </a:ln>
+          <a:effectLst/>
+        </p:spPr>
+        <p:style>
+          <a:lnRef idx="1">
+            <a:schemeClr val="accent1"/>
+          </a:lnRef>
+          <a:fillRef idx="3">
+            <a:schemeClr val="accent1"/>
+          </a:fillRef>
+          <a:effectRef idx="2">
+            <a:schemeClr val="accent1"/>
+          </a:effectRef>
+          <a:fontRef idx="minor">
+            <a:schemeClr val="lt1"/>
+          </a:fontRef>
+        </p:style>
+        <p:txBody>
+          <a:bodyPr rtlCol="0" anchor="ctr"/>
+          <a:lstStyle/>
+          <a:p/>
+        </p:txBody>
+      </p:sp>
+      <p:sp>
+        <p:nvSpPr>
+          <p:cNvPr id="38" name="TextBox 37"/>
+          <p:cNvSpPr txBox="1"/>
+          <p:nvPr/>
+        </p:nvSpPr>
+        <p:spPr>
+          <a:xfrm>
+            <a:off x="6434175" y="4675378"/>
+            <a:ext cx="365760" cy="256032"/>
+          </a:xfrm>
+          <a:prstGeom prst="rect">
+            <a:avLst/>
+          </a:prstGeom>
+          <a:noFill/>
+        </p:spPr>
+        <p:txBody>
+          <a:bodyPr wrap="square" lIns="0" rIns="0" tIns="0" bIns="0" anchor="t">
+            <a:spAutoFit/>
+          </a:bodyPr>
+          <a:lstStyle/>
+          <a:p>
+            <a:pPr algn="ctr">
+              <a:lnSpc>
+                <a:spcPct val="135000"/>
+              </a:lnSpc>
+            </a:pPr>
+            <a:r>
+              <a:rPr sz="1500" b="1" i="0">
+                <a:solidFill>
+                  <a:srgbClr val="166534"/>
+                </a:solidFill>
+                <a:latin typeface="Verdana"/>
+              </a:rPr>
+              <a:t>8</a:t>
+            </a:r>
+          </a:p>
+        </p:txBody>
+      </p:sp>
+      <p:sp>
+        <p:nvSpPr>
+          <p:cNvPr id="39" name="TextBox 38"/>
+          <p:cNvSpPr txBox="1"/>
+          <p:nvPr/>
+        </p:nvSpPr>
+        <p:spPr>
+          <a:xfrm>
+            <a:off x="6937095" y="4625340"/>
+            <a:ext cx="4504791" cy="374396"/>
+          </a:xfrm>
+          <a:prstGeom prst="rect">
+            <a:avLst/>
+          </a:prstGeom>
+          <a:noFill/>
+        </p:spPr>
+        <p:txBody>
+          <a:bodyPr wrap="square" lIns="0" rIns="0" tIns="0" bIns="0" anchor="t">
+            <a:spAutoFit/>
+          </a:bodyPr>
+          <a:lstStyle/>
+          <a:p>
+            <a:pPr algn="l">
+              <a:lnSpc>
+                <a:spcPct val="140000"/>
+              </a:lnSpc>
+            </a:pPr>
+            <a:r>
+              <a:rPr sz="1900" b="0" i="0">
+                <a:solidFill>
+                  <a:srgbClr val="3A3D40"/>
+                </a:solidFill>
+                <a:latin typeface="Verdana"/>
+              </a:rPr>
+              <a:t>répondu   </a:t>
+            </a:r>
+            <a:r>
+              <a:rPr sz="1900" b="1" i="0">
+                <a:solidFill>
+                  <a:srgbClr val="07734A"/>
+                </a:solidFill>
+                <a:latin typeface="Verdana"/>
+              </a:rPr>
+              <a:t>» le son « on »</a:t>
+            </a:r>
+          </a:p>
+        </p:txBody>
+      </p:sp>
+    </p:spTree>
+  </p:cSld>
+  <p:clrMapOvr>
+    <a:masterClrMapping/>
+  </p:clrMapOvr>
+</p:sld>
+</file>
+
+<file path=ppt/slides/slide23.xml><?xml version="1.0" encoding="utf-8"?>
+<p:sld xmlns:a="http://schemas.openxmlformats.org/drawingml/2006/main" xmlns:p="http://schemas.openxmlformats.org/presentationml/2006/main" xmlns:r="http://schemas.openxmlformats.org/officeDocument/2006/relationships">
+  <p:cSld>
+    <p:spTree>
+      <p:nvGrpSpPr>
+        <p:cNvPr id="1" name=""/>
+        <p:cNvGrpSpPr/>
+        <p:nvPr/>
+      </p:nvGrpSpPr>
+      <p:grpSpPr/>
+      <p:sp>
+        <p:nvSpPr>
+          <p:cNvPr id="2" name="Rectangle 1"/>
+          <p:cNvSpPr/>
+          <p:nvPr/>
+        </p:nvSpPr>
+        <p:spPr>
+          <a:xfrm>
+            <a:off x="0" y="0"/>
+            <a:ext cx="12191695" cy="6858000"/>
+          </a:xfrm>
+          <a:prstGeom prst="rect">
+            <a:avLst/>
+          </a:prstGeom>
+          <a:solidFill>
+            <a:srgbClr val="F7F7F5"/>
+          </a:solidFill>
+          <a:ln>
+            <a:noFill/>
+          </a:ln>
+          <a:effectLst/>
+        </p:spPr>
+        <p:style>
+          <a:lnRef idx="1">
+            <a:schemeClr val="accent1"/>
+          </a:lnRef>
+          <a:fillRef idx="3">
+            <a:schemeClr val="accent1"/>
+          </a:fillRef>
+          <a:effectRef idx="2">
+            <a:schemeClr val="accent1"/>
+          </a:effectRef>
+          <a:fontRef idx="minor">
+            <a:schemeClr val="lt1"/>
+          </a:fontRef>
+        </p:style>
+        <p:txBody>
+          <a:bodyPr rtlCol="0" anchor="ctr"/>
+          <a:lstStyle/>
+          <a:p/>
+        </p:txBody>
+      </p:sp>
+      <p:sp>
+        <p:nvSpPr>
+          <p:cNvPr id="3" name="TextBox 2"/>
+          <p:cNvSpPr txBox="1"/>
+          <p:nvPr/>
+        </p:nvSpPr>
+        <p:spPr>
+          <a:xfrm>
+            <a:off x="566928" y="6355080"/>
+            <a:ext cx="6400800" cy="219456"/>
+          </a:xfrm>
+          <a:prstGeom prst="rect">
+            <a:avLst/>
+          </a:prstGeom>
+          <a:noFill/>
+        </p:spPr>
+        <p:txBody>
+          <a:bodyPr wrap="square" lIns="0" rIns="0" tIns="0" bIns="0" anchor="t">
+            <a:spAutoFit/>
+          </a:bodyPr>
+          <a:lstStyle/>
+          <a:p>
+            <a:pPr algn="l">
+              <a:lnSpc>
+                <a:spcPct val="135000"/>
+              </a:lnSpc>
+            </a:pPr>
+            <a:r>
+              <a:rPr sz="1200" b="0" i="0">
+                <a:solidFill>
+                  <a:srgbClr val="6E7175"/>
+                </a:solidFill>
+                <a:latin typeface="Verdana"/>
+              </a:rPr>
+              <a:t>A2 · Comment est le logement ?</a:t>
+            </a:r>
+          </a:p>
+        </p:txBody>
+      </p:sp>
+      <p:sp>
+        <p:nvSpPr>
+          <p:cNvPr id="4" name="TextBox 3"/>
+          <p:cNvSpPr txBox="1"/>
+          <p:nvPr/>
+        </p:nvSpPr>
+        <p:spPr>
+          <a:xfrm>
+            <a:off x="10710367" y="6355080"/>
+            <a:ext cx="914400" cy="219456"/>
+          </a:xfrm>
+          <a:prstGeom prst="rect">
+            <a:avLst/>
+          </a:prstGeom>
+          <a:noFill/>
+        </p:spPr>
+        <p:txBody>
+          <a:bodyPr wrap="square" lIns="0" rIns="0" tIns="0" bIns="0" anchor="t">
+            <a:spAutoFit/>
+          </a:bodyPr>
+          <a:lstStyle/>
+          <a:p>
+            <a:pPr algn="r">
+              <a:lnSpc>
+                <a:spcPct val="135000"/>
+              </a:lnSpc>
+            </a:pPr>
+            <a:r>
+              <a:rPr sz="1200" b="0" i="0">
+                <a:solidFill>
+                  <a:srgbClr val="6E7175"/>
+                </a:solidFill>
+                <a:latin typeface="Verdana"/>
+              </a:rPr>
+              <a:t>23</a:t>
+            </a:r>
+          </a:p>
+        </p:txBody>
+      </p:sp>
+      <p:sp>
+        <p:nvSpPr>
+          <p:cNvPr id="5" name="TextBox 4"/>
+          <p:cNvSpPr txBox="1"/>
+          <p:nvPr/>
+        </p:nvSpPr>
+        <p:spPr>
+          <a:xfrm>
+            <a:off x="566928" y="420624"/>
+            <a:ext cx="11057839" cy="237744"/>
+          </a:xfrm>
+          <a:prstGeom prst="rect">
+            <a:avLst/>
+          </a:prstGeom>
+          <a:noFill/>
+        </p:spPr>
+        <p:txBody>
+          <a:bodyPr wrap="square" lIns="0" rIns="0" tIns="0" bIns="0" anchor="t">
+            <a:spAutoFit/>
+          </a:bodyPr>
+          <a:lstStyle/>
+          <a:p>
+            <a:pPr algn="l">
+              <a:lnSpc>
+                <a:spcPct val="135000"/>
+              </a:lnSpc>
+            </a:pPr>
+            <a:r>
+              <a:rPr sz="1300" b="1" i="0" spc="156">
+                <a:solidFill>
+                  <a:srgbClr val="166534"/>
+                </a:solidFill>
+                <a:latin typeface="Verdana"/>
+              </a:rPr>
+              <a:t>PRATIQUE · 6 DE 6</a:t>
+            </a:r>
+          </a:p>
+        </p:txBody>
+      </p:sp>
+      <p:sp>
+        <p:nvSpPr>
+          <p:cNvPr id="6" name="TextBox 5"/>
+          <p:cNvSpPr txBox="1"/>
+          <p:nvPr/>
+        </p:nvSpPr>
+        <p:spPr>
+          <a:xfrm>
+            <a:off x="566928" y="749808"/>
+            <a:ext cx="11057839" cy="877824"/>
+          </a:xfrm>
+          <a:prstGeom prst="rect">
+            <a:avLst/>
+          </a:prstGeom>
+          <a:noFill/>
+        </p:spPr>
+        <p:txBody>
+          <a:bodyPr wrap="square" lIns="0" rIns="0" tIns="0" bIns="0" anchor="t">
+            <a:spAutoFit/>
+          </a:bodyPr>
+          <a:lstStyle/>
+          <a:p>
+            <a:pPr algn="l">
+              <a:lnSpc>
+                <a:spcPct val="115000"/>
+              </a:lnSpc>
+            </a:pPr>
+            <a:r>
+              <a:rPr sz="3400" b="1" i="0">
+                <a:solidFill>
+                  <a:srgbClr val="17181A"/>
+                </a:solidFill>
+                <a:latin typeface="Verdana"/>
+              </a:rPr>
+              <a:t>Trois phrases de visite à lire à voix haute</a:t>
+            </a:r>
+          </a:p>
+        </p:txBody>
+      </p:sp>
+      <p:sp>
+        <p:nvSpPr>
+          <p:cNvPr id="7" name="TextBox 6"/>
+          <p:cNvSpPr txBox="1"/>
+          <p:nvPr/>
+        </p:nvSpPr>
+        <p:spPr>
+          <a:xfrm>
+            <a:off x="566928" y="1645920"/>
+            <a:ext cx="11057839" cy="329184"/>
+          </a:xfrm>
+          <a:prstGeom prst="rect">
+            <a:avLst/>
+          </a:prstGeom>
+          <a:noFill/>
+        </p:spPr>
+        <p:txBody>
+          <a:bodyPr wrap="square" lIns="0" rIns="0" tIns="0" bIns="0" anchor="t">
+            <a:spAutoFit/>
+          </a:bodyPr>
+          <a:lstStyle/>
+          <a:p>
+            <a:pPr algn="l">
+              <a:lnSpc>
+                <a:spcPct val="135000"/>
+              </a:lnSpc>
+            </a:pPr>
+            <a:r>
+              <a:rPr sz="1800" b="0" i="0">
+                <a:solidFill>
+                  <a:srgbClr val="6E7175"/>
+                </a:solidFill>
+                <a:latin typeface="Verdana"/>
+              </a:rPr>
+              <a:t>Chacun lit une phrase. Le groupe ne corrige que les sons nasaux.</a:t>
+            </a:r>
+          </a:p>
+        </p:txBody>
+      </p:sp>
+      <p:sp>
+        <p:nvSpPr>
+          <p:cNvPr id="8" name="Rounded Rectangle 7"/>
+          <p:cNvSpPr/>
+          <p:nvPr/>
+        </p:nvSpPr>
+        <p:spPr>
+          <a:xfrm>
+            <a:off x="566928" y="2139696"/>
+            <a:ext cx="11057839" cy="648716"/>
+          </a:xfrm>
+          <a:prstGeom prst="roundRect">
+            <a:avLst>
+              <a:gd name="adj" fmla="val 22552"/>
+            </a:avLst>
+          </a:prstGeom>
+          <a:solidFill>
+            <a:srgbClr val="FFFFFF"/>
+          </a:solidFill>
+          <a:ln w="12700">
+            <a:solidFill>
+              <a:srgbClr val="EAEAE8"/>
+            </a:solidFill>
+          </a:ln>
+          <a:effectLst/>
+        </p:spPr>
+        <p:style>
+          <a:lnRef idx="1">
+            <a:schemeClr val="accent1"/>
+          </a:lnRef>
+          <a:fillRef idx="3">
+            <a:schemeClr val="accent1"/>
+          </a:fillRef>
+          <a:effectRef idx="2">
+            <a:schemeClr val="accent1"/>
+          </a:effectRef>
+          <a:fontRef idx="minor">
+            <a:schemeClr val="lt1"/>
+          </a:fontRef>
+        </p:style>
+        <p:txBody>
+          <a:bodyPr rtlCol="0" anchor="ctr"/>
+          <a:lstStyle/>
+          <a:p/>
+        </p:txBody>
+      </p:sp>
+      <p:sp>
+        <p:nvSpPr>
+          <p:cNvPr id="9" name="Rounded Rectangle 8"/>
+          <p:cNvSpPr/>
+          <p:nvPr/>
+        </p:nvSpPr>
+        <p:spPr>
+          <a:xfrm>
+            <a:off x="841247" y="2281174"/>
+            <a:ext cx="365760" cy="365760"/>
+          </a:xfrm>
+          <a:prstGeom prst="roundRect">
+            <a:avLst>
+              <a:gd name="adj" fmla="val 32500"/>
+            </a:avLst>
+          </a:prstGeom>
+          <a:solidFill>
+            <a:srgbClr val="E3F1E7"/>
+          </a:solidFill>
+          <a:ln>
+            <a:noFill/>
+          </a:ln>
+          <a:effectLst/>
+        </p:spPr>
+        <p:style>
+          <a:lnRef idx="1">
+            <a:schemeClr val="accent1"/>
+          </a:lnRef>
+          <a:fillRef idx="3">
+            <a:schemeClr val="accent1"/>
+          </a:fillRef>
+          <a:effectRef idx="2">
+            <a:schemeClr val="accent1"/>
+          </a:effectRef>
+          <a:fontRef idx="minor">
+            <a:schemeClr val="lt1"/>
+          </a:fontRef>
+        </p:style>
+        <p:txBody>
+          <a:bodyPr rtlCol="0" anchor="ctr"/>
+          <a:lstStyle/>
+          <a:p/>
+        </p:txBody>
+      </p:sp>
+      <p:sp>
+        <p:nvSpPr>
+          <p:cNvPr id="10" name="TextBox 9"/>
+          <p:cNvSpPr txBox="1"/>
+          <p:nvPr/>
+        </p:nvSpPr>
+        <p:spPr>
+          <a:xfrm>
+            <a:off x="841247" y="2345182"/>
+            <a:ext cx="365760" cy="256032"/>
+          </a:xfrm>
+          <a:prstGeom prst="rect">
+            <a:avLst/>
+          </a:prstGeom>
+          <a:noFill/>
+        </p:spPr>
+        <p:txBody>
+          <a:bodyPr wrap="square" lIns="0" rIns="0" tIns="0" bIns="0" anchor="t">
+            <a:spAutoFit/>
+          </a:bodyPr>
+          <a:lstStyle/>
+          <a:p>
+            <a:pPr algn="ctr">
+              <a:lnSpc>
+                <a:spcPct val="135000"/>
+              </a:lnSpc>
+            </a:pPr>
+            <a:r>
+              <a:rPr sz="1500" b="1" i="0">
+                <a:solidFill>
+                  <a:srgbClr val="166534"/>
+                </a:solidFill>
+                <a:latin typeface="Verdana"/>
+              </a:rPr>
+              <a:t>1</a:t>
+            </a:r>
+          </a:p>
+        </p:txBody>
+      </p:sp>
+      <p:sp>
+        <p:nvSpPr>
+          <p:cNvPr id="11" name="TextBox 10"/>
+          <p:cNvSpPr txBox="1"/>
+          <p:nvPr/>
+        </p:nvSpPr>
+        <p:spPr>
+          <a:xfrm>
+            <a:off x="1344168" y="2295144"/>
+            <a:ext cx="10097719" cy="374396"/>
+          </a:xfrm>
+          <a:prstGeom prst="rect">
+            <a:avLst/>
+          </a:prstGeom>
+          <a:noFill/>
+        </p:spPr>
+        <p:txBody>
+          <a:bodyPr wrap="square" lIns="0" rIns="0" tIns="0" bIns="0" anchor="t">
+            <a:spAutoFit/>
+          </a:bodyPr>
+          <a:lstStyle/>
+          <a:p>
+            <a:pPr algn="l">
+              <a:lnSpc>
+                <a:spcPct val="140000"/>
+              </a:lnSpc>
+            </a:pPr>
+            <a:r>
+              <a:rPr sz="1900" b="0" i="0">
+                <a:solidFill>
+                  <a:srgbClr val="3A3D40"/>
+                </a:solidFill>
+                <a:latin typeface="Verdana"/>
+              </a:rPr>
+              <a:t>Le logement a une chambre et un grand salon.</a:t>
+            </a:r>
+          </a:p>
+        </p:txBody>
+      </p:sp>
+      <p:sp>
+        <p:nvSpPr>
+          <p:cNvPr id="12" name="Rounded Rectangle 11"/>
+          <p:cNvSpPr/>
+          <p:nvPr/>
+        </p:nvSpPr>
+        <p:spPr>
+          <a:xfrm>
+            <a:off x="566928" y="2916428"/>
+            <a:ext cx="11057839" cy="648716"/>
+          </a:xfrm>
+          <a:prstGeom prst="roundRect">
+            <a:avLst>
+              <a:gd name="adj" fmla="val 22552"/>
+            </a:avLst>
+          </a:prstGeom>
+          <a:solidFill>
+            <a:srgbClr val="FFFFFF"/>
+          </a:solidFill>
+          <a:ln w="12700">
+            <a:solidFill>
+              <a:srgbClr val="EAEAE8"/>
+            </a:solidFill>
+          </a:ln>
+          <a:effectLst/>
+        </p:spPr>
+        <p:style>
+          <a:lnRef idx="1">
+            <a:schemeClr val="accent1"/>
+          </a:lnRef>
+          <a:fillRef idx="3">
+            <a:schemeClr val="accent1"/>
+          </a:fillRef>
+          <a:effectRef idx="2">
+            <a:schemeClr val="accent1"/>
+          </a:effectRef>
+          <a:fontRef idx="minor">
+            <a:schemeClr val="lt1"/>
+          </a:fontRef>
+        </p:style>
+        <p:txBody>
+          <a:bodyPr rtlCol="0" anchor="ctr"/>
+          <a:lstStyle/>
+          <a:p/>
+        </p:txBody>
+      </p:sp>
+      <p:sp>
+        <p:nvSpPr>
+          <p:cNvPr id="13" name="Rounded Rectangle 12"/>
+          <p:cNvSpPr/>
+          <p:nvPr/>
+        </p:nvSpPr>
+        <p:spPr>
+          <a:xfrm>
+            <a:off x="841247" y="3057905"/>
+            <a:ext cx="365760" cy="365760"/>
+          </a:xfrm>
+          <a:prstGeom prst="roundRect">
+            <a:avLst>
+              <a:gd name="adj" fmla="val 32500"/>
+            </a:avLst>
+          </a:prstGeom>
+          <a:solidFill>
+            <a:srgbClr val="E3F1E7"/>
+          </a:solidFill>
+          <a:ln>
+            <a:noFill/>
+          </a:ln>
+          <a:effectLst/>
+        </p:spPr>
+        <p:style>
+          <a:lnRef idx="1">
+            <a:schemeClr val="accent1"/>
+          </a:lnRef>
+          <a:fillRef idx="3">
+            <a:schemeClr val="accent1"/>
+          </a:fillRef>
+          <a:effectRef idx="2">
+            <a:schemeClr val="accent1"/>
+          </a:effectRef>
+          <a:fontRef idx="minor">
+            <a:schemeClr val="lt1"/>
+          </a:fontRef>
+        </p:style>
+        <p:txBody>
+          <a:bodyPr rtlCol="0" anchor="ctr"/>
+          <a:lstStyle/>
+          <a:p/>
+        </p:txBody>
+      </p:sp>
+      <p:sp>
+        <p:nvSpPr>
+          <p:cNvPr id="14" name="TextBox 13"/>
+          <p:cNvSpPr txBox="1"/>
+          <p:nvPr/>
+        </p:nvSpPr>
+        <p:spPr>
+          <a:xfrm>
+            <a:off x="841247" y="3121913"/>
+            <a:ext cx="365760" cy="256032"/>
+          </a:xfrm>
+          <a:prstGeom prst="rect">
+            <a:avLst/>
+          </a:prstGeom>
+          <a:noFill/>
+        </p:spPr>
+        <p:txBody>
+          <a:bodyPr wrap="square" lIns="0" rIns="0" tIns="0" bIns="0" anchor="t">
+            <a:spAutoFit/>
+          </a:bodyPr>
+          <a:lstStyle/>
+          <a:p>
+            <a:pPr algn="ctr">
+              <a:lnSpc>
+                <a:spcPct val="135000"/>
+              </a:lnSpc>
+            </a:pPr>
+            <a:r>
+              <a:rPr sz="1500" b="1" i="0">
+                <a:solidFill>
+                  <a:srgbClr val="166534"/>
+                </a:solidFill>
+                <a:latin typeface="Verdana"/>
+              </a:rPr>
+              <a:t>2</a:t>
+            </a:r>
+          </a:p>
+        </p:txBody>
+      </p:sp>
+      <p:sp>
+        <p:nvSpPr>
+          <p:cNvPr id="15" name="TextBox 14"/>
+          <p:cNvSpPr txBox="1"/>
+          <p:nvPr/>
+        </p:nvSpPr>
+        <p:spPr>
+          <a:xfrm>
+            <a:off x="1344168" y="3071876"/>
+            <a:ext cx="10097719" cy="374396"/>
+          </a:xfrm>
+          <a:prstGeom prst="rect">
+            <a:avLst/>
+          </a:prstGeom>
+          <a:noFill/>
+        </p:spPr>
+        <p:txBody>
+          <a:bodyPr wrap="square" lIns="0" rIns="0" tIns="0" bIns="0" anchor="t">
+            <a:spAutoFit/>
+          </a:bodyPr>
+          <a:lstStyle/>
+          <a:p>
+            <a:pPr algn="l">
+              <a:lnSpc>
+                <a:spcPct val="140000"/>
+              </a:lnSpc>
+            </a:pPr>
+            <a:r>
+              <a:rPr sz="1900" b="0" i="0">
+                <a:solidFill>
+                  <a:srgbClr val="3A3D40"/>
+                </a:solidFill>
+                <a:latin typeface="Verdana"/>
+              </a:rPr>
+              <a:t>La buanderie est au sous-sol de la maison.</a:t>
+            </a:r>
+          </a:p>
+        </p:txBody>
+      </p:sp>
+      <p:sp>
+        <p:nvSpPr>
+          <p:cNvPr id="16" name="Rounded Rectangle 15"/>
+          <p:cNvSpPr/>
+          <p:nvPr/>
+        </p:nvSpPr>
+        <p:spPr>
+          <a:xfrm>
+            <a:off x="566928" y="3693160"/>
+            <a:ext cx="11057839" cy="648716"/>
+          </a:xfrm>
+          <a:prstGeom prst="roundRect">
+            <a:avLst>
+              <a:gd name="adj" fmla="val 22552"/>
+            </a:avLst>
+          </a:prstGeom>
+          <a:solidFill>
+            <a:srgbClr val="FFFFFF"/>
+          </a:solidFill>
+          <a:ln w="12700">
+            <a:solidFill>
+              <a:srgbClr val="EAEAE8"/>
+            </a:solidFill>
+          </a:ln>
+          <a:effectLst/>
+        </p:spPr>
+        <p:style>
+          <a:lnRef idx="1">
+            <a:schemeClr val="accent1"/>
+          </a:lnRef>
+          <a:fillRef idx="3">
+            <a:schemeClr val="accent1"/>
+          </a:fillRef>
+          <a:effectRef idx="2">
+            <a:schemeClr val="accent1"/>
+          </a:effectRef>
+          <a:fontRef idx="minor">
+            <a:schemeClr val="lt1"/>
+          </a:fontRef>
+        </p:style>
+        <p:txBody>
+          <a:bodyPr rtlCol="0" anchor="ctr"/>
+          <a:lstStyle/>
+          <a:p/>
+        </p:txBody>
+      </p:sp>
+      <p:sp>
+        <p:nvSpPr>
+          <p:cNvPr id="17" name="Rounded Rectangle 16"/>
+          <p:cNvSpPr/>
+          <p:nvPr/>
+        </p:nvSpPr>
+        <p:spPr>
+          <a:xfrm>
+            <a:off x="841247" y="3834638"/>
+            <a:ext cx="365760" cy="365760"/>
+          </a:xfrm>
+          <a:prstGeom prst="roundRect">
+            <a:avLst>
+              <a:gd name="adj" fmla="val 32500"/>
+            </a:avLst>
+          </a:prstGeom>
+          <a:solidFill>
+            <a:srgbClr val="E3F1E7"/>
+          </a:solidFill>
+          <a:ln>
+            <a:noFill/>
+          </a:ln>
+          <a:effectLst/>
+        </p:spPr>
+        <p:style>
+          <a:lnRef idx="1">
+            <a:schemeClr val="accent1"/>
+          </a:lnRef>
+          <a:fillRef idx="3">
+            <a:schemeClr val="accent1"/>
+          </a:fillRef>
+          <a:effectRef idx="2">
+            <a:schemeClr val="accent1"/>
+          </a:effectRef>
+          <a:fontRef idx="minor">
+            <a:schemeClr val="lt1"/>
+          </a:fontRef>
+        </p:style>
+        <p:txBody>
+          <a:bodyPr rtlCol="0" anchor="ctr"/>
+          <a:lstStyle/>
+          <a:p/>
+        </p:txBody>
+      </p:sp>
+      <p:sp>
+        <p:nvSpPr>
+          <p:cNvPr id="18" name="TextBox 17"/>
+          <p:cNvSpPr txBox="1"/>
+          <p:nvPr/>
+        </p:nvSpPr>
+        <p:spPr>
+          <a:xfrm>
+            <a:off x="841247" y="3898646"/>
+            <a:ext cx="365760" cy="256032"/>
+          </a:xfrm>
+          <a:prstGeom prst="rect">
+            <a:avLst/>
+          </a:prstGeom>
+          <a:noFill/>
+        </p:spPr>
+        <p:txBody>
+          <a:bodyPr wrap="square" lIns="0" rIns="0" tIns="0" bIns="0" anchor="t">
+            <a:spAutoFit/>
+          </a:bodyPr>
+          <a:lstStyle/>
+          <a:p>
+            <a:pPr algn="ctr">
+              <a:lnSpc>
+                <a:spcPct val="135000"/>
+              </a:lnSpc>
+            </a:pPr>
+            <a:r>
+              <a:rPr sz="1500" b="1" i="0">
+                <a:solidFill>
+                  <a:srgbClr val="166534"/>
+                </a:solidFill>
+                <a:latin typeface="Verdana"/>
+              </a:rPr>
+              <a:t>3</a:t>
+            </a:r>
+          </a:p>
+        </p:txBody>
+      </p:sp>
+      <p:sp>
+        <p:nvSpPr>
+          <p:cNvPr id="19" name="TextBox 18"/>
+          <p:cNvSpPr txBox="1"/>
+          <p:nvPr/>
+        </p:nvSpPr>
+        <p:spPr>
+          <a:xfrm>
+            <a:off x="1344168" y="3848608"/>
+            <a:ext cx="10097719" cy="374396"/>
+          </a:xfrm>
+          <a:prstGeom prst="rect">
+            <a:avLst/>
+          </a:prstGeom>
+          <a:noFill/>
+        </p:spPr>
+        <p:txBody>
+          <a:bodyPr wrap="square" lIns="0" rIns="0" tIns="0" bIns="0" anchor="t">
+            <a:spAutoFit/>
+          </a:bodyPr>
+          <a:lstStyle/>
+          <a:p>
+            <a:pPr algn="l">
+              <a:lnSpc>
+                <a:spcPct val="140000"/>
+              </a:lnSpc>
+            </a:pPr>
+            <a:r>
+              <a:rPr sz="1900" b="0" i="0">
+                <a:solidFill>
+                  <a:srgbClr val="3A3D40"/>
+                </a:solidFill>
+                <a:latin typeface="Verdana"/>
+              </a:rPr>
+              <a:t>Le bail commence au mois de septembre.</a:t>
+            </a:r>
+          </a:p>
+        </p:txBody>
+      </p:sp>
+    </p:spTree>
+  </p:cSld>
+  <p:clrMapOvr>
+    <a:masterClrMapping/>
+  </p:clrMapOvr>
+</p:sld>
+</file>
+
+<file path=ppt/slides/slide24.xml><?xml version="1.0" encoding="utf-8"?>
+<p:sld xmlns:a="http://schemas.openxmlformats.org/drawingml/2006/main" xmlns:p="http://schemas.openxmlformats.org/presentationml/2006/main" xmlns:r="http://schemas.openxmlformats.org/officeDocument/2006/relationships">
+  <p:cSld>
+    <p:spTree>
+      <p:nvGrpSpPr>
+        <p:cNvPr id="1" name=""/>
+        <p:cNvGrpSpPr/>
+        <p:nvPr/>
+      </p:nvGrpSpPr>
+      <p:grpSpPr/>
+      <p:sp>
+        <p:nvSpPr>
+          <p:cNvPr id="2" name="Rectangle 1"/>
+          <p:cNvSpPr/>
+          <p:nvPr/>
+        </p:nvSpPr>
+        <p:spPr>
+          <a:xfrm>
+            <a:off x="0" y="0"/>
+            <a:ext cx="12191695" cy="6858000"/>
+          </a:xfrm>
+          <a:prstGeom prst="rect">
+            <a:avLst/>
+          </a:prstGeom>
+          <a:solidFill>
+            <a:srgbClr val="F7F7F5"/>
+          </a:solidFill>
+          <a:ln>
+            <a:noFill/>
+          </a:ln>
+          <a:effectLst/>
+        </p:spPr>
+        <p:style>
+          <a:lnRef idx="1">
+            <a:schemeClr val="accent1"/>
+          </a:lnRef>
+          <a:fillRef idx="3">
+            <a:schemeClr val="accent1"/>
+          </a:fillRef>
+          <a:effectRef idx="2">
+            <a:schemeClr val="accent1"/>
+          </a:effectRef>
+          <a:fontRef idx="minor">
+            <a:schemeClr val="lt1"/>
+          </a:fontRef>
+        </p:style>
+        <p:txBody>
+          <a:bodyPr rtlCol="0" anchor="ctr"/>
+          <a:lstStyle/>
+          <a:p/>
+        </p:txBody>
+      </p:sp>
+      <p:sp>
+        <p:nvSpPr>
+          <p:cNvPr id="3" name="TextBox 2"/>
+          <p:cNvSpPr txBox="1"/>
+          <p:nvPr/>
+        </p:nvSpPr>
+        <p:spPr>
+          <a:xfrm>
+            <a:off x="566928" y="6355080"/>
+            <a:ext cx="6400800" cy="219456"/>
+          </a:xfrm>
+          <a:prstGeom prst="rect">
+            <a:avLst/>
+          </a:prstGeom>
+          <a:noFill/>
+        </p:spPr>
+        <p:txBody>
+          <a:bodyPr wrap="square" lIns="0" rIns="0" tIns="0" bIns="0" anchor="t">
+            <a:spAutoFit/>
+          </a:bodyPr>
+          <a:lstStyle/>
+          <a:p>
+            <a:pPr algn="l">
+              <a:lnSpc>
+                <a:spcPct val="135000"/>
+              </a:lnSpc>
+            </a:pPr>
+            <a:r>
+              <a:rPr sz="1200" b="0" i="0">
+                <a:solidFill>
+                  <a:srgbClr val="6E7175"/>
+                </a:solidFill>
+                <a:latin typeface="Verdana"/>
+              </a:rPr>
+              <a:t>A2 · Comment est le logement ?</a:t>
+            </a:r>
+          </a:p>
+        </p:txBody>
+      </p:sp>
+      <p:sp>
+        <p:nvSpPr>
+          <p:cNvPr id="4" name="TextBox 3"/>
+          <p:cNvSpPr txBox="1"/>
+          <p:nvPr/>
+        </p:nvSpPr>
+        <p:spPr>
+          <a:xfrm>
+            <a:off x="10710367" y="6355080"/>
+            <a:ext cx="914400" cy="219456"/>
+          </a:xfrm>
+          <a:prstGeom prst="rect">
+            <a:avLst/>
+          </a:prstGeom>
+          <a:noFill/>
+        </p:spPr>
+        <p:txBody>
+          <a:bodyPr wrap="square" lIns="0" rIns="0" tIns="0" bIns="0" anchor="t">
+            <a:spAutoFit/>
+          </a:bodyPr>
+          <a:lstStyle/>
+          <a:p>
+            <a:pPr algn="r">
+              <a:lnSpc>
+                <a:spcPct val="135000"/>
+              </a:lnSpc>
+            </a:pPr>
+            <a:r>
+              <a:rPr sz="1200" b="0" i="0">
+                <a:solidFill>
+                  <a:srgbClr val="6E7175"/>
+                </a:solidFill>
+                <a:latin typeface="Verdana"/>
+              </a:rPr>
+              <a:t>24</a:t>
+            </a:r>
+          </a:p>
+        </p:txBody>
+      </p:sp>
+      <p:sp>
+        <p:nvSpPr>
+          <p:cNvPr id="5" name="TextBox 4"/>
+          <p:cNvSpPr txBox="1"/>
+          <p:nvPr/>
+        </p:nvSpPr>
+        <p:spPr>
+          <a:xfrm>
+            <a:off x="566928" y="420624"/>
+            <a:ext cx="11057839" cy="237744"/>
+          </a:xfrm>
+          <a:prstGeom prst="rect">
+            <a:avLst/>
+          </a:prstGeom>
+          <a:noFill/>
+        </p:spPr>
+        <p:txBody>
+          <a:bodyPr wrap="square" lIns="0" rIns="0" tIns="0" bIns="0" anchor="t">
+            <a:spAutoFit/>
+          </a:bodyPr>
+          <a:lstStyle/>
+          <a:p>
+            <a:pPr algn="l">
+              <a:lnSpc>
+                <a:spcPct val="135000"/>
+              </a:lnSpc>
+            </a:pPr>
+            <a:r>
+              <a:rPr sz="1300" b="1" i="0" spc="156">
+                <a:solidFill>
+                  <a:srgbClr val="166534"/>
+                </a:solidFill>
+                <a:latin typeface="Verdana"/>
+              </a:rPr>
+              <a:t>CORRECTION</a:t>
+            </a:r>
+          </a:p>
+        </p:txBody>
+      </p:sp>
+      <p:sp>
+        <p:nvSpPr>
+          <p:cNvPr id="6" name="TextBox 5"/>
+          <p:cNvSpPr txBox="1"/>
+          <p:nvPr/>
+        </p:nvSpPr>
+        <p:spPr>
+          <a:xfrm>
+            <a:off x="566928" y="749808"/>
+            <a:ext cx="11057839" cy="877824"/>
+          </a:xfrm>
+          <a:prstGeom prst="rect">
+            <a:avLst/>
+          </a:prstGeom>
+          <a:noFill/>
+        </p:spPr>
+        <p:txBody>
+          <a:bodyPr wrap="square" lIns="0" rIns="0" tIns="0" bIns="0" anchor="t">
+            <a:spAutoFit/>
+          </a:bodyPr>
+          <a:lstStyle/>
+          <a:p>
+            <a:pPr algn="l">
+              <a:lnSpc>
+                <a:spcPct val="115000"/>
+              </a:lnSpc>
+            </a:pPr>
+            <a:r>
+              <a:rPr sz="3400" b="1" i="0">
+                <a:solidFill>
+                  <a:srgbClr val="17181A"/>
+                </a:solidFill>
+                <a:latin typeface="Verdana"/>
+              </a:rPr>
+              <a:t>Trois phrases de visite à lire à voix haute</a:t>
+            </a:r>
+          </a:p>
+        </p:txBody>
+      </p:sp>
+      <p:sp>
+        <p:nvSpPr>
+          <p:cNvPr id="7" name="TextBox 6"/>
+          <p:cNvSpPr txBox="1"/>
+          <p:nvPr/>
+        </p:nvSpPr>
+        <p:spPr>
+          <a:xfrm>
+            <a:off x="566928" y="1645920"/>
+            <a:ext cx="11057839" cy="329184"/>
+          </a:xfrm>
+          <a:prstGeom prst="rect">
+            <a:avLst/>
+          </a:prstGeom>
+          <a:noFill/>
+        </p:spPr>
+        <p:txBody>
+          <a:bodyPr wrap="square" lIns="0" rIns="0" tIns="0" bIns="0" anchor="t">
+            <a:spAutoFit/>
+          </a:bodyPr>
+          <a:lstStyle/>
+          <a:p>
+            <a:pPr algn="l">
+              <a:lnSpc>
+                <a:spcPct val="135000"/>
+              </a:lnSpc>
+            </a:pPr>
+            <a:r>
+              <a:rPr sz="1800" b="0" i="0">
+                <a:solidFill>
+                  <a:srgbClr val="6E7175"/>
+                </a:solidFill>
+                <a:latin typeface="Verdana"/>
+              </a:rPr>
+              <a:t>Correction — on lit la réponse, on ne commente pas l'erreur.</a:t>
+            </a:r>
+          </a:p>
+        </p:txBody>
+      </p:sp>
+      <p:sp>
+        <p:nvSpPr>
+          <p:cNvPr id="8" name="Rounded Rectangle 7"/>
+          <p:cNvSpPr/>
+          <p:nvPr/>
+        </p:nvSpPr>
+        <p:spPr>
+          <a:xfrm>
+            <a:off x="566928" y="2139696"/>
+            <a:ext cx="11057839" cy="648716"/>
+          </a:xfrm>
+          <a:prstGeom prst="roundRect">
+            <a:avLst>
+              <a:gd name="adj" fmla="val 22552"/>
+            </a:avLst>
+          </a:prstGeom>
+          <a:solidFill>
+            <a:srgbClr val="E6F5EE"/>
+          </a:solidFill>
+          <a:ln w="12700">
+            <a:solidFill>
+              <a:srgbClr val="EAEAE8"/>
+            </a:solidFill>
+          </a:ln>
+          <a:effectLst/>
+        </p:spPr>
+        <p:style>
+          <a:lnRef idx="1">
+            <a:schemeClr val="accent1"/>
+          </a:lnRef>
+          <a:fillRef idx="3">
+            <a:schemeClr val="accent1"/>
+          </a:fillRef>
+          <a:effectRef idx="2">
+            <a:schemeClr val="accent1"/>
+          </a:effectRef>
+          <a:fontRef idx="minor">
+            <a:schemeClr val="lt1"/>
+          </a:fontRef>
+        </p:style>
+        <p:txBody>
+          <a:bodyPr rtlCol="0" anchor="ctr"/>
+          <a:lstStyle/>
+          <a:p/>
+        </p:txBody>
+      </p:sp>
+      <p:sp>
+        <p:nvSpPr>
+          <p:cNvPr id="9" name="Rounded Rectangle 8"/>
+          <p:cNvSpPr/>
+          <p:nvPr/>
+        </p:nvSpPr>
+        <p:spPr>
+          <a:xfrm>
+            <a:off x="841247" y="2281174"/>
+            <a:ext cx="365760" cy="365760"/>
+          </a:xfrm>
+          <a:prstGeom prst="roundRect">
+            <a:avLst>
+              <a:gd name="adj" fmla="val 32500"/>
+            </a:avLst>
+          </a:prstGeom>
+          <a:solidFill>
+            <a:srgbClr val="E3F1E7"/>
+          </a:solidFill>
+          <a:ln>
+            <a:noFill/>
+          </a:ln>
+          <a:effectLst/>
+        </p:spPr>
+        <p:style>
+          <a:lnRef idx="1">
+            <a:schemeClr val="accent1"/>
+          </a:lnRef>
+          <a:fillRef idx="3">
+            <a:schemeClr val="accent1"/>
+          </a:fillRef>
+          <a:effectRef idx="2">
+            <a:schemeClr val="accent1"/>
+          </a:effectRef>
+          <a:fontRef idx="minor">
+            <a:schemeClr val="lt1"/>
+          </a:fontRef>
+        </p:style>
+        <p:txBody>
+          <a:bodyPr rtlCol="0" anchor="ctr"/>
+          <a:lstStyle/>
+          <a:p/>
+        </p:txBody>
+      </p:sp>
+      <p:sp>
+        <p:nvSpPr>
+          <p:cNvPr id="10" name="TextBox 9"/>
+          <p:cNvSpPr txBox="1"/>
+          <p:nvPr/>
+        </p:nvSpPr>
+        <p:spPr>
+          <a:xfrm>
+            <a:off x="841247" y="2345182"/>
+            <a:ext cx="365760" cy="256032"/>
+          </a:xfrm>
+          <a:prstGeom prst="rect">
+            <a:avLst/>
+          </a:prstGeom>
+          <a:noFill/>
+        </p:spPr>
+        <p:txBody>
+          <a:bodyPr wrap="square" lIns="0" rIns="0" tIns="0" bIns="0" anchor="t">
+            <a:spAutoFit/>
+          </a:bodyPr>
+          <a:lstStyle/>
+          <a:p>
+            <a:pPr algn="ctr">
+              <a:lnSpc>
+                <a:spcPct val="135000"/>
+              </a:lnSpc>
+            </a:pPr>
+            <a:r>
+              <a:rPr sz="1500" b="1" i="0">
+                <a:solidFill>
+                  <a:srgbClr val="166534"/>
+                </a:solidFill>
+                <a:latin typeface="Verdana"/>
+              </a:rPr>
+              <a:t>1</a:t>
+            </a:r>
+          </a:p>
+        </p:txBody>
+      </p:sp>
+      <p:sp>
+        <p:nvSpPr>
+          <p:cNvPr id="11" name="TextBox 10"/>
+          <p:cNvSpPr txBox="1"/>
+          <p:nvPr/>
+        </p:nvSpPr>
+        <p:spPr>
+          <a:xfrm>
+            <a:off x="1344168" y="2295144"/>
+            <a:ext cx="10097719" cy="374396"/>
+          </a:xfrm>
+          <a:prstGeom prst="rect">
+            <a:avLst/>
+          </a:prstGeom>
+          <a:noFill/>
+        </p:spPr>
+        <p:txBody>
+          <a:bodyPr wrap="square" lIns="0" rIns="0" tIns="0" bIns="0" anchor="t">
+            <a:spAutoFit/>
+          </a:bodyPr>
+          <a:lstStyle/>
+          <a:p>
+            <a:pPr algn="l">
+              <a:lnSpc>
+                <a:spcPct val="140000"/>
+              </a:lnSpc>
+            </a:pPr>
+            <a:r>
+              <a:rPr sz="1900" b="0" i="0">
+                <a:solidFill>
+                  <a:srgbClr val="3A3D40"/>
+                </a:solidFill>
+                <a:latin typeface="Verdana"/>
+              </a:rPr>
+              <a:t>Le logement a une chambre et un grand salon.   </a:t>
+            </a:r>
+            <a:r>
+              <a:rPr sz="1900" b="1" i="0">
+                <a:solidFill>
+                  <a:srgbClr val="07734A"/>
+                </a:solidFill>
+                <a:latin typeface="Verdana"/>
+              </a:rPr>
+              <a:t>» an · an · on</a:t>
+            </a:r>
+          </a:p>
+        </p:txBody>
+      </p:sp>
+      <p:sp>
+        <p:nvSpPr>
+          <p:cNvPr id="12" name="Rounded Rectangle 11"/>
+          <p:cNvSpPr/>
+          <p:nvPr/>
+        </p:nvSpPr>
+        <p:spPr>
+          <a:xfrm>
+            <a:off x="566928" y="2916428"/>
+            <a:ext cx="11057839" cy="648716"/>
+          </a:xfrm>
+          <a:prstGeom prst="roundRect">
+            <a:avLst>
+              <a:gd name="adj" fmla="val 22552"/>
+            </a:avLst>
+          </a:prstGeom>
+          <a:solidFill>
+            <a:srgbClr val="E6F5EE"/>
+          </a:solidFill>
+          <a:ln w="12700">
+            <a:solidFill>
+              <a:srgbClr val="EAEAE8"/>
+            </a:solidFill>
+          </a:ln>
+          <a:effectLst/>
+        </p:spPr>
+        <p:style>
+          <a:lnRef idx="1">
+            <a:schemeClr val="accent1"/>
+          </a:lnRef>
+          <a:fillRef idx="3">
+            <a:schemeClr val="accent1"/>
+          </a:fillRef>
+          <a:effectRef idx="2">
+            <a:schemeClr val="accent1"/>
+          </a:effectRef>
+          <a:fontRef idx="minor">
+            <a:schemeClr val="lt1"/>
+          </a:fontRef>
+        </p:style>
+        <p:txBody>
+          <a:bodyPr rtlCol="0" anchor="ctr"/>
+          <a:lstStyle/>
+          <a:p/>
+        </p:txBody>
+      </p:sp>
+      <p:sp>
+        <p:nvSpPr>
+          <p:cNvPr id="13" name="Rounded Rectangle 12"/>
+          <p:cNvSpPr/>
+          <p:nvPr/>
+        </p:nvSpPr>
+        <p:spPr>
+          <a:xfrm>
+            <a:off x="841247" y="3057905"/>
+            <a:ext cx="365760" cy="365760"/>
+          </a:xfrm>
+          <a:prstGeom prst="roundRect">
+            <a:avLst>
+              <a:gd name="adj" fmla="val 32500"/>
+            </a:avLst>
+          </a:prstGeom>
+          <a:solidFill>
+            <a:srgbClr val="E3F1E7"/>
+          </a:solidFill>
+          <a:ln>
+            <a:noFill/>
+          </a:ln>
+          <a:effectLst/>
+        </p:spPr>
+        <p:style>
+          <a:lnRef idx="1">
+            <a:schemeClr val="accent1"/>
+          </a:lnRef>
+          <a:fillRef idx="3">
+            <a:schemeClr val="accent1"/>
+          </a:fillRef>
+          <a:effectRef idx="2">
+            <a:schemeClr val="accent1"/>
+          </a:effectRef>
+          <a:fontRef idx="minor">
+            <a:schemeClr val="lt1"/>
+          </a:fontRef>
+        </p:style>
+        <p:txBody>
+          <a:bodyPr rtlCol="0" anchor="ctr"/>
+          <a:lstStyle/>
+          <a:p/>
+        </p:txBody>
+      </p:sp>
+      <p:sp>
+        <p:nvSpPr>
+          <p:cNvPr id="14" name="TextBox 13"/>
+          <p:cNvSpPr txBox="1"/>
+          <p:nvPr/>
+        </p:nvSpPr>
+        <p:spPr>
+          <a:xfrm>
+            <a:off x="841247" y="3121913"/>
+            <a:ext cx="365760" cy="256032"/>
+          </a:xfrm>
+          <a:prstGeom prst="rect">
+            <a:avLst/>
+          </a:prstGeom>
+          <a:noFill/>
+        </p:spPr>
+        <p:txBody>
+          <a:bodyPr wrap="square" lIns="0" rIns="0" tIns="0" bIns="0" anchor="t">
+            <a:spAutoFit/>
+          </a:bodyPr>
+          <a:lstStyle/>
+          <a:p>
+            <a:pPr algn="ctr">
+              <a:lnSpc>
+                <a:spcPct val="135000"/>
+              </a:lnSpc>
+            </a:pPr>
+            <a:r>
+              <a:rPr sz="1500" b="1" i="0">
+                <a:solidFill>
+                  <a:srgbClr val="166534"/>
+                </a:solidFill>
+                <a:latin typeface="Verdana"/>
+              </a:rPr>
+              <a:t>2</a:t>
+            </a:r>
+          </a:p>
+        </p:txBody>
+      </p:sp>
+      <p:sp>
+        <p:nvSpPr>
+          <p:cNvPr id="15" name="TextBox 14"/>
+          <p:cNvSpPr txBox="1"/>
+          <p:nvPr/>
+        </p:nvSpPr>
+        <p:spPr>
+          <a:xfrm>
+            <a:off x="1344168" y="3071876"/>
+            <a:ext cx="10097719" cy="374396"/>
+          </a:xfrm>
+          <a:prstGeom prst="rect">
+            <a:avLst/>
+          </a:prstGeom>
+          <a:noFill/>
+        </p:spPr>
+        <p:txBody>
+          <a:bodyPr wrap="square" lIns="0" rIns="0" tIns="0" bIns="0" anchor="t">
+            <a:spAutoFit/>
+          </a:bodyPr>
+          <a:lstStyle/>
+          <a:p>
+            <a:pPr algn="l">
+              <a:lnSpc>
+                <a:spcPct val="140000"/>
+              </a:lnSpc>
+            </a:pPr>
+            <a:r>
+              <a:rPr sz="1900" b="0" i="0">
+                <a:solidFill>
+                  <a:srgbClr val="3A3D40"/>
+                </a:solidFill>
+                <a:latin typeface="Verdana"/>
+              </a:rPr>
+              <a:t>La buanderie est au sous-sol de la maison.   </a:t>
+            </a:r>
+            <a:r>
+              <a:rPr sz="1900" b="1" i="0">
+                <a:solidFill>
+                  <a:srgbClr val="07734A"/>
+                </a:solidFill>
+                <a:latin typeface="Verdana"/>
+              </a:rPr>
+              <a:t>» an · on</a:t>
+            </a:r>
+          </a:p>
+        </p:txBody>
+      </p:sp>
+      <p:sp>
+        <p:nvSpPr>
+          <p:cNvPr id="16" name="Rounded Rectangle 15"/>
+          <p:cNvSpPr/>
+          <p:nvPr/>
+        </p:nvSpPr>
+        <p:spPr>
+          <a:xfrm>
+            <a:off x="566928" y="3693160"/>
+            <a:ext cx="11057839" cy="648716"/>
+          </a:xfrm>
+          <a:prstGeom prst="roundRect">
+            <a:avLst>
+              <a:gd name="adj" fmla="val 22552"/>
+            </a:avLst>
+          </a:prstGeom>
+          <a:solidFill>
+            <a:srgbClr val="E6F5EE"/>
+          </a:solidFill>
+          <a:ln w="12700">
+            <a:solidFill>
+              <a:srgbClr val="EAEAE8"/>
+            </a:solidFill>
+          </a:ln>
+          <a:effectLst/>
+        </p:spPr>
+        <p:style>
+          <a:lnRef idx="1">
+            <a:schemeClr val="accent1"/>
+          </a:lnRef>
+          <a:fillRef idx="3">
+            <a:schemeClr val="accent1"/>
+          </a:fillRef>
+          <a:effectRef idx="2">
+            <a:schemeClr val="accent1"/>
+          </a:effectRef>
+          <a:fontRef idx="minor">
+            <a:schemeClr val="lt1"/>
+          </a:fontRef>
+        </p:style>
+        <p:txBody>
+          <a:bodyPr rtlCol="0" anchor="ctr"/>
+          <a:lstStyle/>
+          <a:p/>
+        </p:txBody>
+      </p:sp>
+      <p:sp>
+        <p:nvSpPr>
+          <p:cNvPr id="17" name="Rounded Rectangle 16"/>
+          <p:cNvSpPr/>
+          <p:nvPr/>
+        </p:nvSpPr>
+        <p:spPr>
+          <a:xfrm>
+            <a:off x="841247" y="3834638"/>
+            <a:ext cx="365760" cy="365760"/>
+          </a:xfrm>
+          <a:prstGeom prst="roundRect">
+            <a:avLst>
+              <a:gd name="adj" fmla="val 32500"/>
+            </a:avLst>
+          </a:prstGeom>
+          <a:solidFill>
+            <a:srgbClr val="E3F1E7"/>
+          </a:solidFill>
+          <a:ln>
+            <a:noFill/>
+          </a:ln>
+          <a:effectLst/>
+        </p:spPr>
+        <p:style>
+          <a:lnRef idx="1">
+            <a:schemeClr val="accent1"/>
+          </a:lnRef>
+          <a:fillRef idx="3">
+            <a:schemeClr val="accent1"/>
+          </a:fillRef>
+          <a:effectRef idx="2">
+            <a:schemeClr val="accent1"/>
+          </a:effectRef>
+          <a:fontRef idx="minor">
+            <a:schemeClr val="lt1"/>
+          </a:fontRef>
+        </p:style>
+        <p:txBody>
+          <a:bodyPr rtlCol="0" anchor="ctr"/>
+          <a:lstStyle/>
+          <a:p/>
+        </p:txBody>
+      </p:sp>
+      <p:sp>
+        <p:nvSpPr>
+          <p:cNvPr id="18" name="TextBox 17"/>
+          <p:cNvSpPr txBox="1"/>
+          <p:nvPr/>
+        </p:nvSpPr>
+        <p:spPr>
+          <a:xfrm>
+            <a:off x="841247" y="3898646"/>
+            <a:ext cx="365760" cy="256032"/>
+          </a:xfrm>
+          <a:prstGeom prst="rect">
+            <a:avLst/>
+          </a:prstGeom>
+          <a:noFill/>
+        </p:spPr>
+        <p:txBody>
+          <a:bodyPr wrap="square" lIns="0" rIns="0" tIns="0" bIns="0" anchor="t">
+            <a:spAutoFit/>
+          </a:bodyPr>
+          <a:lstStyle/>
+          <a:p>
+            <a:pPr algn="ctr">
+              <a:lnSpc>
+                <a:spcPct val="135000"/>
+              </a:lnSpc>
+            </a:pPr>
+            <a:r>
+              <a:rPr sz="1500" b="1" i="0">
+                <a:solidFill>
+                  <a:srgbClr val="166534"/>
+                </a:solidFill>
+                <a:latin typeface="Verdana"/>
+              </a:rPr>
+              <a:t>3</a:t>
+            </a:r>
+          </a:p>
+        </p:txBody>
+      </p:sp>
+      <p:sp>
+        <p:nvSpPr>
+          <p:cNvPr id="19" name="TextBox 18"/>
+          <p:cNvSpPr txBox="1"/>
+          <p:nvPr/>
+        </p:nvSpPr>
+        <p:spPr>
+          <a:xfrm>
+            <a:off x="1344168" y="3848608"/>
+            <a:ext cx="10097719" cy="374396"/>
+          </a:xfrm>
+          <a:prstGeom prst="rect">
+            <a:avLst/>
+          </a:prstGeom>
+          <a:noFill/>
+        </p:spPr>
+        <p:txBody>
+          <a:bodyPr wrap="square" lIns="0" rIns="0" tIns="0" bIns="0" anchor="t">
+            <a:spAutoFit/>
+          </a:bodyPr>
+          <a:lstStyle/>
+          <a:p>
+            <a:pPr algn="l">
+              <a:lnSpc>
+                <a:spcPct val="140000"/>
+              </a:lnSpc>
+            </a:pPr>
+            <a:r>
+              <a:rPr sz="1900" b="0" i="0">
+                <a:solidFill>
+                  <a:srgbClr val="3A3D40"/>
+                </a:solidFill>
+                <a:latin typeface="Verdana"/>
+              </a:rPr>
+              <a:t>Le bail commence au mois de septembre.   </a:t>
+            </a:r>
+            <a:r>
+              <a:rPr sz="1900" b="1" i="0">
+                <a:solidFill>
+                  <a:srgbClr val="07734A"/>
+                </a:solidFill>
+                <a:latin typeface="Verdana"/>
+              </a:rPr>
+              <a:t>» on · an</a:t>
+            </a:r>
+          </a:p>
+        </p:txBody>
+      </p:sp>
+    </p:spTree>
+  </p:cSld>
+  <p:clrMapOvr>
+    <a:masterClrMapping/>
+  </p:clrMapOvr>
+</p:sld>
+</file>
+
+<file path=ppt/slides/slide25.xml><?xml version="1.0" encoding="utf-8"?>
+<p:sld xmlns:a="http://schemas.openxmlformats.org/drawingml/2006/main" xmlns:p="http://schemas.openxmlformats.org/presentationml/2006/main" xmlns:r="http://schemas.openxmlformats.org/officeDocument/2006/relationships">
+  <p:cSld>
+    <p:spTree>
+      <p:nvGrpSpPr>
+        <p:cNvPr id="1" name=""/>
+        <p:cNvGrpSpPr/>
+        <p:nvPr/>
+      </p:nvGrpSpPr>
+      <p:grpSpPr/>
+      <p:sp>
+        <p:nvSpPr>
+          <p:cNvPr id="2" name="Rectangle 1"/>
+          <p:cNvSpPr/>
+          <p:nvPr/>
+        </p:nvSpPr>
+        <p:spPr>
+          <a:xfrm>
+            <a:off x="0" y="0"/>
+            <a:ext cx="12191695" cy="6858000"/>
+          </a:xfrm>
+          <a:prstGeom prst="rect">
+            <a:avLst/>
+          </a:prstGeom>
+          <a:solidFill>
+            <a:srgbClr val="F7F7F5"/>
+          </a:solidFill>
+          <a:ln>
+            <a:noFill/>
+          </a:ln>
+          <a:effectLst/>
+        </p:spPr>
+        <p:style>
+          <a:lnRef idx="1">
+            <a:schemeClr val="accent1"/>
+          </a:lnRef>
+          <a:fillRef idx="3">
+            <a:schemeClr val="accent1"/>
+          </a:fillRef>
+          <a:effectRef idx="2">
+            <a:schemeClr val="accent1"/>
+          </a:effectRef>
+          <a:fontRef idx="minor">
+            <a:schemeClr val="lt1"/>
+          </a:fontRef>
+        </p:style>
+        <p:txBody>
+          <a:bodyPr rtlCol="0" anchor="ctr"/>
+          <a:lstStyle/>
+          <a:p/>
+        </p:txBody>
+      </p:sp>
+      <p:sp>
+        <p:nvSpPr>
+          <p:cNvPr id="3" name="TextBox 2"/>
+          <p:cNvSpPr txBox="1"/>
+          <p:nvPr/>
+        </p:nvSpPr>
+        <p:spPr>
+          <a:xfrm>
+            <a:off x="566928" y="6355080"/>
+            <a:ext cx="6400800" cy="219456"/>
+          </a:xfrm>
+          <a:prstGeom prst="rect">
+            <a:avLst/>
+          </a:prstGeom>
+          <a:noFill/>
+        </p:spPr>
+        <p:txBody>
+          <a:bodyPr wrap="square" lIns="0" rIns="0" tIns="0" bIns="0" anchor="t">
+            <a:spAutoFit/>
+          </a:bodyPr>
+          <a:lstStyle/>
+          <a:p>
+            <a:pPr algn="l">
+              <a:lnSpc>
+                <a:spcPct val="135000"/>
+              </a:lnSpc>
+            </a:pPr>
+            <a:r>
+              <a:rPr sz="1200" b="0" i="0">
+                <a:solidFill>
+                  <a:srgbClr val="6E7175"/>
+                </a:solidFill>
+                <a:latin typeface="Verdana"/>
+              </a:rPr>
+              <a:t>A2 · Comment est le logement ?</a:t>
+            </a:r>
+          </a:p>
+        </p:txBody>
+      </p:sp>
+      <p:sp>
+        <p:nvSpPr>
+          <p:cNvPr id="4" name="TextBox 3"/>
+          <p:cNvSpPr txBox="1"/>
+          <p:nvPr/>
+        </p:nvSpPr>
+        <p:spPr>
+          <a:xfrm>
+            <a:off x="10710367" y="6355080"/>
+            <a:ext cx="914400" cy="219456"/>
+          </a:xfrm>
+          <a:prstGeom prst="rect">
+            <a:avLst/>
+          </a:prstGeom>
+          <a:noFill/>
+        </p:spPr>
+        <p:txBody>
+          <a:bodyPr wrap="square" lIns="0" rIns="0" tIns="0" bIns="0" anchor="t">
+            <a:spAutoFit/>
+          </a:bodyPr>
+          <a:lstStyle/>
+          <a:p>
+            <a:pPr algn="r">
+              <a:lnSpc>
+                <a:spcPct val="135000"/>
+              </a:lnSpc>
+            </a:pPr>
+            <a:r>
+              <a:rPr sz="1200" b="0" i="0">
+                <a:solidFill>
+                  <a:srgbClr val="6E7175"/>
+                </a:solidFill>
+                <a:latin typeface="Verdana"/>
+              </a:rPr>
+              <a:t>25</a:t>
+            </a:r>
+          </a:p>
+        </p:txBody>
+      </p:sp>
+      <p:sp>
+        <p:nvSpPr>
+          <p:cNvPr id="5" name="Rectangle 4"/>
+          <p:cNvSpPr/>
+          <p:nvPr/>
+        </p:nvSpPr>
+        <p:spPr>
+          <a:xfrm>
+            <a:off x="0" y="0"/>
+            <a:ext cx="12191695" cy="6858000"/>
+          </a:xfrm>
+          <a:prstGeom prst="rect">
+            <a:avLst/>
+          </a:prstGeom>
+          <a:solidFill>
+            <a:srgbClr val="17181A"/>
+          </a:solidFill>
+          <a:ln>
+            <a:noFill/>
+          </a:ln>
+          <a:effectLst/>
+        </p:spPr>
+        <p:style>
+          <a:lnRef idx="1">
+            <a:schemeClr val="accent1"/>
+          </a:lnRef>
+          <a:fillRef idx="3">
+            <a:schemeClr val="accent1"/>
+          </a:fillRef>
+          <a:effectRef idx="2">
+            <a:schemeClr val="accent1"/>
+          </a:effectRef>
+          <a:fontRef idx="minor">
+            <a:schemeClr val="lt1"/>
+          </a:fontRef>
+        </p:style>
+        <p:txBody>
+          <a:bodyPr rtlCol="0" anchor="ctr"/>
+          <a:lstStyle/>
+          <a:p/>
+        </p:txBody>
+      </p:sp>
+      <p:sp>
+        <p:nvSpPr>
+          <p:cNvPr id="6" name="TextBox 5"/>
+          <p:cNvSpPr txBox="1"/>
+          <p:nvPr/>
+        </p:nvSpPr>
+        <p:spPr>
+          <a:xfrm>
+            <a:off x="566928" y="1051560"/>
+            <a:ext cx="11057839" cy="274320"/>
+          </a:xfrm>
+          <a:prstGeom prst="rect">
+            <a:avLst/>
+          </a:prstGeom>
+          <a:noFill/>
+        </p:spPr>
+        <p:txBody>
+          <a:bodyPr wrap="square" lIns="0" rIns="0" tIns="0" bIns="0" anchor="t">
+            <a:spAutoFit/>
+          </a:bodyPr>
+          <a:lstStyle/>
+          <a:p>
+            <a:pPr algn="l">
+              <a:lnSpc>
+                <a:spcPct val="135000"/>
+              </a:lnSpc>
+            </a:pPr>
+            <a:r>
+              <a:rPr sz="1300" b="1" i="0" spc="156">
+                <a:solidFill>
+                  <a:srgbClr val="FFFFFF"/>
+                </a:solidFill>
+                <a:latin typeface="Verdana"/>
+              </a:rPr>
+              <a:t>BILLET DE SORTIE</a:t>
+            </a:r>
+          </a:p>
+        </p:txBody>
+      </p:sp>
+      <p:sp>
+        <p:nvSpPr>
+          <p:cNvPr id="7" name="TextBox 6"/>
+          <p:cNvSpPr txBox="1"/>
+          <p:nvPr/>
+        </p:nvSpPr>
+        <p:spPr>
+          <a:xfrm>
+            <a:off x="566928" y="1572768"/>
+            <a:ext cx="9777679" cy="2103120"/>
+          </a:xfrm>
+          <a:prstGeom prst="rect">
+            <a:avLst/>
+          </a:prstGeom>
+          <a:noFill/>
+        </p:spPr>
+        <p:txBody>
+          <a:bodyPr wrap="square" lIns="0" rIns="0" tIns="0" bIns="0" anchor="t">
+            <a:spAutoFit/>
+          </a:bodyPr>
+          <a:lstStyle/>
+          <a:p>
+            <a:pPr algn="l">
+              <a:lnSpc>
+                <a:spcPct val="125000"/>
+              </a:lnSpc>
+            </a:pPr>
+            <a:r>
+              <a:rPr sz="3400" b="1" i="0">
+                <a:solidFill>
+                  <a:srgbClr val="FFFFFF"/>
+                </a:solidFill>
+                <a:latin typeface="Verdana"/>
+              </a:rPr>
+              <a:t>Décodez une annonce de logement en quatre lignes.</a:t>
+            </a:r>
+          </a:p>
+        </p:txBody>
+      </p:sp>
+      <p:sp>
+        <p:nvSpPr>
+          <p:cNvPr id="8" name="Rounded Rectangle 7"/>
+          <p:cNvSpPr/>
+          <p:nvPr/>
+        </p:nvSpPr>
+        <p:spPr>
+          <a:xfrm>
+            <a:off x="566928" y="3931920"/>
+            <a:ext cx="11057839" cy="1022096"/>
+          </a:xfrm>
+          <a:prstGeom prst="roundRect">
+            <a:avLst>
+              <a:gd name="adj" fmla="val 8946"/>
+            </a:avLst>
+          </a:prstGeom>
+          <a:solidFill>
+            <a:srgbClr val="2A2C2F"/>
+          </a:solidFill>
+          <a:ln>
+            <a:noFill/>
+          </a:ln>
+          <a:effectLst/>
+        </p:spPr>
+        <p:style>
+          <a:lnRef idx="1">
+            <a:schemeClr val="accent1"/>
+          </a:lnRef>
+          <a:fillRef idx="3">
+            <a:schemeClr val="accent1"/>
+          </a:fillRef>
+          <a:effectRef idx="2">
+            <a:schemeClr val="accent1"/>
+          </a:effectRef>
+          <a:fontRef idx="minor">
+            <a:schemeClr val="lt1"/>
+          </a:fontRef>
+        </p:style>
+        <p:txBody>
+          <a:bodyPr rtlCol="0" anchor="ctr"/>
+          <a:lstStyle/>
+          <a:p/>
+        </p:txBody>
+      </p:sp>
+      <p:sp>
+        <p:nvSpPr>
+          <p:cNvPr id="9" name="TextBox 8"/>
+          <p:cNvSpPr txBox="1"/>
+          <p:nvPr/>
+        </p:nvSpPr>
+        <p:spPr>
+          <a:xfrm>
+            <a:off x="932688" y="4087368"/>
+            <a:ext cx="10051999" cy="747776"/>
+          </a:xfrm>
+          <a:prstGeom prst="rect">
+            <a:avLst/>
+          </a:prstGeom>
+          <a:noFill/>
+        </p:spPr>
+        <p:txBody>
+          <a:bodyPr wrap="square" lIns="0" rIns="0" tIns="0" bIns="0" anchor="t">
+            <a:spAutoFit/>
+          </a:bodyPr>
+          <a:lstStyle/>
+          <a:p>
+            <a:pPr algn="l">
+              <a:lnSpc>
+                <a:spcPct val="140000"/>
+              </a:lnSpc>
+            </a:pPr>
+            <a:r>
+              <a:rPr sz="2000" b="0" i="0">
+                <a:solidFill>
+                  <a:srgbClr val="FFFFFF"/>
+                </a:solidFill>
+                <a:latin typeface="Verdana"/>
+              </a:rPr>
+              <a:t>Le nombre de chambres, ce qui est inclus, ce qu'il faut apporter, le vrai coût.</a:t>
+            </a:r>
+          </a:p>
+        </p:txBody>
+      </p:sp>
+      <p:sp>
+        <p:nvSpPr>
+          <p:cNvPr id="10" name="Rounded Rectangle 9"/>
+          <p:cNvSpPr/>
+          <p:nvPr/>
+        </p:nvSpPr>
+        <p:spPr>
+          <a:xfrm>
+            <a:off x="566928" y="5036311"/>
+            <a:ext cx="11057839" cy="666496"/>
+          </a:xfrm>
+          <a:prstGeom prst="roundRect">
+            <a:avLst>
+              <a:gd name="adj" fmla="val 13719"/>
+            </a:avLst>
+          </a:prstGeom>
+          <a:solidFill>
+            <a:srgbClr val="2A2C2F"/>
+          </a:solidFill>
+          <a:ln>
+            <a:noFill/>
+          </a:ln>
+          <a:effectLst/>
+        </p:spPr>
+        <p:style>
+          <a:lnRef idx="1">
+            <a:schemeClr val="accent1"/>
+          </a:lnRef>
+          <a:fillRef idx="3">
+            <a:schemeClr val="accent1"/>
+          </a:fillRef>
+          <a:effectRef idx="2">
+            <a:schemeClr val="accent1"/>
+          </a:effectRef>
+          <a:fontRef idx="minor">
+            <a:schemeClr val="lt1"/>
+          </a:fontRef>
+        </p:style>
+        <p:txBody>
+          <a:bodyPr rtlCol="0" anchor="ctr"/>
+          <a:lstStyle/>
+          <a:p/>
+        </p:txBody>
+      </p:sp>
+      <p:sp>
+        <p:nvSpPr>
+          <p:cNvPr id="11" name="TextBox 10"/>
+          <p:cNvSpPr txBox="1"/>
+          <p:nvPr/>
+        </p:nvSpPr>
+        <p:spPr>
+          <a:xfrm>
+            <a:off x="932688" y="5191759"/>
+            <a:ext cx="10051999" cy="392176"/>
+          </a:xfrm>
+          <a:prstGeom prst="rect">
+            <a:avLst/>
+          </a:prstGeom>
+          <a:noFill/>
+        </p:spPr>
+        <p:txBody>
+          <a:bodyPr wrap="square" lIns="0" rIns="0" tIns="0" bIns="0" anchor="t">
+            <a:spAutoFit/>
+          </a:bodyPr>
+          <a:lstStyle/>
+          <a:p>
+            <a:pPr algn="l">
+              <a:lnSpc>
+                <a:spcPct val="140000"/>
+              </a:lnSpc>
+            </a:pPr>
+            <a:r>
+              <a:rPr sz="2000" b="0" i="0">
+                <a:solidFill>
+                  <a:srgbClr val="FFFFFF"/>
+                </a:solidFill>
+                <a:latin typeface="Verdana"/>
+              </a:rPr>
+              <a:t>Une vraie annonce, trouvée où vous voulez.</a:t>
+            </a:r>
+          </a:p>
+        </p:txBody>
+      </p:sp>
+      <p:sp>
+        <p:nvSpPr>
+          <p:cNvPr id="12" name="TextBox 11"/>
+          <p:cNvSpPr txBox="1"/>
+          <p:nvPr/>
+        </p:nvSpPr>
+        <p:spPr>
+          <a:xfrm>
+            <a:off x="566928" y="6355080"/>
+            <a:ext cx="6400800" cy="219456"/>
+          </a:xfrm>
+          <a:prstGeom prst="rect">
+            <a:avLst/>
+          </a:prstGeom>
+          <a:noFill/>
+        </p:spPr>
+        <p:txBody>
+          <a:bodyPr wrap="square" lIns="0" rIns="0" tIns="0" bIns="0" anchor="t">
+            <a:spAutoFit/>
+          </a:bodyPr>
+          <a:lstStyle/>
+          <a:p>
+            <a:pPr algn="l">
+              <a:lnSpc>
+                <a:spcPct val="135000"/>
+              </a:lnSpc>
+            </a:pPr>
+            <a:r>
+              <a:rPr sz="1200" b="0" i="0">
+                <a:solidFill>
+                  <a:srgbClr val="6E7175"/>
+                </a:solidFill>
+                <a:latin typeface="Verdana"/>
+              </a:rPr>
+              <a:t>A2 · Comment est le logement ?</a:t>
             </a:r>
           </a:p>
         </p:txBody>
@@ -17914,7 +25030,7 @@
                 </a:solidFill>
                 <a:latin typeface="Verdana"/>
               </a:rPr>
-              <a:t>PRATIQUE · 1 DE 4</a:t>
+              <a:t>PRATIQUE · 1 DE 6</a:t>
             </a:r>
           </a:p>
         </p:txBody>

--- a/assets/powerpoints/module-logement/A2-le-vocabulaire-du-logement.pptx
+++ b/assets/powerpoints/module-logement/A2-le-vocabulaire-du-logement.pptx
@@ -5284,7 +5284,7 @@
             <a:r>
               <a:rPr sz="1300" b="1" i="0" spc="156">
                 <a:solidFill>
-                  <a:srgbClr val="166534"/>
+                  <a:srgbClr val="A5335F"/>
                 </a:solidFill>
                 <a:latin typeface="Verdana"/>
               </a:rPr>
@@ -5624,7 +5624,7 @@
             <a:r>
               <a:rPr sz="1300" b="1" i="0" spc="156">
                 <a:solidFill>
-                  <a:srgbClr val="166534"/>
+                  <a:srgbClr val="A5335F"/>
                 </a:solidFill>
                 <a:latin typeface="Verdana"/>
               </a:rPr>
@@ -5774,7 +5774,7 @@
             </a:avLst>
           </a:prstGeom>
           <a:solidFill>
-            <a:srgbClr val="E3F1E7"/>
+            <a:srgbClr val="FCE9F0"/>
           </a:solidFill>
           <a:ln>
             <a:noFill/>
@@ -5831,7 +5831,7 @@
             <a:r>
               <a:rPr sz="1500" b="1" i="0">
                 <a:solidFill>
-                  <a:srgbClr val="166534"/>
+                  <a:srgbClr val="A5335F"/>
                 </a:solidFill>
                 <a:latin typeface="Verdana"/>
               </a:rPr>
@@ -5951,7 +5951,7 @@
             </a:avLst>
           </a:prstGeom>
           <a:solidFill>
-            <a:srgbClr val="E3F1E7"/>
+            <a:srgbClr val="FCE9F0"/>
           </a:solidFill>
           <a:ln>
             <a:noFill/>
@@ -6008,7 +6008,7 @@
             <a:r>
               <a:rPr sz="1500" b="1" i="0">
                 <a:solidFill>
-                  <a:srgbClr val="166534"/>
+                  <a:srgbClr val="A5335F"/>
                 </a:solidFill>
                 <a:latin typeface="Verdana"/>
               </a:rPr>
@@ -6128,7 +6128,7 @@
             </a:avLst>
           </a:prstGeom>
           <a:solidFill>
-            <a:srgbClr val="E3F1E7"/>
+            <a:srgbClr val="FCE9F0"/>
           </a:solidFill>
           <a:ln>
             <a:noFill/>
@@ -6185,7 +6185,7 @@
             <a:r>
               <a:rPr sz="1500" b="1" i="0">
                 <a:solidFill>
-                  <a:srgbClr val="166534"/>
+                  <a:srgbClr val="A5335F"/>
                 </a:solidFill>
                 <a:latin typeface="Verdana"/>
               </a:rPr>
@@ -6305,7 +6305,7 @@
             </a:avLst>
           </a:prstGeom>
           <a:solidFill>
-            <a:srgbClr val="E3F1E7"/>
+            <a:srgbClr val="FCE9F0"/>
           </a:solidFill>
           <a:ln>
             <a:noFill/>
@@ -6362,7 +6362,7 @@
             <a:r>
               <a:rPr sz="1500" b="1" i="0">
                 <a:solidFill>
-                  <a:srgbClr val="166534"/>
+                  <a:srgbClr val="A5335F"/>
                 </a:solidFill>
                 <a:latin typeface="Verdana"/>
               </a:rPr>
@@ -6482,7 +6482,7 @@
             </a:avLst>
           </a:prstGeom>
           <a:solidFill>
-            <a:srgbClr val="E3F1E7"/>
+            <a:srgbClr val="FCE9F0"/>
           </a:solidFill>
           <a:ln>
             <a:noFill/>
@@ -6539,7 +6539,7 @@
             <a:r>
               <a:rPr sz="1500" b="1" i="0">
                 <a:solidFill>
-                  <a:srgbClr val="166534"/>
+                  <a:srgbClr val="A5335F"/>
                 </a:solidFill>
                 <a:latin typeface="Verdana"/>
               </a:rPr>
@@ -6764,7 +6764,7 @@
             <a:r>
               <a:rPr sz="1300" b="1" i="0" spc="156">
                 <a:solidFill>
-                  <a:srgbClr val="166534"/>
+                  <a:srgbClr val="A5335F"/>
                 </a:solidFill>
                 <a:latin typeface="Verdana"/>
               </a:rPr>
@@ -6914,7 +6914,7 @@
             </a:avLst>
           </a:prstGeom>
           <a:solidFill>
-            <a:srgbClr val="E3F1E7"/>
+            <a:srgbClr val="FCE9F0"/>
           </a:solidFill>
           <a:ln>
             <a:noFill/>
@@ -6971,7 +6971,7 @@
             <a:r>
               <a:rPr sz="1500" b="1" i="0">
                 <a:solidFill>
-                  <a:srgbClr val="166534"/>
+                  <a:srgbClr val="A5335F"/>
                 </a:solidFill>
                 <a:latin typeface="Verdana"/>
               </a:rPr>
@@ -7082,7 +7082,7 @@
             </a:avLst>
           </a:prstGeom>
           <a:solidFill>
-            <a:srgbClr val="E3F1E7"/>
+            <a:srgbClr val="FCE9F0"/>
           </a:solidFill>
           <a:ln>
             <a:noFill/>
@@ -7139,7 +7139,7 @@
             <a:r>
               <a:rPr sz="1500" b="1" i="0">
                 <a:solidFill>
-                  <a:srgbClr val="166534"/>
+                  <a:srgbClr val="A5335F"/>
                 </a:solidFill>
                 <a:latin typeface="Verdana"/>
               </a:rPr>
@@ -7250,7 +7250,7 @@
             </a:avLst>
           </a:prstGeom>
           <a:solidFill>
-            <a:srgbClr val="E3F1E7"/>
+            <a:srgbClr val="FCE9F0"/>
           </a:solidFill>
           <a:ln>
             <a:noFill/>
@@ -7307,7 +7307,7 @@
             <a:r>
               <a:rPr sz="1500" b="1" i="0">
                 <a:solidFill>
-                  <a:srgbClr val="166534"/>
+                  <a:srgbClr val="A5335F"/>
                 </a:solidFill>
                 <a:latin typeface="Verdana"/>
               </a:rPr>
@@ -7418,7 +7418,7 @@
             </a:avLst>
           </a:prstGeom>
           <a:solidFill>
-            <a:srgbClr val="E3F1E7"/>
+            <a:srgbClr val="FCE9F0"/>
           </a:solidFill>
           <a:ln>
             <a:noFill/>
@@ -7475,7 +7475,7 @@
             <a:r>
               <a:rPr sz="1500" b="1" i="0">
                 <a:solidFill>
-                  <a:srgbClr val="166534"/>
+                  <a:srgbClr val="A5335F"/>
                 </a:solidFill>
                 <a:latin typeface="Verdana"/>
               </a:rPr>
@@ -7586,7 +7586,7 @@
             </a:avLst>
           </a:prstGeom>
           <a:solidFill>
-            <a:srgbClr val="E3F1E7"/>
+            <a:srgbClr val="FCE9F0"/>
           </a:solidFill>
           <a:ln>
             <a:noFill/>
@@ -7643,7 +7643,7 @@
             <a:r>
               <a:rPr sz="1500" b="1" i="0">
                 <a:solidFill>
-                  <a:srgbClr val="166534"/>
+                  <a:srgbClr val="A5335F"/>
                 </a:solidFill>
                 <a:latin typeface="Verdana"/>
               </a:rPr>
@@ -7859,7 +7859,7 @@
             <a:r>
               <a:rPr sz="1300" b="1" i="0" spc="156">
                 <a:solidFill>
-                  <a:srgbClr val="166534"/>
+                  <a:srgbClr val="A5335F"/>
                 </a:solidFill>
                 <a:latin typeface="Verdana"/>
               </a:rPr>
@@ -8009,7 +8009,7 @@
             </a:avLst>
           </a:prstGeom>
           <a:solidFill>
-            <a:srgbClr val="E3F1E7"/>
+            <a:srgbClr val="FCE9F0"/>
           </a:solidFill>
           <a:ln>
             <a:noFill/>
@@ -8066,7 +8066,7 @@
             <a:r>
               <a:rPr sz="1500" b="1" i="0">
                 <a:solidFill>
-                  <a:srgbClr val="166534"/>
+                  <a:srgbClr val="A5335F"/>
                 </a:solidFill>
                 <a:latin typeface="Verdana"/>
               </a:rPr>
@@ -8186,7 +8186,7 @@
             </a:avLst>
           </a:prstGeom>
           <a:solidFill>
-            <a:srgbClr val="E3F1E7"/>
+            <a:srgbClr val="FCE9F0"/>
           </a:solidFill>
           <a:ln>
             <a:noFill/>
@@ -8243,7 +8243,7 @@
             <a:r>
               <a:rPr sz="1500" b="1" i="0">
                 <a:solidFill>
-                  <a:srgbClr val="166534"/>
+                  <a:srgbClr val="A5335F"/>
                 </a:solidFill>
                 <a:latin typeface="Verdana"/>
               </a:rPr>
@@ -8363,7 +8363,7 @@
             </a:avLst>
           </a:prstGeom>
           <a:solidFill>
-            <a:srgbClr val="E3F1E7"/>
+            <a:srgbClr val="FCE9F0"/>
           </a:solidFill>
           <a:ln>
             <a:noFill/>
@@ -8420,7 +8420,7 @@
             <a:r>
               <a:rPr sz="1500" b="1" i="0">
                 <a:solidFill>
-                  <a:srgbClr val="166534"/>
+                  <a:srgbClr val="A5335F"/>
                 </a:solidFill>
                 <a:latin typeface="Verdana"/>
               </a:rPr>
@@ -8540,7 +8540,7 @@
             </a:avLst>
           </a:prstGeom>
           <a:solidFill>
-            <a:srgbClr val="E3F1E7"/>
+            <a:srgbClr val="FCE9F0"/>
           </a:solidFill>
           <a:ln>
             <a:noFill/>
@@ -8597,7 +8597,7 @@
             <a:r>
               <a:rPr sz="1500" b="1" i="0">
                 <a:solidFill>
-                  <a:srgbClr val="166534"/>
+                  <a:srgbClr val="A5335F"/>
                 </a:solidFill>
                 <a:latin typeface="Verdana"/>
               </a:rPr>
@@ -8717,7 +8717,7 @@
             </a:avLst>
           </a:prstGeom>
           <a:solidFill>
-            <a:srgbClr val="E3F1E7"/>
+            <a:srgbClr val="FCE9F0"/>
           </a:solidFill>
           <a:ln>
             <a:noFill/>
@@ -8774,7 +8774,7 @@
             <a:r>
               <a:rPr sz="1500" b="1" i="0">
                 <a:solidFill>
-                  <a:srgbClr val="166534"/>
+                  <a:srgbClr val="A5335F"/>
                 </a:solidFill>
                 <a:latin typeface="Verdana"/>
               </a:rPr>
@@ -8999,7 +8999,7 @@
             <a:r>
               <a:rPr sz="1300" b="1" i="0" spc="156">
                 <a:solidFill>
-                  <a:srgbClr val="166534"/>
+                  <a:srgbClr val="A5335F"/>
                 </a:solidFill>
                 <a:latin typeface="Verdana"/>
               </a:rPr>
@@ -9548,7 +9548,7 @@
             <a:r>
               <a:rPr sz="1300" b="1" i="0" spc="156">
                 <a:solidFill>
-                  <a:srgbClr val="166534"/>
+                  <a:srgbClr val="A5335F"/>
                 </a:solidFill>
                 <a:latin typeface="Verdana"/>
               </a:rPr>
@@ -10097,7 +10097,7 @@
             <a:r>
               <a:rPr sz="1300" b="1" i="0" spc="156">
                 <a:solidFill>
-                  <a:srgbClr val="166534"/>
+                  <a:srgbClr val="A5335F"/>
                 </a:solidFill>
                 <a:latin typeface="Verdana"/>
               </a:rPr>
@@ -10247,7 +10247,7 @@
             </a:avLst>
           </a:prstGeom>
           <a:solidFill>
-            <a:srgbClr val="E3F1E7"/>
+            <a:srgbClr val="FCE9F0"/>
           </a:solidFill>
           <a:ln>
             <a:noFill/>
@@ -10304,7 +10304,7 @@
             <a:r>
               <a:rPr sz="1500" b="1" i="0">
                 <a:solidFill>
-                  <a:srgbClr val="166534"/>
+                  <a:srgbClr val="A5335F"/>
                 </a:solidFill>
                 <a:latin typeface="Verdana"/>
               </a:rPr>
@@ -10415,7 +10415,7 @@
             </a:avLst>
           </a:prstGeom>
           <a:solidFill>
-            <a:srgbClr val="E3F1E7"/>
+            <a:srgbClr val="FCE9F0"/>
           </a:solidFill>
           <a:ln>
             <a:noFill/>
@@ -10472,7 +10472,7 @@
             <a:r>
               <a:rPr sz="1500" b="1" i="0">
                 <a:solidFill>
-                  <a:srgbClr val="166534"/>
+                  <a:srgbClr val="A5335F"/>
                 </a:solidFill>
                 <a:latin typeface="Verdana"/>
               </a:rPr>
@@ -10583,7 +10583,7 @@
             </a:avLst>
           </a:prstGeom>
           <a:solidFill>
-            <a:srgbClr val="E3F1E7"/>
+            <a:srgbClr val="FCE9F0"/>
           </a:solidFill>
           <a:ln>
             <a:noFill/>
@@ -10640,7 +10640,7 @@
             <a:r>
               <a:rPr sz="1500" b="1" i="0">
                 <a:solidFill>
-                  <a:srgbClr val="166534"/>
+                  <a:srgbClr val="A5335F"/>
                 </a:solidFill>
                 <a:latin typeface="Verdana"/>
               </a:rPr>
@@ -10751,7 +10751,7 @@
             </a:avLst>
           </a:prstGeom>
           <a:solidFill>
-            <a:srgbClr val="E3F1E7"/>
+            <a:srgbClr val="FCE9F0"/>
           </a:solidFill>
           <a:ln>
             <a:noFill/>
@@ -10808,7 +10808,7 @@
             <a:r>
               <a:rPr sz="1500" b="1" i="0">
                 <a:solidFill>
-                  <a:srgbClr val="166534"/>
+                  <a:srgbClr val="A5335F"/>
                 </a:solidFill>
                 <a:latin typeface="Verdana"/>
               </a:rPr>
@@ -11024,7 +11024,7 @@
             <a:r>
               <a:rPr sz="1300" b="1" i="0" spc="156">
                 <a:solidFill>
-                  <a:srgbClr val="166534"/>
+                  <a:srgbClr val="A5335F"/>
                 </a:solidFill>
                 <a:latin typeface="Verdana"/>
               </a:rPr>
@@ -11174,7 +11174,7 @@
             </a:avLst>
           </a:prstGeom>
           <a:solidFill>
-            <a:srgbClr val="E3F1E7"/>
+            <a:srgbClr val="FCE9F0"/>
           </a:solidFill>
           <a:ln>
             <a:noFill/>
@@ -11231,7 +11231,7 @@
             <a:r>
               <a:rPr sz="1500" b="1" i="0">
                 <a:solidFill>
-                  <a:srgbClr val="166534"/>
+                  <a:srgbClr val="A5335F"/>
                 </a:solidFill>
                 <a:latin typeface="Verdana"/>
               </a:rPr>
@@ -11351,7 +11351,7 @@
             </a:avLst>
           </a:prstGeom>
           <a:solidFill>
-            <a:srgbClr val="E3F1E7"/>
+            <a:srgbClr val="FCE9F0"/>
           </a:solidFill>
           <a:ln>
             <a:noFill/>
@@ -11408,7 +11408,7 @@
             <a:r>
               <a:rPr sz="1500" b="1" i="0">
                 <a:solidFill>
-                  <a:srgbClr val="166534"/>
+                  <a:srgbClr val="A5335F"/>
                 </a:solidFill>
                 <a:latin typeface="Verdana"/>
               </a:rPr>
@@ -11528,7 +11528,7 @@
             </a:avLst>
           </a:prstGeom>
           <a:solidFill>
-            <a:srgbClr val="E3F1E7"/>
+            <a:srgbClr val="FCE9F0"/>
           </a:solidFill>
           <a:ln>
             <a:noFill/>
@@ -11585,7 +11585,7 @@
             <a:r>
               <a:rPr sz="1500" b="1" i="0">
                 <a:solidFill>
-                  <a:srgbClr val="166534"/>
+                  <a:srgbClr val="A5335F"/>
                 </a:solidFill>
                 <a:latin typeface="Verdana"/>
               </a:rPr>
@@ -11705,7 +11705,7 @@
             </a:avLst>
           </a:prstGeom>
           <a:solidFill>
-            <a:srgbClr val="E3F1E7"/>
+            <a:srgbClr val="FCE9F0"/>
           </a:solidFill>
           <a:ln>
             <a:noFill/>
@@ -11762,7 +11762,7 @@
             <a:r>
               <a:rPr sz="1500" b="1" i="0">
                 <a:solidFill>
-                  <a:srgbClr val="166534"/>
+                  <a:srgbClr val="A5335F"/>
                 </a:solidFill>
                 <a:latin typeface="Verdana"/>
               </a:rPr>
@@ -11987,7 +11987,7 @@
             <a:r>
               <a:rPr sz="1300" b="1" i="0" spc="156">
                 <a:solidFill>
-                  <a:srgbClr val="166534"/>
+                  <a:srgbClr val="A5335F"/>
                 </a:solidFill>
                 <a:latin typeface="Verdana"/>
               </a:rPr>
@@ -12137,7 +12137,7 @@
             </a:avLst>
           </a:prstGeom>
           <a:solidFill>
-            <a:srgbClr val="E3F1E7"/>
+            <a:srgbClr val="FCE9F0"/>
           </a:solidFill>
           <a:ln>
             <a:noFill/>
@@ -12194,7 +12194,7 @@
             <a:r>
               <a:rPr sz="1500" b="1" i="0">
                 <a:solidFill>
-                  <a:srgbClr val="166534"/>
+                  <a:srgbClr val="A5335F"/>
                 </a:solidFill>
                 <a:latin typeface="Verdana"/>
               </a:rPr>
@@ -12305,7 +12305,7 @@
             </a:avLst>
           </a:prstGeom>
           <a:solidFill>
-            <a:srgbClr val="E3F1E7"/>
+            <a:srgbClr val="FCE9F0"/>
           </a:solidFill>
           <a:ln>
             <a:noFill/>
@@ -12362,7 +12362,7 @@
             <a:r>
               <a:rPr sz="1500" b="1" i="0">
                 <a:solidFill>
-                  <a:srgbClr val="166534"/>
+                  <a:srgbClr val="A5335F"/>
                 </a:solidFill>
                 <a:latin typeface="Verdana"/>
               </a:rPr>
@@ -12473,7 +12473,7 @@
             </a:avLst>
           </a:prstGeom>
           <a:solidFill>
-            <a:srgbClr val="E3F1E7"/>
+            <a:srgbClr val="FCE9F0"/>
           </a:solidFill>
           <a:ln>
             <a:noFill/>
@@ -12530,7 +12530,7 @@
             <a:r>
               <a:rPr sz="1500" b="1" i="0">
                 <a:solidFill>
-                  <a:srgbClr val="166534"/>
+                  <a:srgbClr val="A5335F"/>
                 </a:solidFill>
                 <a:latin typeface="Verdana"/>
               </a:rPr>
@@ -12641,7 +12641,7 @@
             </a:avLst>
           </a:prstGeom>
           <a:solidFill>
-            <a:srgbClr val="E3F1E7"/>
+            <a:srgbClr val="FCE9F0"/>
           </a:solidFill>
           <a:ln>
             <a:noFill/>
@@ -12698,7 +12698,7 @@
             <a:r>
               <a:rPr sz="1500" b="1" i="0">
                 <a:solidFill>
-                  <a:srgbClr val="166534"/>
+                  <a:srgbClr val="A5335F"/>
                 </a:solidFill>
                 <a:latin typeface="Verdana"/>
               </a:rPr>
@@ -12914,7 +12914,7 @@
             <a:r>
               <a:rPr sz="1300" b="1" i="0" spc="156">
                 <a:solidFill>
-                  <a:srgbClr val="166534"/>
+                  <a:srgbClr val="A5335F"/>
                 </a:solidFill>
                 <a:latin typeface="Verdana"/>
               </a:rPr>
@@ -12940,7 +12940,7 @@
             </a:avLst>
           </a:prstGeom>
           <a:solidFill>
-            <a:srgbClr val="E3F1E7"/>
+            <a:srgbClr val="FCE9F0"/>
           </a:solidFill>
           <a:ln w="12700">
             <a:solidFill>
@@ -13261,7 +13261,7 @@
             <a:r>
               <a:rPr sz="1300" b="1" i="0" spc="156">
                 <a:solidFill>
-                  <a:srgbClr val="166534"/>
+                  <a:srgbClr val="A5335F"/>
                 </a:solidFill>
                 <a:latin typeface="Verdana"/>
               </a:rPr>
@@ -13502,7 +13502,7 @@
             <a:r>
               <a:rPr sz="1800" b="1" i="0">
                 <a:solidFill>
-                  <a:srgbClr val="166534"/>
+                  <a:srgbClr val="A5335F"/>
                 </a:solidFill>
                 <a:latin typeface="Verdana"/>
               </a:rPr>
@@ -13661,7 +13661,7 @@
             <a:r>
               <a:rPr sz="1800" b="1" i="0">
                 <a:solidFill>
-                  <a:srgbClr val="166534"/>
+                  <a:srgbClr val="A5335F"/>
                 </a:solidFill>
                 <a:latin typeface="Verdana"/>
               </a:rPr>
@@ -14001,7 +14001,7 @@
             <a:r>
               <a:rPr sz="1300" b="1" i="0" spc="156">
                 <a:solidFill>
-                  <a:srgbClr val="166534"/>
+                  <a:srgbClr val="A5335F"/>
                 </a:solidFill>
                 <a:latin typeface="Verdana"/>
               </a:rPr>
@@ -14112,7 +14112,7 @@
             </a:avLst>
           </a:prstGeom>
           <a:solidFill>
-            <a:srgbClr val="E3F1E7"/>
+            <a:srgbClr val="FCE9F0"/>
           </a:solidFill>
           <a:ln>
             <a:noFill/>
@@ -14169,7 +14169,7 @@
             <a:r>
               <a:rPr sz="1500" b="1" i="0">
                 <a:solidFill>
-                  <a:srgbClr val="166534"/>
+                  <a:srgbClr val="A5335F"/>
                 </a:solidFill>
                 <a:latin typeface="Verdana"/>
               </a:rPr>
@@ -14280,7 +14280,7 @@
             </a:avLst>
           </a:prstGeom>
           <a:solidFill>
-            <a:srgbClr val="E3F1E7"/>
+            <a:srgbClr val="FCE9F0"/>
           </a:solidFill>
           <a:ln>
             <a:noFill/>
@@ -14337,7 +14337,7 @@
             <a:r>
               <a:rPr sz="1500" b="1" i="0">
                 <a:solidFill>
-                  <a:srgbClr val="166534"/>
+                  <a:srgbClr val="A5335F"/>
                 </a:solidFill>
                 <a:latin typeface="Verdana"/>
               </a:rPr>
@@ -14448,7 +14448,7 @@
             </a:avLst>
           </a:prstGeom>
           <a:solidFill>
-            <a:srgbClr val="E3F1E7"/>
+            <a:srgbClr val="FCE9F0"/>
           </a:solidFill>
           <a:ln>
             <a:noFill/>
@@ -14505,7 +14505,7 @@
             <a:r>
               <a:rPr sz="1500" b="1" i="0">
                 <a:solidFill>
-                  <a:srgbClr val="166534"/>
+                  <a:srgbClr val="A5335F"/>
                 </a:solidFill>
                 <a:latin typeface="Verdana"/>
               </a:rPr>
@@ -14616,7 +14616,7 @@
             </a:avLst>
           </a:prstGeom>
           <a:solidFill>
-            <a:srgbClr val="E3F1E7"/>
+            <a:srgbClr val="FCE9F0"/>
           </a:solidFill>
           <a:ln>
             <a:noFill/>
@@ -14673,7 +14673,7 @@
             <a:r>
               <a:rPr sz="1500" b="1" i="0">
                 <a:solidFill>
-                  <a:srgbClr val="166534"/>
+                  <a:srgbClr val="A5335F"/>
                 </a:solidFill>
                 <a:latin typeface="Verdana"/>
               </a:rPr>
@@ -14784,7 +14784,7 @@
             </a:avLst>
           </a:prstGeom>
           <a:solidFill>
-            <a:srgbClr val="E3F1E7"/>
+            <a:srgbClr val="FCE9F0"/>
           </a:solidFill>
           <a:ln>
             <a:noFill/>
@@ -14841,7 +14841,7 @@
             <a:r>
               <a:rPr sz="1500" b="1" i="0">
                 <a:solidFill>
-                  <a:srgbClr val="166534"/>
+                  <a:srgbClr val="A5335F"/>
                 </a:solidFill>
                 <a:latin typeface="Verdana"/>
               </a:rPr>
@@ -15057,7 +15057,7 @@
             <a:r>
               <a:rPr sz="1300" b="1" i="0" spc="156">
                 <a:solidFill>
-                  <a:srgbClr val="166534"/>
+                  <a:srgbClr val="A5335F"/>
                 </a:solidFill>
                 <a:latin typeface="Verdana"/>
               </a:rPr>
@@ -15606,7 +15606,7 @@
             <a:r>
               <a:rPr sz="1300" b="1" i="0" spc="156">
                 <a:solidFill>
-                  <a:srgbClr val="166534"/>
+                  <a:srgbClr val="A5335F"/>
                 </a:solidFill>
                 <a:latin typeface="Verdana"/>
               </a:rPr>
@@ -15756,7 +15756,7 @@
             </a:avLst>
           </a:prstGeom>
           <a:solidFill>
-            <a:srgbClr val="E3F1E7"/>
+            <a:srgbClr val="FCE9F0"/>
           </a:solidFill>
           <a:ln>
             <a:noFill/>
@@ -15813,7 +15813,7 @@
             <a:r>
               <a:rPr sz="1500" b="1" i="0">
                 <a:solidFill>
-                  <a:srgbClr val="166534"/>
+                  <a:srgbClr val="A5335F"/>
                 </a:solidFill>
                 <a:latin typeface="Verdana"/>
               </a:rPr>
@@ -15924,7 +15924,7 @@
             </a:avLst>
           </a:prstGeom>
           <a:solidFill>
-            <a:srgbClr val="E3F1E7"/>
+            <a:srgbClr val="FCE9F0"/>
           </a:solidFill>
           <a:ln>
             <a:noFill/>
@@ -15981,7 +15981,7 @@
             <a:r>
               <a:rPr sz="1500" b="1" i="0">
                 <a:solidFill>
-                  <a:srgbClr val="166534"/>
+                  <a:srgbClr val="A5335F"/>
                 </a:solidFill>
                 <a:latin typeface="Verdana"/>
               </a:rPr>
@@ -16092,7 +16092,7 @@
             </a:avLst>
           </a:prstGeom>
           <a:solidFill>
-            <a:srgbClr val="E3F1E7"/>
+            <a:srgbClr val="FCE9F0"/>
           </a:solidFill>
           <a:ln>
             <a:noFill/>
@@ -16149,7 +16149,7 @@
             <a:r>
               <a:rPr sz="1500" b="1" i="0">
                 <a:solidFill>
-                  <a:srgbClr val="166534"/>
+                  <a:srgbClr val="A5335F"/>
                 </a:solidFill>
                 <a:latin typeface="Verdana"/>
               </a:rPr>
@@ -16260,7 +16260,7 @@
             </a:avLst>
           </a:prstGeom>
           <a:solidFill>
-            <a:srgbClr val="E3F1E7"/>
+            <a:srgbClr val="FCE9F0"/>
           </a:solidFill>
           <a:ln>
             <a:noFill/>
@@ -16317,7 +16317,7 @@
             <a:r>
               <a:rPr sz="1500" b="1" i="0">
                 <a:solidFill>
-                  <a:srgbClr val="166534"/>
+                  <a:srgbClr val="A5335F"/>
                 </a:solidFill>
                 <a:latin typeface="Verdana"/>
               </a:rPr>
@@ -16428,7 +16428,7 @@
             </a:avLst>
           </a:prstGeom>
           <a:solidFill>
-            <a:srgbClr val="E3F1E7"/>
+            <a:srgbClr val="FCE9F0"/>
           </a:solidFill>
           <a:ln>
             <a:noFill/>
@@ -16485,7 +16485,7 @@
             <a:r>
               <a:rPr sz="1500" b="1" i="0">
                 <a:solidFill>
-                  <a:srgbClr val="166534"/>
+                  <a:srgbClr val="A5335F"/>
                 </a:solidFill>
                 <a:latin typeface="Verdana"/>
               </a:rPr>
@@ -16596,7 +16596,7 @@
             </a:avLst>
           </a:prstGeom>
           <a:solidFill>
-            <a:srgbClr val="E3F1E7"/>
+            <a:srgbClr val="FCE9F0"/>
           </a:solidFill>
           <a:ln>
             <a:noFill/>
@@ -16653,7 +16653,7 @@
             <a:r>
               <a:rPr sz="1500" b="1" i="0">
                 <a:solidFill>
-                  <a:srgbClr val="166534"/>
+                  <a:srgbClr val="A5335F"/>
                 </a:solidFill>
                 <a:latin typeface="Verdana"/>
               </a:rPr>
@@ -16764,7 +16764,7 @@
             </a:avLst>
           </a:prstGeom>
           <a:solidFill>
-            <a:srgbClr val="E3F1E7"/>
+            <a:srgbClr val="FCE9F0"/>
           </a:solidFill>
           <a:ln>
             <a:noFill/>
@@ -16821,7 +16821,7 @@
             <a:r>
               <a:rPr sz="1500" b="1" i="0">
                 <a:solidFill>
-                  <a:srgbClr val="166534"/>
+                  <a:srgbClr val="A5335F"/>
                 </a:solidFill>
                 <a:latin typeface="Verdana"/>
               </a:rPr>
@@ -16932,7 +16932,7 @@
             </a:avLst>
           </a:prstGeom>
           <a:solidFill>
-            <a:srgbClr val="E3F1E7"/>
+            <a:srgbClr val="FCE9F0"/>
           </a:solidFill>
           <a:ln>
             <a:noFill/>
@@ -16989,7 +16989,7 @@
             <a:r>
               <a:rPr sz="1500" b="1" i="0">
                 <a:solidFill>
-                  <a:srgbClr val="166534"/>
+                  <a:srgbClr val="A5335F"/>
                 </a:solidFill>
                 <a:latin typeface="Verdana"/>
               </a:rPr>
@@ -17205,7 +17205,7 @@
             <a:r>
               <a:rPr sz="1300" b="1" i="0" spc="156">
                 <a:solidFill>
-                  <a:srgbClr val="166534"/>
+                  <a:srgbClr val="A5335F"/>
                 </a:solidFill>
                 <a:latin typeface="Verdana"/>
               </a:rPr>
@@ -17355,7 +17355,7 @@
             </a:avLst>
           </a:prstGeom>
           <a:solidFill>
-            <a:srgbClr val="E3F1E7"/>
+            <a:srgbClr val="FCE9F0"/>
           </a:solidFill>
           <a:ln>
             <a:noFill/>
@@ -17412,7 +17412,7 @@
             <a:r>
               <a:rPr sz="1500" b="1" i="0">
                 <a:solidFill>
-                  <a:srgbClr val="166534"/>
+                  <a:srgbClr val="A5335F"/>
                 </a:solidFill>
                 <a:latin typeface="Verdana"/>
               </a:rPr>
@@ -17532,7 +17532,7 @@
             </a:avLst>
           </a:prstGeom>
           <a:solidFill>
-            <a:srgbClr val="E3F1E7"/>
+            <a:srgbClr val="FCE9F0"/>
           </a:solidFill>
           <a:ln>
             <a:noFill/>
@@ -17589,7 +17589,7 @@
             <a:r>
               <a:rPr sz="1500" b="1" i="0">
                 <a:solidFill>
-                  <a:srgbClr val="166534"/>
+                  <a:srgbClr val="A5335F"/>
                 </a:solidFill>
                 <a:latin typeface="Verdana"/>
               </a:rPr>
@@ -17709,7 +17709,7 @@
             </a:avLst>
           </a:prstGeom>
           <a:solidFill>
-            <a:srgbClr val="E3F1E7"/>
+            <a:srgbClr val="FCE9F0"/>
           </a:solidFill>
           <a:ln>
             <a:noFill/>
@@ -17766,7 +17766,7 @@
             <a:r>
               <a:rPr sz="1500" b="1" i="0">
                 <a:solidFill>
-                  <a:srgbClr val="166534"/>
+                  <a:srgbClr val="A5335F"/>
                 </a:solidFill>
                 <a:latin typeface="Verdana"/>
               </a:rPr>
@@ -17886,7 +17886,7 @@
             </a:avLst>
           </a:prstGeom>
           <a:solidFill>
-            <a:srgbClr val="E3F1E7"/>
+            <a:srgbClr val="FCE9F0"/>
           </a:solidFill>
           <a:ln>
             <a:noFill/>
@@ -17943,7 +17943,7 @@
             <a:r>
               <a:rPr sz="1500" b="1" i="0">
                 <a:solidFill>
-                  <a:srgbClr val="166534"/>
+                  <a:srgbClr val="A5335F"/>
                 </a:solidFill>
                 <a:latin typeface="Verdana"/>
               </a:rPr>
@@ -18063,7 +18063,7 @@
             </a:avLst>
           </a:prstGeom>
           <a:solidFill>
-            <a:srgbClr val="E3F1E7"/>
+            <a:srgbClr val="FCE9F0"/>
           </a:solidFill>
           <a:ln>
             <a:noFill/>
@@ -18120,7 +18120,7 @@
             <a:r>
               <a:rPr sz="1500" b="1" i="0">
                 <a:solidFill>
-                  <a:srgbClr val="166534"/>
+                  <a:srgbClr val="A5335F"/>
                 </a:solidFill>
                 <a:latin typeface="Verdana"/>
               </a:rPr>
@@ -18240,7 +18240,7 @@
             </a:avLst>
           </a:prstGeom>
           <a:solidFill>
-            <a:srgbClr val="E3F1E7"/>
+            <a:srgbClr val="FCE9F0"/>
           </a:solidFill>
           <a:ln>
             <a:noFill/>
@@ -18297,7 +18297,7 @@
             <a:r>
               <a:rPr sz="1500" b="1" i="0">
                 <a:solidFill>
-                  <a:srgbClr val="166534"/>
+                  <a:srgbClr val="A5335F"/>
                 </a:solidFill>
                 <a:latin typeface="Verdana"/>
               </a:rPr>
@@ -18417,7 +18417,7 @@
             </a:avLst>
           </a:prstGeom>
           <a:solidFill>
-            <a:srgbClr val="E3F1E7"/>
+            <a:srgbClr val="FCE9F0"/>
           </a:solidFill>
           <a:ln>
             <a:noFill/>
@@ -18474,7 +18474,7 @@
             <a:r>
               <a:rPr sz="1500" b="1" i="0">
                 <a:solidFill>
-                  <a:srgbClr val="166534"/>
+                  <a:srgbClr val="A5335F"/>
                 </a:solidFill>
                 <a:latin typeface="Verdana"/>
               </a:rPr>
@@ -18594,7 +18594,7 @@
             </a:avLst>
           </a:prstGeom>
           <a:solidFill>
-            <a:srgbClr val="E3F1E7"/>
+            <a:srgbClr val="FCE9F0"/>
           </a:solidFill>
           <a:ln>
             <a:noFill/>
@@ -18651,7 +18651,7 @@
             <a:r>
               <a:rPr sz="1500" b="1" i="0">
                 <a:solidFill>
-                  <a:srgbClr val="166534"/>
+                  <a:srgbClr val="A5335F"/>
                 </a:solidFill>
                 <a:latin typeface="Verdana"/>
               </a:rPr>
@@ -18876,7 +18876,7 @@
             <a:r>
               <a:rPr sz="1300" b="1" i="0" spc="156">
                 <a:solidFill>
-                  <a:srgbClr val="166534"/>
+                  <a:srgbClr val="A5335F"/>
                 </a:solidFill>
                 <a:latin typeface="Verdana"/>
               </a:rPr>
@@ -19026,7 +19026,7 @@
             </a:avLst>
           </a:prstGeom>
           <a:solidFill>
-            <a:srgbClr val="E3F1E7"/>
+            <a:srgbClr val="FCE9F0"/>
           </a:solidFill>
           <a:ln>
             <a:noFill/>
@@ -19083,7 +19083,7 @@
             <a:r>
               <a:rPr sz="1500" b="1" i="0">
                 <a:solidFill>
-                  <a:srgbClr val="166534"/>
+                  <a:srgbClr val="A5335F"/>
                 </a:solidFill>
                 <a:latin typeface="Verdana"/>
               </a:rPr>
@@ -19194,7 +19194,7 @@
             </a:avLst>
           </a:prstGeom>
           <a:solidFill>
-            <a:srgbClr val="E3F1E7"/>
+            <a:srgbClr val="FCE9F0"/>
           </a:solidFill>
           <a:ln>
             <a:noFill/>
@@ -19251,7 +19251,7 @@
             <a:r>
               <a:rPr sz="1500" b="1" i="0">
                 <a:solidFill>
-                  <a:srgbClr val="166534"/>
+                  <a:srgbClr val="A5335F"/>
                 </a:solidFill>
                 <a:latin typeface="Verdana"/>
               </a:rPr>
@@ -19362,7 +19362,7 @@
             </a:avLst>
           </a:prstGeom>
           <a:solidFill>
-            <a:srgbClr val="E3F1E7"/>
+            <a:srgbClr val="FCE9F0"/>
           </a:solidFill>
           <a:ln>
             <a:noFill/>
@@ -19419,7 +19419,7 @@
             <a:r>
               <a:rPr sz="1500" b="1" i="0">
                 <a:solidFill>
-                  <a:srgbClr val="166534"/>
+                  <a:srgbClr val="A5335F"/>
                 </a:solidFill>
                 <a:latin typeface="Verdana"/>
               </a:rPr>
@@ -19635,7 +19635,7 @@
             <a:r>
               <a:rPr sz="1300" b="1" i="0" spc="156">
                 <a:solidFill>
-                  <a:srgbClr val="166534"/>
+                  <a:srgbClr val="A5335F"/>
                 </a:solidFill>
                 <a:latin typeface="Verdana"/>
               </a:rPr>
@@ -19785,7 +19785,7 @@
             </a:avLst>
           </a:prstGeom>
           <a:solidFill>
-            <a:srgbClr val="E3F1E7"/>
+            <a:srgbClr val="FCE9F0"/>
           </a:solidFill>
           <a:ln>
             <a:noFill/>
@@ -19842,7 +19842,7 @@
             <a:r>
               <a:rPr sz="1500" b="1" i="0">
                 <a:solidFill>
-                  <a:srgbClr val="166534"/>
+                  <a:srgbClr val="A5335F"/>
                 </a:solidFill>
                 <a:latin typeface="Verdana"/>
               </a:rPr>
@@ -19962,7 +19962,7 @@
             </a:avLst>
           </a:prstGeom>
           <a:solidFill>
-            <a:srgbClr val="E3F1E7"/>
+            <a:srgbClr val="FCE9F0"/>
           </a:solidFill>
           <a:ln>
             <a:noFill/>
@@ -20019,7 +20019,7 @@
             <a:r>
               <a:rPr sz="1500" b="1" i="0">
                 <a:solidFill>
-                  <a:srgbClr val="166534"/>
+                  <a:srgbClr val="A5335F"/>
                 </a:solidFill>
                 <a:latin typeface="Verdana"/>
               </a:rPr>
@@ -20139,7 +20139,7 @@
             </a:avLst>
           </a:prstGeom>
           <a:solidFill>
-            <a:srgbClr val="E3F1E7"/>
+            <a:srgbClr val="FCE9F0"/>
           </a:solidFill>
           <a:ln>
             <a:noFill/>
@@ -20196,7 +20196,7 @@
             <a:r>
               <a:rPr sz="1500" b="1" i="0">
                 <a:solidFill>
-                  <a:srgbClr val="166534"/>
+                  <a:srgbClr val="A5335F"/>
                 </a:solidFill>
                 <a:latin typeface="Verdana"/>
               </a:rPr>
@@ -20884,7 +20884,7 @@
             <a:r>
               <a:rPr sz="1300" b="1" i="0" spc="156">
                 <a:solidFill>
-                  <a:srgbClr val="166534"/>
+                  <a:srgbClr val="A5335F"/>
                 </a:solidFill>
                 <a:latin typeface="Verdana"/>
               </a:rPr>
@@ -21086,7 +21086,7 @@
             <a:r>
               <a:rPr sz="1800" b="1" i="0">
                 <a:solidFill>
-                  <a:srgbClr val="166534"/>
+                  <a:srgbClr val="A5335F"/>
                 </a:solidFill>
                 <a:latin typeface="Verdana"/>
               </a:rPr>
@@ -21206,7 +21206,7 @@
             <a:r>
               <a:rPr sz="1800" b="1" i="0">
                 <a:solidFill>
-                  <a:srgbClr val="166534"/>
+                  <a:srgbClr val="A5335F"/>
                 </a:solidFill>
                 <a:latin typeface="Verdana"/>
               </a:rPr>
@@ -21326,7 +21326,7 @@
             <a:r>
               <a:rPr sz="1800" b="1" i="0">
                 <a:solidFill>
-                  <a:srgbClr val="166534"/>
+                  <a:srgbClr val="A5335F"/>
                 </a:solidFill>
                 <a:latin typeface="Verdana"/>
               </a:rPr>
@@ -21446,7 +21446,7 @@
             <a:r>
               <a:rPr sz="1800" b="1" i="0">
                 <a:solidFill>
-                  <a:srgbClr val="166534"/>
+                  <a:srgbClr val="A5335F"/>
                 </a:solidFill>
                 <a:latin typeface="Verdana"/>
               </a:rPr>
@@ -21566,7 +21566,7 @@
             <a:r>
               <a:rPr sz="1800" b="1" i="0">
                 <a:solidFill>
-                  <a:srgbClr val="166534"/>
+                  <a:srgbClr val="A5335F"/>
                 </a:solidFill>
                 <a:latin typeface="Verdana"/>
               </a:rPr>
@@ -21782,7 +21782,7 @@
             <a:r>
               <a:rPr sz="1300" b="1" i="0" spc="156">
                 <a:solidFill>
-                  <a:srgbClr val="166534"/>
+                  <a:srgbClr val="A5335F"/>
                 </a:solidFill>
                 <a:latin typeface="Verdana"/>
               </a:rPr>
@@ -21808,7 +21808,7 @@
             </a:avLst>
           </a:prstGeom>
           <a:solidFill>
-            <a:srgbClr val="E3F1E7"/>
+            <a:srgbClr val="FCE9F0"/>
           </a:solidFill>
           <a:ln w="12700">
             <a:solidFill>
@@ -22129,7 +22129,7 @@
             <a:r>
               <a:rPr sz="1300" b="1" i="0" spc="156">
                 <a:solidFill>
-                  <a:srgbClr val="166534"/>
+                  <a:srgbClr val="A5335F"/>
                 </a:solidFill>
                 <a:latin typeface="Verdana"/>
               </a:rPr>
@@ -23069,7 +23069,7 @@
             <a:r>
               <a:rPr sz="1300" b="1" i="0" spc="156">
                 <a:solidFill>
-                  <a:srgbClr val="166534"/>
+                  <a:srgbClr val="A5335F"/>
                 </a:solidFill>
                 <a:latin typeface="Verdana"/>
               </a:rPr>
@@ -23271,7 +23271,7 @@
             <a:r>
               <a:rPr sz="1800" b="1" i="0">
                 <a:solidFill>
-                  <a:srgbClr val="166534"/>
+                  <a:srgbClr val="A5335F"/>
                 </a:solidFill>
                 <a:latin typeface="Verdana"/>
               </a:rPr>
@@ -23391,7 +23391,7 @@
             <a:r>
               <a:rPr sz="1800" b="1" i="0">
                 <a:solidFill>
-                  <a:srgbClr val="166534"/>
+                  <a:srgbClr val="A5335F"/>
                 </a:solidFill>
                 <a:latin typeface="Verdana"/>
               </a:rPr>
@@ -23511,7 +23511,7 @@
             <a:r>
               <a:rPr sz="1800" b="1" i="0">
                 <a:solidFill>
-                  <a:srgbClr val="166534"/>
+                  <a:srgbClr val="A5335F"/>
                 </a:solidFill>
                 <a:latin typeface="Verdana"/>
               </a:rPr>
@@ -23631,7 +23631,7 @@
             <a:r>
               <a:rPr sz="1800" b="1" i="0">
                 <a:solidFill>
-                  <a:srgbClr val="166534"/>
+                  <a:srgbClr val="A5335F"/>
                 </a:solidFill>
                 <a:latin typeface="Verdana"/>
               </a:rPr>
@@ -23751,7 +23751,7 @@
             <a:r>
               <a:rPr sz="1800" b="1" i="0">
                 <a:solidFill>
-                  <a:srgbClr val="166534"/>
+                  <a:srgbClr val="A5335F"/>
                 </a:solidFill>
                 <a:latin typeface="Verdana"/>
               </a:rPr>
@@ -23967,7 +23967,7 @@
             <a:r>
               <a:rPr sz="1300" b="1" i="0" spc="156">
                 <a:solidFill>
-                  <a:srgbClr val="166534"/>
+                  <a:srgbClr val="A5335F"/>
                 </a:solidFill>
                 <a:latin typeface="Verdana"/>
               </a:rPr>
@@ -23993,7 +23993,7 @@
             </a:avLst>
           </a:prstGeom>
           <a:solidFill>
-            <a:srgbClr val="E3F1E7"/>
+            <a:srgbClr val="FCE9F0"/>
           </a:solidFill>
           <a:ln w="12700">
             <a:solidFill>
@@ -24314,7 +24314,7 @@
             <a:r>
               <a:rPr sz="1300" b="1" i="0" spc="156">
                 <a:solidFill>
-                  <a:srgbClr val="166534"/>
+                  <a:srgbClr val="A5335F"/>
                 </a:solidFill>
                 <a:latin typeface="Verdana"/>
               </a:rPr>
@@ -24438,7 +24438,7 @@
             <a:r>
               <a:rPr sz="2300" b="1" i="0">
                 <a:solidFill>
-                  <a:srgbClr val="166534"/>
+                  <a:srgbClr val="A5335F"/>
                 </a:solidFill>
                 <a:latin typeface="Verdana"/>
               </a:rPr>
@@ -24562,7 +24562,7 @@
             <a:r>
               <a:rPr sz="2300" b="1" i="0">
                 <a:solidFill>
-                  <a:srgbClr val="166534"/>
+                  <a:srgbClr val="A5335F"/>
                 </a:solidFill>
                 <a:latin typeface="Verdana"/>
               </a:rPr>
@@ -24686,7 +24686,7 @@
             <a:r>
               <a:rPr sz="2300" b="1" i="0">
                 <a:solidFill>
-                  <a:srgbClr val="166534"/>
+                  <a:srgbClr val="A5335F"/>
                 </a:solidFill>
                 <a:latin typeface="Verdana"/>
               </a:rPr>
@@ -24810,7 +24810,7 @@
             <a:r>
               <a:rPr sz="2300" b="1" i="0">
                 <a:solidFill>
-                  <a:srgbClr val="166534"/>
+                  <a:srgbClr val="A5335F"/>
                 </a:solidFill>
                 <a:latin typeface="Verdana"/>
               </a:rPr>
@@ -25026,7 +25026,7 @@
             <a:r>
               <a:rPr sz="1300" b="1" i="0" spc="156">
                 <a:solidFill>
-                  <a:srgbClr val="166534"/>
+                  <a:srgbClr val="A5335F"/>
                 </a:solidFill>
                 <a:latin typeface="Verdana"/>
               </a:rPr>
@@ -25176,7 +25176,7 @@
             </a:avLst>
           </a:prstGeom>
           <a:solidFill>
-            <a:srgbClr val="E3F1E7"/>
+            <a:srgbClr val="FCE9F0"/>
           </a:solidFill>
           <a:ln>
             <a:noFill/>
@@ -25233,7 +25233,7 @@
             <a:r>
               <a:rPr sz="1500" b="1" i="0">
                 <a:solidFill>
-                  <a:srgbClr val="166534"/>
+                  <a:srgbClr val="A5335F"/>
                 </a:solidFill>
                 <a:latin typeface="Verdana"/>
               </a:rPr>
@@ -25344,7 +25344,7 @@
             </a:avLst>
           </a:prstGeom>
           <a:solidFill>
-            <a:srgbClr val="E3F1E7"/>
+            <a:srgbClr val="FCE9F0"/>
           </a:solidFill>
           <a:ln>
             <a:noFill/>
@@ -25401,7 +25401,7 @@
             <a:r>
               <a:rPr sz="1500" b="1" i="0">
                 <a:solidFill>
-                  <a:srgbClr val="166534"/>
+                  <a:srgbClr val="A5335F"/>
                 </a:solidFill>
                 <a:latin typeface="Verdana"/>
               </a:rPr>
@@ -25512,7 +25512,7 @@
             </a:avLst>
           </a:prstGeom>
           <a:solidFill>
-            <a:srgbClr val="E3F1E7"/>
+            <a:srgbClr val="FCE9F0"/>
           </a:solidFill>
           <a:ln>
             <a:noFill/>
@@ -25569,7 +25569,7 @@
             <a:r>
               <a:rPr sz="1500" b="1" i="0">
                 <a:solidFill>
-                  <a:srgbClr val="166534"/>
+                  <a:srgbClr val="A5335F"/>
                 </a:solidFill>
                 <a:latin typeface="Verdana"/>
               </a:rPr>
@@ -25680,7 +25680,7 @@
             </a:avLst>
           </a:prstGeom>
           <a:solidFill>
-            <a:srgbClr val="E3F1E7"/>
+            <a:srgbClr val="FCE9F0"/>
           </a:solidFill>
           <a:ln>
             <a:noFill/>
@@ -25737,7 +25737,7 @@
             <a:r>
               <a:rPr sz="1500" b="1" i="0">
                 <a:solidFill>
-                  <a:srgbClr val="166534"/>
+                  <a:srgbClr val="A5335F"/>
                 </a:solidFill>
                 <a:latin typeface="Verdana"/>
               </a:rPr>
@@ -25848,7 +25848,7 @@
             </a:avLst>
           </a:prstGeom>
           <a:solidFill>
-            <a:srgbClr val="E3F1E7"/>
+            <a:srgbClr val="FCE9F0"/>
           </a:solidFill>
           <a:ln>
             <a:noFill/>
@@ -25905,7 +25905,7 @@
             <a:r>
               <a:rPr sz="1500" b="1" i="0">
                 <a:solidFill>
-                  <a:srgbClr val="166534"/>
+                  <a:srgbClr val="A5335F"/>
                 </a:solidFill>
                 <a:latin typeface="Verdana"/>
               </a:rPr>

--- a/assets/powerpoints/module-logement/A2-le-vocabulaire-du-logement.pptx
+++ b/assets/powerpoints/module-logement/A2-le-vocabulaire-du-logement.pptx
@@ -24318,7 +24318,7 @@
                 </a:solidFill>
                 <a:latin typeface="Verdana"/>
               </a:rPr>
-              <a:t>EN APPRENDRE PLUS</a:t>
+              <a:t>OUVRIR LA MINI-LEÇON</a:t>
             </a:r>
           </a:p>
         </p:txBody>
